--- a/Autó Kozmetika orai DB.pptx
+++ b/Autó Kozmetika orai DB.pptx
@@ -5,26 +5,31 @@
     <p:sldMasterId id="2147483880" r:id="rId1"/>
   </p:sldMasterIdLst>
   <p:notesMasterIdLst>
-    <p:notesMasterId r:id="rId19"/>
+    <p:notesMasterId r:id="rId24"/>
   </p:notesMasterIdLst>
   <p:sldIdLst>
     <p:sldId id="256" r:id="rId2"/>
     <p:sldId id="257" r:id="rId3"/>
-    <p:sldId id="258" r:id="rId4"/>
-    <p:sldId id="260" r:id="rId5"/>
-    <p:sldId id="261" r:id="rId6"/>
-    <p:sldId id="259" r:id="rId7"/>
-    <p:sldId id="262" r:id="rId8"/>
-    <p:sldId id="263" r:id="rId9"/>
-    <p:sldId id="264" r:id="rId10"/>
-    <p:sldId id="265" r:id="rId11"/>
-    <p:sldId id="269" r:id="rId12"/>
-    <p:sldId id="270" r:id="rId13"/>
-    <p:sldId id="266" r:id="rId14"/>
-    <p:sldId id="267" r:id="rId15"/>
-    <p:sldId id="271" r:id="rId16"/>
-    <p:sldId id="268" r:id="rId17"/>
-    <p:sldId id="272" r:id="rId18"/>
+    <p:sldId id="273" r:id="rId4"/>
+    <p:sldId id="258" r:id="rId5"/>
+    <p:sldId id="260" r:id="rId6"/>
+    <p:sldId id="261" r:id="rId7"/>
+    <p:sldId id="259" r:id="rId8"/>
+    <p:sldId id="262" r:id="rId9"/>
+    <p:sldId id="263" r:id="rId10"/>
+    <p:sldId id="264" r:id="rId11"/>
+    <p:sldId id="265" r:id="rId12"/>
+    <p:sldId id="269" r:id="rId13"/>
+    <p:sldId id="270" r:id="rId14"/>
+    <p:sldId id="266" r:id="rId15"/>
+    <p:sldId id="267" r:id="rId16"/>
+    <p:sldId id="271" r:id="rId17"/>
+    <p:sldId id="268" r:id="rId18"/>
+    <p:sldId id="274" r:id="rId19"/>
+    <p:sldId id="272" r:id="rId20"/>
+    <p:sldId id="275" r:id="rId21"/>
+    <p:sldId id="276" r:id="rId22"/>
+    <p:sldId id="277" r:id="rId23"/>
   </p:sldIdLst>
   <p:sldSz cx="12192000" cy="6858000"/>
   <p:notesSz cx="6858000" cy="9144000"/>
@@ -141,14 +146,6 @@
     </p:extLst>
   </p:cmAuthor>
 </p:cmAuthorLst>
-</file>
-
-<file path=ppt/revisionInfo.xml><?xml version="1.0" encoding="utf-8"?>
-<p1510:revInfo xmlns:a="http://schemas.openxmlformats.org/drawingml/2006/main" xmlns:r="http://schemas.openxmlformats.org/officeDocument/2006/relationships" xmlns:p1510="http://schemas.microsoft.com/office/powerpoint/2015/10/main">
-  <p1510:revLst>
-    <p1510:client id="{63D98F52-7DA6-4A64-9BF1-399F92453EED}" v="96" dt="2026-09-27T13:20:17.075"/>
-  </p1510:revLst>
-</p1510:revInfo>
 </file>
 
 <file path=ppt/notesMasters/notesMaster1.xml><?xml version="1.0" encoding="utf-8"?>
@@ -12894,6 +12891,14 @@
 <file path=ppt/slides/slide1.xml><?xml version="1.0" encoding="utf-8"?>
 <p:sld xmlns:a="http://schemas.openxmlformats.org/drawingml/2006/main" xmlns:r="http://schemas.openxmlformats.org/officeDocument/2006/relationships" xmlns:p="http://schemas.openxmlformats.org/presentationml/2006/main">
   <p:cSld>
+    <p:bg>
+      <p:bgPr>
+        <a:solidFill>
+          <a:schemeClr val="bg1"/>
+        </a:solidFill>
+        <a:effectLst/>
+      </p:bgPr>
+    </p:bg>
     <p:spTree>
       <p:nvGrpSpPr>
         <p:cNvPr id="1" name=""/>
@@ -13108,12 +13113,32 @@
   <p:clrMapOvr>
     <a:masterClrMapping/>
   </p:clrMapOvr>
+  <mc:AlternateContent xmlns:mc="http://schemas.openxmlformats.org/markup-compatibility/2006">
+    <mc:Choice xmlns:p14="http://schemas.microsoft.com/office/powerpoint/2010/main" Requires="p14">
+      <p:transition spd="med" p14:dur="700">
+        <p:fade/>
+      </p:transition>
+    </mc:Choice>
+    <mc:Fallback>
+      <p:transition spd="med">
+        <p:fade/>
+      </p:transition>
+    </mc:Fallback>
+  </mc:AlternateContent>
 </p:sld>
 </file>
 
 <file path=ppt/slides/slide10.xml><?xml version="1.0" encoding="utf-8"?>
 <p:sld xmlns:a="http://schemas.openxmlformats.org/drawingml/2006/main" xmlns:r="http://schemas.openxmlformats.org/officeDocument/2006/relationships" xmlns:p="http://schemas.openxmlformats.org/presentationml/2006/main">
   <p:cSld>
+    <p:bg>
+      <p:bgPr>
+        <a:solidFill>
+          <a:schemeClr val="bg1"/>
+        </a:solidFill>
+        <a:effectLst/>
+      </p:bgPr>
+    </p:bg>
     <p:spTree>
       <p:nvGrpSpPr>
         <p:cNvPr id="1" name=""/>
@@ -13133,7 +13158,7 @@
           <p:cNvPr id="2" name="Cím 1">
             <a:extLst>
               <a:ext uri="{FF2B5EF4-FFF2-40B4-BE49-F238E27FC236}">
-                <a16:creationId xmlns:a16="http://schemas.microsoft.com/office/drawing/2014/main" id="{ABA6C07D-936C-48B1-9601-04E51CD01B8D}"/>
+                <a16:creationId xmlns:a16="http://schemas.microsoft.com/office/drawing/2014/main" id="{CC44354D-C145-4299-978C-0A76F64E1393}"/>
               </a:ext>
             </a:extLst>
           </p:cNvPr>
@@ -13146,62 +13171,170 @@
         </p:nvSpPr>
         <p:spPr>
           <a:xfrm>
-            <a:off x="1313429" y="0"/>
-            <a:ext cx="9905998" cy="1478570"/>
+            <a:off x="3906715" y="0"/>
+            <a:ext cx="10515600" cy="1072662"/>
           </a:xfrm>
         </p:spPr>
         <p:txBody>
-          <a:bodyPr/>
+          <a:bodyPr>
+            <a:normAutofit/>
+          </a:bodyPr>
           <a:lstStyle/>
           <a:p>
             <a:r>
-              <a:rPr lang="hu-HU" dirty="0"/>
-              <a:t>Backend</a:t>
-            </a:r>
-          </a:p>
-        </p:txBody>
-      </p:sp>
-      <p:sp>
-        <p:nvSpPr>
-          <p:cNvPr id="3" name="Tartalom helye 2">
+              <a:rPr lang="hu-HU" sz="2200" b="1" i="0" u="sng" dirty="0">
+                <a:latin typeface="Calibri Light"/>
+                <a:ea typeface="Calibri Light"/>
+                <a:cs typeface="Calibri Light"/>
+              </a:rPr>
+              <a:t>Mentés és monitorozás </a:t>
+            </a:r>
+            <a:br>
+              <a:rPr lang="hu-HU" sz="4400" b="1" i="0" u="sng" dirty="0">
+                <a:latin typeface="Calibri Light"/>
+                <a:ea typeface="Calibri Light"/>
+                <a:cs typeface="Calibri Light"/>
+              </a:rPr>
+            </a:br>
+            <a:endParaRPr lang="hu-HU" dirty="0"/>
+          </a:p>
+        </p:txBody>
+      </p:sp>
+      <p:sp>
+        <p:nvSpPr>
+          <p:cNvPr id="5" name="Szövegdoboz 4">
             <a:extLst>
               <a:ext uri="{FF2B5EF4-FFF2-40B4-BE49-F238E27FC236}">
-                <a16:creationId xmlns:a16="http://schemas.microsoft.com/office/drawing/2014/main" id="{99AA7804-03FC-4B96-B487-751624FEC037}"/>
+                <a16:creationId xmlns:a16="http://schemas.microsoft.com/office/drawing/2014/main" id="{CCD4E8FD-E6D5-455B-91EE-17EA00B1F793}"/>
               </a:ext>
             </a:extLst>
           </p:cNvPr>
-          <p:cNvSpPr>
-            <a:spLocks noGrp="1"/>
-          </p:cNvSpPr>
-          <p:nvPr>
-            <p:ph idx="1"/>
-          </p:nvPr>
-        </p:nvSpPr>
-        <p:spPr/>
-        <p:txBody>
-          <a:bodyPr/>
+          <p:cNvSpPr txBox="1"/>
+          <p:nvPr/>
+        </p:nvSpPr>
+        <p:spPr>
+          <a:xfrm>
+            <a:off x="6096000" y="5486335"/>
+            <a:ext cx="6137030" cy="861774"/>
+          </a:xfrm>
+          <a:prstGeom prst="rect">
+            <a:avLst/>
+          </a:prstGeom>
+          <a:noFill/>
+        </p:spPr>
+        <p:txBody>
+          <a:bodyPr wrap="square">
+            <a:spAutoFit/>
+          </a:bodyPr>
           <a:lstStyle/>
           <a:p>
-            <a:endParaRPr lang="hu-HU"/>
+            <a:pPr marL="228600" lvl="0" indent="-228600" algn="l" rtl="0">
+              <a:lnSpc>
+                <a:spcPts val="2025"/>
+              </a:lnSpc>
+              <a:buFont typeface="Symbol"/>
+              <a:buChar char="•"/>
+            </a:pPr>
+            <a:r>
+              <a:rPr lang="hu-HU" sz="1800" b="1" i="0" dirty="0">
+                <a:latin typeface="Arial"/>
+                <a:ea typeface="Arial"/>
+                <a:cs typeface="Arial"/>
+              </a:rPr>
+              <a:t>Adatmentés:</a:t>
+            </a:r>
+            <a:r>
+              <a:rPr lang="hu-HU" sz="1800" b="0" i="0" dirty="0">
+                <a:latin typeface="Arial"/>
+                <a:ea typeface="Arial"/>
+                <a:cs typeface="Arial"/>
+              </a:rPr>
+              <a:t> Heti automatikus biztonsági mentés a weboldal fájljairól és az adatbázisról az esetleges adatvesztés megelőzésére. </a:t>
+            </a:r>
+          </a:p>
+        </p:txBody>
+      </p:sp>
+      <p:sp>
+        <p:nvSpPr>
+          <p:cNvPr id="7" name="Szövegdoboz 6">
+            <a:extLst>
+              <a:ext uri="{FF2B5EF4-FFF2-40B4-BE49-F238E27FC236}">
+                <a16:creationId xmlns:a16="http://schemas.microsoft.com/office/drawing/2014/main" id="{868FB8AF-B6E3-49A3-A91C-E931BB353323}"/>
+              </a:ext>
+            </a:extLst>
+          </p:cNvPr>
+          <p:cNvSpPr txBox="1"/>
+          <p:nvPr/>
+        </p:nvSpPr>
+        <p:spPr>
+          <a:xfrm>
+            <a:off x="0" y="1488421"/>
+            <a:ext cx="6137030" cy="861774"/>
+          </a:xfrm>
+          <a:prstGeom prst="rect">
+            <a:avLst/>
+          </a:prstGeom>
+          <a:noFill/>
+        </p:spPr>
+        <p:txBody>
+          <a:bodyPr wrap="square">
+            <a:spAutoFit/>
+          </a:bodyPr>
+          <a:lstStyle/>
+          <a:p>
+            <a:pPr marL="228600" lvl="0" indent="-228600" algn="l" rtl="0">
+              <a:lnSpc>
+                <a:spcPts val="2025"/>
+              </a:lnSpc>
+              <a:buFont typeface="Symbol"/>
+              <a:buChar char="•"/>
+            </a:pPr>
+            <a:r>
+              <a:rPr lang="hu-HU" sz="1800" b="1" i="0" dirty="0">
+                <a:latin typeface="Arial"/>
+                <a:ea typeface="Arial"/>
+                <a:cs typeface="Arial"/>
+              </a:rPr>
+              <a:t>Monitorozás:</a:t>
+            </a:r>
+            <a:r>
+              <a:rPr lang="hu-HU" sz="1800" b="0" i="0" dirty="0">
+                <a:latin typeface="Arial"/>
+                <a:ea typeface="Arial"/>
+                <a:cs typeface="Arial"/>
+              </a:rPr>
+              <a:t> Weboldal elérhetőségének ellenőrzése és SSL-tanúsítvány (biztonságos HTTPS kapcsolat) folyamatos felügyelete. </a:t>
+            </a:r>
           </a:p>
         </p:txBody>
       </p:sp>
     </p:spTree>
     <p:extLst>
       <p:ext uri="{BB962C8B-B14F-4D97-AF65-F5344CB8AC3E}">
-        <p14:creationId xmlns:p14="http://schemas.microsoft.com/office/powerpoint/2010/main" val="343670221"/>
+        <p14:creationId xmlns:p14="http://schemas.microsoft.com/office/powerpoint/2010/main" val="717366566"/>
       </p:ext>
     </p:extLst>
   </p:cSld>
   <p:clrMapOvr>
     <a:masterClrMapping/>
   </p:clrMapOvr>
+  <p:transition spd="slow">
+    <p:cover/>
+  </p:transition>
 </p:sld>
 </file>
 
 <file path=ppt/slides/slide11.xml><?xml version="1.0" encoding="utf-8"?>
 <p:sld xmlns:a="http://schemas.openxmlformats.org/drawingml/2006/main" xmlns:r="http://schemas.openxmlformats.org/officeDocument/2006/relationships" xmlns:p="http://schemas.openxmlformats.org/presentationml/2006/main">
   <p:cSld>
+    <p:bg>
+      <p:bgPr>
+        <a:solidFill>
+          <a:schemeClr val="bg1"/>
+        </a:solidFill>
+        <a:effectLst/>
+      </p:bgPr>
+    </p:bg>
     <p:spTree>
       <p:nvGrpSpPr>
         <p:cNvPr id="1" name=""/>
@@ -13221,7 +13354,7 @@
           <p:cNvPr id="2" name="Cím 1">
             <a:extLst>
               <a:ext uri="{FF2B5EF4-FFF2-40B4-BE49-F238E27FC236}">
-                <a16:creationId xmlns:a16="http://schemas.microsoft.com/office/drawing/2014/main" id="{B93D941C-60FF-4834-939C-7F86F125BE89}"/>
+                <a16:creationId xmlns:a16="http://schemas.microsoft.com/office/drawing/2014/main" id="{ABA6C07D-936C-48B1-9601-04E51CD01B8D}"/>
               </a:ext>
             </a:extLst>
           </p:cNvPr>
@@ -13234,7 +13367,7 @@
         </p:nvSpPr>
         <p:spPr>
           <a:xfrm>
-            <a:off x="1273297" y="249242"/>
+            <a:off x="1313429" y="0"/>
             <a:ext cx="9905998" cy="1478570"/>
           </a:xfrm>
         </p:spPr>
@@ -13243,10 +13376,11 @@
           <a:lstStyle/>
           <a:p>
             <a:r>
-              <a:rPr lang="hu-HU" dirty="0" err="1"/>
-              <a:t>Model</a:t>
-            </a:r>
-            <a:endParaRPr lang="hu-HU" dirty="0"/>
+              <a:rPr lang="hu-HU" dirty="0">
+                <a:latin typeface="Consolas" panose="020B0609020204030204" pitchFamily="49" charset="0"/>
+              </a:rPr>
+              <a:t>Backend</a:t>
+            </a:r>
           </a:p>
         </p:txBody>
       </p:sp>
@@ -13255,7 +13389,7 @@
           <p:cNvPr id="3" name="Tartalom helye 2">
             <a:extLst>
               <a:ext uri="{FF2B5EF4-FFF2-40B4-BE49-F238E27FC236}">
-                <a16:creationId xmlns:a16="http://schemas.microsoft.com/office/drawing/2014/main" id="{9AEF5B5A-8B7E-4A67-8F3B-79C1D93E16A4}"/>
+                <a16:creationId xmlns:a16="http://schemas.microsoft.com/office/drawing/2014/main" id="{99AA7804-03FC-4B96-B487-751624FEC037}"/>
               </a:ext>
             </a:extLst>
           </p:cNvPr>
@@ -13278,19 +13412,30 @@
     </p:spTree>
     <p:extLst>
       <p:ext uri="{BB962C8B-B14F-4D97-AF65-F5344CB8AC3E}">
-        <p14:creationId xmlns:p14="http://schemas.microsoft.com/office/powerpoint/2010/main" val="3271680757"/>
+        <p14:creationId xmlns:p14="http://schemas.microsoft.com/office/powerpoint/2010/main" val="343670221"/>
       </p:ext>
     </p:extLst>
   </p:cSld>
   <p:clrMapOvr>
     <a:masterClrMapping/>
   </p:clrMapOvr>
+  <p:transition spd="slow">
+    <p:cover/>
+  </p:transition>
 </p:sld>
 </file>
 
 <file path=ppt/slides/slide12.xml><?xml version="1.0" encoding="utf-8"?>
 <p:sld xmlns:a="http://schemas.openxmlformats.org/drawingml/2006/main" xmlns:r="http://schemas.openxmlformats.org/officeDocument/2006/relationships" xmlns:p="http://schemas.openxmlformats.org/presentationml/2006/main">
   <p:cSld>
+    <p:bg>
+      <p:bgPr>
+        <a:solidFill>
+          <a:schemeClr val="bg1"/>
+        </a:solidFill>
+        <a:effectLst/>
+      </p:bgPr>
+    </p:bg>
     <p:spTree>
       <p:nvGrpSpPr>
         <p:cNvPr id="1" name=""/>
@@ -13310,7 +13455,7 @@
           <p:cNvPr id="2" name="Cím 1">
             <a:extLst>
               <a:ext uri="{FF2B5EF4-FFF2-40B4-BE49-F238E27FC236}">
-                <a16:creationId xmlns:a16="http://schemas.microsoft.com/office/drawing/2014/main" id="{EA7AA373-A165-4D8C-84B8-0E688A0D4225}"/>
+                <a16:creationId xmlns:a16="http://schemas.microsoft.com/office/drawing/2014/main" id="{B93D941C-60FF-4834-939C-7F86F125BE89}"/>
               </a:ext>
             </a:extLst>
           </p:cNvPr>
@@ -13321,14 +13466,19 @@
             <p:ph type="title"/>
           </p:nvPr>
         </p:nvSpPr>
-        <p:spPr/>
+        <p:spPr>
+          <a:xfrm>
+            <a:off x="1273297" y="249242"/>
+            <a:ext cx="9905998" cy="1478570"/>
+          </a:xfrm>
+        </p:spPr>
         <p:txBody>
           <a:bodyPr/>
           <a:lstStyle/>
           <a:p>
             <a:r>
               <a:rPr lang="hu-HU" dirty="0" err="1"/>
-              <a:t>COntroller</a:t>
+              <a:t>Model</a:t>
             </a:r>
             <a:endParaRPr lang="hu-HU" dirty="0"/>
           </a:p>
@@ -13339,7 +13489,7 @@
           <p:cNvPr id="3" name="Tartalom helye 2">
             <a:extLst>
               <a:ext uri="{FF2B5EF4-FFF2-40B4-BE49-F238E27FC236}">
-                <a16:creationId xmlns:a16="http://schemas.microsoft.com/office/drawing/2014/main" id="{AC9C6DDB-563E-40A6-8FAC-CD0B6B42224D}"/>
+                <a16:creationId xmlns:a16="http://schemas.microsoft.com/office/drawing/2014/main" id="{9AEF5B5A-8B7E-4A67-8F3B-79C1D93E16A4}"/>
               </a:ext>
             </a:extLst>
           </p:cNvPr>
@@ -13362,19 +13512,30 @@
     </p:spTree>
     <p:extLst>
       <p:ext uri="{BB962C8B-B14F-4D97-AF65-F5344CB8AC3E}">
-        <p14:creationId xmlns:p14="http://schemas.microsoft.com/office/powerpoint/2010/main" val="2340324983"/>
+        <p14:creationId xmlns:p14="http://schemas.microsoft.com/office/powerpoint/2010/main" val="3271680757"/>
       </p:ext>
     </p:extLst>
   </p:cSld>
   <p:clrMapOvr>
     <a:masterClrMapping/>
   </p:clrMapOvr>
+  <p:transition spd="slow">
+    <p:cover/>
+  </p:transition>
 </p:sld>
 </file>
 
 <file path=ppt/slides/slide13.xml><?xml version="1.0" encoding="utf-8"?>
 <p:sld xmlns:a="http://schemas.openxmlformats.org/drawingml/2006/main" xmlns:r="http://schemas.openxmlformats.org/officeDocument/2006/relationships" xmlns:p="http://schemas.openxmlformats.org/presentationml/2006/main">
   <p:cSld>
+    <p:bg>
+      <p:bgPr>
+        <a:solidFill>
+          <a:schemeClr val="bg1"/>
+        </a:solidFill>
+        <a:effectLst/>
+      </p:bgPr>
+    </p:bg>
     <p:spTree>
       <p:nvGrpSpPr>
         <p:cNvPr id="1" name=""/>
@@ -13394,7 +13555,7 @@
           <p:cNvPr id="2" name="Cím 1">
             <a:extLst>
               <a:ext uri="{FF2B5EF4-FFF2-40B4-BE49-F238E27FC236}">
-                <a16:creationId xmlns:a16="http://schemas.microsoft.com/office/drawing/2014/main" id="{5CBF5992-E286-4551-B5A7-C2128A383682}"/>
+                <a16:creationId xmlns:a16="http://schemas.microsoft.com/office/drawing/2014/main" id="{EA7AA373-A165-4D8C-84B8-0E688A0D4225}"/>
               </a:ext>
             </a:extLst>
           </p:cNvPr>
@@ -13407,7 +13568,7 @@
         </p:nvSpPr>
         <p:spPr>
           <a:xfrm>
-            <a:off x="1202959" y="8792"/>
+            <a:off x="1216827" y="458262"/>
             <a:ext cx="9905998" cy="1478570"/>
           </a:xfrm>
         </p:spPr>
@@ -13416,9 +13577,10 @@
           <a:lstStyle/>
           <a:p>
             <a:r>
-              <a:rPr lang="hu-HU" dirty="0"/>
-              <a:t>Frontend</a:t>
-            </a:r>
+              <a:rPr lang="hu-HU" dirty="0" err="1"/>
+              <a:t>COntroller</a:t>
+            </a:r>
+            <a:endParaRPr lang="hu-HU" dirty="0"/>
           </a:p>
         </p:txBody>
       </p:sp>
@@ -13427,7 +13589,7 @@
           <p:cNvPr id="3" name="Tartalom helye 2">
             <a:extLst>
               <a:ext uri="{FF2B5EF4-FFF2-40B4-BE49-F238E27FC236}">
-                <a16:creationId xmlns:a16="http://schemas.microsoft.com/office/drawing/2014/main" id="{F8E22D6A-0B0C-46CE-B1A7-609055FB3751}"/>
+                <a16:creationId xmlns:a16="http://schemas.microsoft.com/office/drawing/2014/main" id="{AC9C6DDB-563E-40A6-8FAC-CD0B6B42224D}"/>
               </a:ext>
             </a:extLst>
           </p:cNvPr>
@@ -13443,26 +13605,37 @@
           <a:bodyPr/>
           <a:lstStyle/>
           <a:p>
-            <a:endParaRPr lang="hu-HU"/>
+            <a:endParaRPr lang="hu-HU" dirty="0"/>
           </a:p>
         </p:txBody>
       </p:sp>
     </p:spTree>
     <p:extLst>
       <p:ext uri="{BB962C8B-B14F-4D97-AF65-F5344CB8AC3E}">
-        <p14:creationId xmlns:p14="http://schemas.microsoft.com/office/powerpoint/2010/main" val="2611633422"/>
+        <p14:creationId xmlns:p14="http://schemas.microsoft.com/office/powerpoint/2010/main" val="2340324983"/>
       </p:ext>
     </p:extLst>
   </p:cSld>
   <p:clrMapOvr>
     <a:masterClrMapping/>
   </p:clrMapOvr>
+  <p:transition spd="slow">
+    <p:cover/>
+  </p:transition>
 </p:sld>
 </file>
 
 <file path=ppt/slides/slide14.xml><?xml version="1.0" encoding="utf-8"?>
 <p:sld xmlns:a="http://schemas.openxmlformats.org/drawingml/2006/main" xmlns:r="http://schemas.openxmlformats.org/officeDocument/2006/relationships" xmlns:p="http://schemas.openxmlformats.org/presentationml/2006/main">
   <p:cSld>
+    <p:bg>
+      <p:bgPr>
+        <a:solidFill>
+          <a:schemeClr val="bg1"/>
+        </a:solidFill>
+        <a:effectLst/>
+      </p:bgPr>
+    </p:bg>
     <p:spTree>
       <p:nvGrpSpPr>
         <p:cNvPr id="1" name=""/>
@@ -13482,7 +13655,7 @@
           <p:cNvPr id="2" name="Cím 1">
             <a:extLst>
               <a:ext uri="{FF2B5EF4-FFF2-40B4-BE49-F238E27FC236}">
-                <a16:creationId xmlns:a16="http://schemas.microsoft.com/office/drawing/2014/main" id="{BEA80D85-8A8C-4396-9FCA-3C5BAF136D2B}"/>
+                <a16:creationId xmlns:a16="http://schemas.microsoft.com/office/drawing/2014/main" id="{5CBF5992-E286-4551-B5A7-C2128A383682}"/>
               </a:ext>
             </a:extLst>
           </p:cNvPr>
@@ -13495,7 +13668,7 @@
         </p:nvSpPr>
         <p:spPr>
           <a:xfrm>
-            <a:off x="1308467" y="0"/>
+            <a:off x="1202959" y="8792"/>
             <a:ext cx="9905998" cy="1478570"/>
           </a:xfrm>
         </p:spPr>
@@ -13505,7 +13678,7 @@
           <a:p>
             <a:r>
               <a:rPr lang="hu-HU" dirty="0"/>
-              <a:t>Adatbázis</a:t>
+              <a:t>Frontend</a:t>
             </a:r>
           </a:p>
         </p:txBody>
@@ -13515,7 +13688,7 @@
           <p:cNvPr id="3" name="Tartalom helye 2">
             <a:extLst>
               <a:ext uri="{FF2B5EF4-FFF2-40B4-BE49-F238E27FC236}">
-                <a16:creationId xmlns:a16="http://schemas.microsoft.com/office/drawing/2014/main" id="{1E33C9C0-2421-48F6-A3E2-3CA6D50B6527}"/>
+                <a16:creationId xmlns:a16="http://schemas.microsoft.com/office/drawing/2014/main" id="{F8E22D6A-0B0C-46CE-B1A7-609055FB3751}"/>
               </a:ext>
             </a:extLst>
           </p:cNvPr>
@@ -13538,19 +13711,30 @@
     </p:spTree>
     <p:extLst>
       <p:ext uri="{BB962C8B-B14F-4D97-AF65-F5344CB8AC3E}">
-        <p14:creationId xmlns:p14="http://schemas.microsoft.com/office/powerpoint/2010/main" val="2927270018"/>
+        <p14:creationId xmlns:p14="http://schemas.microsoft.com/office/powerpoint/2010/main" val="2611633422"/>
       </p:ext>
     </p:extLst>
   </p:cSld>
   <p:clrMapOvr>
     <a:masterClrMapping/>
   </p:clrMapOvr>
+  <p:transition spd="slow">
+    <p:cover/>
+  </p:transition>
 </p:sld>
 </file>
 
 <file path=ppt/slides/slide15.xml><?xml version="1.0" encoding="utf-8"?>
 <p:sld xmlns:a="http://schemas.openxmlformats.org/drawingml/2006/main" xmlns:r="http://schemas.openxmlformats.org/officeDocument/2006/relationships" xmlns:p="http://schemas.openxmlformats.org/presentationml/2006/main">
   <p:cSld>
+    <p:bg>
+      <p:bgPr>
+        <a:solidFill>
+          <a:schemeClr val="bg1"/>
+        </a:solidFill>
+        <a:effectLst/>
+      </p:bgPr>
+    </p:bg>
     <p:spTree>
       <p:nvGrpSpPr>
         <p:cNvPr id="1" name=""/>
@@ -13570,7 +13754,7 @@
           <p:cNvPr id="2" name="Cím 1">
             <a:extLst>
               <a:ext uri="{FF2B5EF4-FFF2-40B4-BE49-F238E27FC236}">
-                <a16:creationId xmlns:a16="http://schemas.microsoft.com/office/drawing/2014/main" id="{67C92FB1-53FB-4A49-BE5D-FC54861ED810}"/>
+                <a16:creationId xmlns:a16="http://schemas.microsoft.com/office/drawing/2014/main" id="{BEA80D85-8A8C-4396-9FCA-3C5BAF136D2B}"/>
               </a:ext>
             </a:extLst>
           </p:cNvPr>
@@ -13583,7 +13767,7 @@
         </p:nvSpPr>
         <p:spPr>
           <a:xfrm>
-            <a:off x="1202960" y="152526"/>
+            <a:off x="1308467" y="0"/>
             <a:ext cx="9905998" cy="1478570"/>
           </a:xfrm>
         </p:spPr>
@@ -13592,10 +13776,9 @@
           <a:lstStyle/>
           <a:p>
             <a:r>
-              <a:rPr lang="hu-HU" dirty="0" err="1"/>
-              <a:t>Responsivity</a:t>
-            </a:r>
-            <a:endParaRPr lang="hu-HU" dirty="0"/>
+              <a:rPr lang="hu-HU" dirty="0"/>
+              <a:t>Adatbázis</a:t>
+            </a:r>
           </a:p>
         </p:txBody>
       </p:sp>
@@ -13604,7 +13787,7 @@
           <p:cNvPr id="3" name="Tartalom helye 2">
             <a:extLst>
               <a:ext uri="{FF2B5EF4-FFF2-40B4-BE49-F238E27FC236}">
-                <a16:creationId xmlns:a16="http://schemas.microsoft.com/office/drawing/2014/main" id="{A40F42F2-35ED-4C80-B3A4-C030BDA81DC1}"/>
+                <a16:creationId xmlns:a16="http://schemas.microsoft.com/office/drawing/2014/main" id="{1E33C9C0-2421-48F6-A3E2-3CA6D50B6527}"/>
               </a:ext>
             </a:extLst>
           </p:cNvPr>
@@ -13627,19 +13810,30 @@
     </p:spTree>
     <p:extLst>
       <p:ext uri="{BB962C8B-B14F-4D97-AF65-F5344CB8AC3E}">
-        <p14:creationId xmlns:p14="http://schemas.microsoft.com/office/powerpoint/2010/main" val="1855336410"/>
+        <p14:creationId xmlns:p14="http://schemas.microsoft.com/office/powerpoint/2010/main" val="2927270018"/>
       </p:ext>
     </p:extLst>
   </p:cSld>
   <p:clrMapOvr>
     <a:masterClrMapping/>
   </p:clrMapOvr>
+  <p:transition spd="slow">
+    <p:cover/>
+  </p:transition>
 </p:sld>
 </file>
 
 <file path=ppt/slides/slide16.xml><?xml version="1.0" encoding="utf-8"?>
 <p:sld xmlns:a="http://schemas.openxmlformats.org/drawingml/2006/main" xmlns:r="http://schemas.openxmlformats.org/officeDocument/2006/relationships" xmlns:p="http://schemas.openxmlformats.org/presentationml/2006/main">
   <p:cSld>
+    <p:bg>
+      <p:bgPr>
+        <a:solidFill>
+          <a:schemeClr val="bg1"/>
+        </a:solidFill>
+        <a:effectLst/>
+      </p:bgPr>
+    </p:bg>
     <p:spTree>
       <p:nvGrpSpPr>
         <p:cNvPr id="1" name=""/>
@@ -13659,7 +13853,7 @@
           <p:cNvPr id="2" name="Cím 1">
             <a:extLst>
               <a:ext uri="{FF2B5EF4-FFF2-40B4-BE49-F238E27FC236}">
-                <a16:creationId xmlns:a16="http://schemas.microsoft.com/office/drawing/2014/main" id="{570A90FB-1D3C-4342-B810-356DECA1BDF3}"/>
+                <a16:creationId xmlns:a16="http://schemas.microsoft.com/office/drawing/2014/main" id="{67C92FB1-53FB-4A49-BE5D-FC54861ED810}"/>
               </a:ext>
             </a:extLst>
           </p:cNvPr>
@@ -13672,7 +13866,7 @@
         </p:nvSpPr>
         <p:spPr>
           <a:xfrm>
-            <a:off x="1141413" y="0"/>
+            <a:off x="1202960" y="152526"/>
             <a:ext cx="9905998" cy="1478570"/>
           </a:xfrm>
         </p:spPr>
@@ -13681,9 +13875,10 @@
           <a:lstStyle/>
           <a:p>
             <a:r>
-              <a:rPr lang="hu-HU" dirty="0"/>
-              <a:t>Tesztelés</a:t>
-            </a:r>
+              <a:rPr lang="hu-HU" dirty="0" err="1"/>
+              <a:t>Responsivity</a:t>
+            </a:r>
+            <a:endParaRPr lang="hu-HU" dirty="0"/>
           </a:p>
         </p:txBody>
       </p:sp>
@@ -13692,7 +13887,7 @@
           <p:cNvPr id="3" name="Tartalom helye 2">
             <a:extLst>
               <a:ext uri="{FF2B5EF4-FFF2-40B4-BE49-F238E27FC236}">
-                <a16:creationId xmlns:a16="http://schemas.microsoft.com/office/drawing/2014/main" id="{BA4510F1-2C47-4DF1-A6B3-8A8DFD532A7F}"/>
+                <a16:creationId xmlns:a16="http://schemas.microsoft.com/office/drawing/2014/main" id="{A40F42F2-35ED-4C80-B3A4-C030BDA81DC1}"/>
               </a:ext>
             </a:extLst>
           </p:cNvPr>
@@ -13715,19 +13910,30 @@
     </p:spTree>
     <p:extLst>
       <p:ext uri="{BB962C8B-B14F-4D97-AF65-F5344CB8AC3E}">
-        <p14:creationId xmlns:p14="http://schemas.microsoft.com/office/powerpoint/2010/main" val="1795804418"/>
+        <p14:creationId xmlns:p14="http://schemas.microsoft.com/office/powerpoint/2010/main" val="1855336410"/>
       </p:ext>
     </p:extLst>
   </p:cSld>
   <p:clrMapOvr>
     <a:masterClrMapping/>
   </p:clrMapOvr>
+  <p:transition spd="slow">
+    <p:cover/>
+  </p:transition>
 </p:sld>
 </file>
 
 <file path=ppt/slides/slide17.xml><?xml version="1.0" encoding="utf-8"?>
 <p:sld xmlns:a="http://schemas.openxmlformats.org/drawingml/2006/main" xmlns:r="http://schemas.openxmlformats.org/officeDocument/2006/relationships" xmlns:p="http://schemas.openxmlformats.org/presentationml/2006/main">
   <p:cSld>
+    <p:bg>
+      <p:bgPr>
+        <a:solidFill>
+          <a:schemeClr val="bg1"/>
+        </a:solidFill>
+        <a:effectLst/>
+      </p:bgPr>
+    </p:bg>
     <p:spTree>
       <p:nvGrpSpPr>
         <p:cNvPr id="1" name=""/>
@@ -13747,6 +13953,229 @@
           <p:cNvPr id="2" name="Cím 1">
             <a:extLst>
               <a:ext uri="{FF2B5EF4-FFF2-40B4-BE49-F238E27FC236}">
+                <a16:creationId xmlns:a16="http://schemas.microsoft.com/office/drawing/2014/main" id="{570A90FB-1D3C-4342-B810-356DECA1BDF3}"/>
+              </a:ext>
+            </a:extLst>
+          </p:cNvPr>
+          <p:cNvSpPr>
+            <a:spLocks noGrp="1"/>
+          </p:cNvSpPr>
+          <p:nvPr>
+            <p:ph type="title"/>
+          </p:nvPr>
+        </p:nvSpPr>
+        <p:spPr>
+          <a:xfrm>
+            <a:off x="1141413" y="0"/>
+            <a:ext cx="9905998" cy="1478570"/>
+          </a:xfrm>
+        </p:spPr>
+        <p:txBody>
+          <a:bodyPr/>
+          <a:lstStyle/>
+          <a:p>
+            <a:r>
+              <a:rPr lang="hu-HU" dirty="0"/>
+              <a:t>Tesztelés</a:t>
+            </a:r>
+          </a:p>
+        </p:txBody>
+      </p:sp>
+      <p:sp>
+        <p:nvSpPr>
+          <p:cNvPr id="3" name="Tartalom helye 2">
+            <a:extLst>
+              <a:ext uri="{FF2B5EF4-FFF2-40B4-BE49-F238E27FC236}">
+                <a16:creationId xmlns:a16="http://schemas.microsoft.com/office/drawing/2014/main" id="{BA4510F1-2C47-4DF1-A6B3-8A8DFD532A7F}"/>
+              </a:ext>
+            </a:extLst>
+          </p:cNvPr>
+          <p:cNvSpPr>
+            <a:spLocks noGrp="1"/>
+          </p:cNvSpPr>
+          <p:nvPr>
+            <p:ph idx="1"/>
+          </p:nvPr>
+        </p:nvSpPr>
+        <p:spPr/>
+        <p:txBody>
+          <a:bodyPr/>
+          <a:lstStyle/>
+          <a:p>
+            <a:endParaRPr lang="hu-HU"/>
+          </a:p>
+        </p:txBody>
+      </p:sp>
+    </p:spTree>
+    <p:extLst>
+      <p:ext uri="{BB962C8B-B14F-4D97-AF65-F5344CB8AC3E}">
+        <p14:creationId xmlns:p14="http://schemas.microsoft.com/office/powerpoint/2010/main" val="1795804418"/>
+      </p:ext>
+    </p:extLst>
+  </p:cSld>
+  <p:clrMapOvr>
+    <a:masterClrMapping/>
+  </p:clrMapOvr>
+  <p:transition spd="slow">
+    <p:cover/>
+  </p:transition>
+</p:sld>
+</file>
+
+<file path=ppt/slides/slide18.xml><?xml version="1.0" encoding="utf-8"?>
+<p:sld xmlns:a="http://schemas.openxmlformats.org/drawingml/2006/main" xmlns:r="http://schemas.openxmlformats.org/officeDocument/2006/relationships" xmlns:p="http://schemas.openxmlformats.org/presentationml/2006/main">
+  <p:cSld>
+    <p:bg>
+      <p:bgPr>
+        <a:solidFill>
+          <a:schemeClr val="bg1"/>
+        </a:solidFill>
+        <a:effectLst/>
+      </p:bgPr>
+    </p:bg>
+    <p:spTree>
+      <p:nvGrpSpPr>
+        <p:cNvPr id="1" name=""/>
+        <p:cNvGrpSpPr/>
+        <p:nvPr/>
+      </p:nvGrpSpPr>
+      <p:grpSpPr>
+        <a:xfrm>
+          <a:off x="0" y="0"/>
+          <a:ext cx="0" cy="0"/>
+          <a:chOff x="0" y="0"/>
+          <a:chExt cx="0" cy="0"/>
+        </a:xfrm>
+      </p:grpSpPr>
+      <p:sp>
+        <p:nvSpPr>
+          <p:cNvPr id="2" name="Cím 1">
+            <a:extLst>
+              <a:ext uri="{FF2B5EF4-FFF2-40B4-BE49-F238E27FC236}">
+                <a16:creationId xmlns:a16="http://schemas.microsoft.com/office/drawing/2014/main" id="{4060B8C0-6303-4E53-BBA5-CEB32DB1BD09}"/>
+              </a:ext>
+            </a:extLst>
+          </p:cNvPr>
+          <p:cNvSpPr>
+            <a:spLocks noGrp="1"/>
+          </p:cNvSpPr>
+          <p:nvPr>
+            <p:ph type="title"/>
+          </p:nvPr>
+        </p:nvSpPr>
+        <p:spPr>
+          <a:xfrm>
+            <a:off x="1143001" y="94268"/>
+            <a:ext cx="9905998" cy="1478570"/>
+          </a:xfrm>
+        </p:spPr>
+        <p:txBody>
+          <a:bodyPr/>
+          <a:lstStyle/>
+          <a:p>
+            <a:r>
+              <a:rPr lang="hu-HU" dirty="0"/>
+              <a:t>csapatmunka</a:t>
+            </a:r>
+          </a:p>
+        </p:txBody>
+      </p:sp>
+      <p:sp>
+        <p:nvSpPr>
+          <p:cNvPr id="3" name="Tartalom helye 2">
+            <a:extLst>
+              <a:ext uri="{FF2B5EF4-FFF2-40B4-BE49-F238E27FC236}">
+                <a16:creationId xmlns:a16="http://schemas.microsoft.com/office/drawing/2014/main" id="{043B059E-B8DF-48BE-8FAC-5D2C27DA1DBE}"/>
+              </a:ext>
+            </a:extLst>
+          </p:cNvPr>
+          <p:cNvSpPr>
+            <a:spLocks noGrp="1"/>
+          </p:cNvSpPr>
+          <p:nvPr>
+            <p:ph idx="1"/>
+          </p:nvPr>
+        </p:nvSpPr>
+        <p:spPr>
+          <a:xfrm>
+            <a:off x="1143001" y="1336356"/>
+            <a:ext cx="9905999" cy="3541714"/>
+          </a:xfrm>
+        </p:spPr>
+        <p:txBody>
+          <a:bodyPr/>
+          <a:lstStyle/>
+          <a:p>
+            <a:r>
+              <a:rPr lang="hu-HU" dirty="0" err="1"/>
+              <a:t>Discord</a:t>
+            </a:r>
+            <a:r>
+              <a:rPr lang="hu-HU" dirty="0"/>
+              <a:t>(beszélgetés)</a:t>
+            </a:r>
+          </a:p>
+          <a:p>
+            <a:r>
+              <a:rPr lang="hu-HU" dirty="0"/>
+              <a:t>Tiszta kód</a:t>
+            </a:r>
+          </a:p>
+          <a:p>
+            <a:r>
+              <a:rPr lang="hu-HU" dirty="0" err="1"/>
+              <a:t>Github</a:t>
+            </a:r>
+            <a:endParaRPr lang="hu-HU" dirty="0"/>
+          </a:p>
+        </p:txBody>
+      </p:sp>
+    </p:spTree>
+    <p:extLst>
+      <p:ext uri="{BB962C8B-B14F-4D97-AF65-F5344CB8AC3E}">
+        <p14:creationId xmlns:p14="http://schemas.microsoft.com/office/powerpoint/2010/main" val="2013554238"/>
+      </p:ext>
+    </p:extLst>
+  </p:cSld>
+  <p:clrMapOvr>
+    <a:masterClrMapping/>
+  </p:clrMapOvr>
+  <p:transition spd="slow">
+    <p:cover/>
+  </p:transition>
+</p:sld>
+</file>
+
+<file path=ppt/slides/slide19.xml><?xml version="1.0" encoding="utf-8"?>
+<p:sld xmlns:a="http://schemas.openxmlformats.org/drawingml/2006/main" xmlns:r="http://schemas.openxmlformats.org/officeDocument/2006/relationships" xmlns:p="http://schemas.openxmlformats.org/presentationml/2006/main">
+  <p:cSld>
+    <p:bg>
+      <p:bgPr>
+        <a:solidFill>
+          <a:schemeClr val="bg1"/>
+        </a:solidFill>
+        <a:effectLst/>
+      </p:bgPr>
+    </p:bg>
+    <p:spTree>
+      <p:nvGrpSpPr>
+        <p:cNvPr id="1" name=""/>
+        <p:cNvGrpSpPr/>
+        <p:nvPr/>
+      </p:nvGrpSpPr>
+      <p:grpSpPr>
+        <a:xfrm>
+          <a:off x="0" y="0"/>
+          <a:ext cx="0" cy="0"/>
+          <a:chOff x="0" y="0"/>
+          <a:chExt cx="0" cy="0"/>
+        </a:xfrm>
+      </p:grpSpPr>
+      <p:sp>
+        <p:nvSpPr>
+          <p:cNvPr id="2" name="Cím 1">
+            <a:extLst>
+              <a:ext uri="{FF2B5EF4-FFF2-40B4-BE49-F238E27FC236}">
                 <a16:creationId xmlns:a16="http://schemas.microsoft.com/office/drawing/2014/main" id="{201F5512-F406-4009-8C52-DBE498A42B87}"/>
               </a:ext>
             </a:extLst>
@@ -13760,7 +14189,7 @@
         </p:nvSpPr>
         <p:spPr>
           <a:xfrm>
-            <a:off x="1238129" y="142875"/>
+            <a:off x="3691618" y="174154"/>
             <a:ext cx="9905998" cy="1478570"/>
           </a:xfrm>
         </p:spPr>
@@ -13770,85 +14199,7 @@
           <a:p>
             <a:r>
               <a:rPr lang="hu-HU" dirty="0"/>
-              <a:t>csapatmunka</a:t>
-            </a:r>
-          </a:p>
-        </p:txBody>
-      </p:sp>
-      <p:sp>
-        <p:nvSpPr>
-          <p:cNvPr id="5" name="Szövegdoboz 4">
-            <a:extLst>
-              <a:ext uri="{FF2B5EF4-FFF2-40B4-BE49-F238E27FC236}">
-                <a16:creationId xmlns:a16="http://schemas.microsoft.com/office/drawing/2014/main" id="{25CED86D-9152-47E3-947D-FB6F8B532C78}"/>
-              </a:ext>
-            </a:extLst>
-          </p:cNvPr>
-          <p:cNvSpPr txBox="1"/>
-          <p:nvPr/>
-        </p:nvSpPr>
-        <p:spPr>
-          <a:xfrm>
-            <a:off x="5276212" y="1705568"/>
-            <a:ext cx="6106258" cy="461665"/>
-          </a:xfrm>
-          <a:prstGeom prst="rect">
-            <a:avLst/>
-          </a:prstGeom>
-          <a:noFill/>
-        </p:spPr>
-        <p:txBody>
-          <a:bodyPr wrap="square">
-            <a:spAutoFit/>
-          </a:bodyPr>
-          <a:lstStyle/>
-          <a:p>
-            <a:r>
-              <a:rPr lang="hu-HU" sz="2400" u="sng" dirty="0"/>
-              <a:t>Backend</a:t>
-            </a:r>
-            <a:r>
-              <a:rPr lang="hu-HU" dirty="0"/>
-              <a:t>:</a:t>
-            </a:r>
-          </a:p>
-        </p:txBody>
-      </p:sp>
-      <p:sp>
-        <p:nvSpPr>
-          <p:cNvPr id="7" name="Szövegdoboz 6">
-            <a:extLst>
-              <a:ext uri="{FF2B5EF4-FFF2-40B4-BE49-F238E27FC236}">
-                <a16:creationId xmlns:a16="http://schemas.microsoft.com/office/drawing/2014/main" id="{85940077-0161-476B-BD94-AEEE8EE11CEC}"/>
-              </a:ext>
-            </a:extLst>
-          </p:cNvPr>
-          <p:cNvSpPr txBox="1"/>
-          <p:nvPr/>
-        </p:nvSpPr>
-        <p:spPr>
-          <a:xfrm>
-            <a:off x="8453608" y="1694786"/>
-            <a:ext cx="6106258" cy="461665"/>
-          </a:xfrm>
-          <a:prstGeom prst="rect">
-            <a:avLst/>
-          </a:prstGeom>
-          <a:noFill/>
-        </p:spPr>
-        <p:txBody>
-          <a:bodyPr wrap="square">
-            <a:spAutoFit/>
-          </a:bodyPr>
-          <a:lstStyle/>
-          <a:p>
-            <a:r>
-              <a:rPr lang="hu-HU" sz="2400" u="sng" dirty="0"/>
-              <a:t>Adatbázis</a:t>
-            </a:r>
-            <a:r>
-              <a:rPr lang="hu-HU" dirty="0"/>
-              <a:t>:</a:t>
+              <a:t>Munkamegosztás</a:t>
             </a:r>
           </a:p>
         </p:txBody>
@@ -13867,7 +14218,7 @@
         </p:nvSpPr>
         <p:spPr>
           <a:xfrm>
-            <a:off x="2098816" y="1678528"/>
+            <a:off x="5031530" y="1421891"/>
             <a:ext cx="6950318" cy="461665"/>
           </a:xfrm>
           <a:prstGeom prst="rect">
@@ -13906,7 +14257,7 @@
         </p:nvSpPr>
         <p:spPr>
           <a:xfrm>
-            <a:off x="-2553902" y="5179472"/>
+            <a:off x="6191128" y="2417442"/>
             <a:ext cx="6950318" cy="369332"/>
           </a:xfrm>
           <a:prstGeom prst="rect">
@@ -13978,7 +14329,7 @@
         </p:nvSpPr>
         <p:spPr>
           <a:xfrm>
-            <a:off x="-3252390" y="3701895"/>
+            <a:off x="1489429" y="2390998"/>
             <a:ext cx="8347294" cy="369332"/>
           </a:xfrm>
           <a:prstGeom prst="rect">
@@ -14010,6 +14361,9 @@
   <p:clrMapOvr>
     <a:masterClrMapping/>
   </p:clrMapOvr>
+  <p:transition spd="slow">
+    <p:cover/>
+  </p:transition>
 </p:sld>
 </file>
 
@@ -14056,7 +14410,7 @@
         </p:nvSpPr>
         <p:spPr>
           <a:xfrm>
-            <a:off x="640080" y="325369"/>
+            <a:off x="4165704" y="-461913"/>
             <a:ext cx="4368602" cy="1956841"/>
           </a:xfrm>
         </p:spPr>
@@ -14067,10 +14421,10 @@
           <a:lstStyle/>
           <a:p>
             <a:r>
-              <a:rPr lang="hu-HU" sz="5400" b="1"/>
+              <a:rPr lang="hu-HU" sz="5400" b="1" dirty="0"/>
               <a:t>Bevezetés</a:t>
             </a:r>
-            <a:endParaRPr lang="hu-HU" sz="5400" b="1">
+            <a:endParaRPr lang="hu-HU" sz="5400" b="1" dirty="0">
               <a:ea typeface="Calibri Light"/>
               <a:cs typeface="Calibri Light"/>
             </a:endParaRPr>
@@ -14167,12 +14521,23 @@
   <p:clrMapOvr>
     <a:masterClrMapping/>
   </p:clrMapOvr>
+  <p:transition spd="slow">
+    <p:cover/>
+  </p:transition>
 </p:sld>
 </file>
 
-<file path=ppt/slides/slide3.xml><?xml version="1.0" encoding="utf-8"?>
+<file path=ppt/slides/slide20.xml><?xml version="1.0" encoding="utf-8"?>
 <p:sld xmlns:a="http://schemas.openxmlformats.org/drawingml/2006/main" xmlns:r="http://schemas.openxmlformats.org/officeDocument/2006/relationships" xmlns:p="http://schemas.openxmlformats.org/presentationml/2006/main">
   <p:cSld>
+    <p:bg>
+      <p:bgPr>
+        <a:solidFill>
+          <a:schemeClr val="bg1"/>
+        </a:solidFill>
+        <a:effectLst/>
+      </p:bgPr>
+    </p:bg>
     <p:spTree>
       <p:nvGrpSpPr>
         <p:cNvPr id="1" name=""/>
@@ -14192,7 +14557,7 @@
           <p:cNvPr id="2" name="Cím 1">
             <a:extLst>
               <a:ext uri="{FF2B5EF4-FFF2-40B4-BE49-F238E27FC236}">
-                <a16:creationId xmlns:a16="http://schemas.microsoft.com/office/drawing/2014/main" id="{531E0B75-C70C-AFA2-4D6C-D91D854F6878}"/>
+                <a16:creationId xmlns:a16="http://schemas.microsoft.com/office/drawing/2014/main" id="{201F5512-F406-4009-8C52-DBE498A42B87}"/>
               </a:ext>
             </a:extLst>
           </p:cNvPr>
@@ -14205,55 +14570,27 @@
         </p:nvSpPr>
         <p:spPr>
           <a:xfrm>
-            <a:off x="3132" y="-217"/>
-            <a:ext cx="10515600" cy="1325563"/>
+            <a:off x="3610137" y="216215"/>
+            <a:ext cx="9905998" cy="1478570"/>
           </a:xfrm>
         </p:spPr>
         <p:txBody>
           <a:bodyPr/>
           <a:lstStyle/>
           <a:p>
-            <a:pPr>
-              <a:lnSpc>
-                <a:spcPts val="3038"/>
-              </a:lnSpc>
-              <a:spcBef>
-                <a:spcPts val="0"/>
-              </a:spcBef>
-            </a:pPr>
-            <a:r>
-              <a:rPr lang="hu-HU" b="1" dirty="0">
-                <a:latin typeface="Arial"/>
-                <a:cs typeface="Arial"/>
-              </a:rPr>
-              <a:t>Specifikáció</a:t>
-            </a:r>
-            <a:r>
-              <a:rPr lang="en-US" b="1" dirty="0">
-                <a:latin typeface="Arial"/>
-                <a:cs typeface="Arial"/>
-              </a:rPr>
-              <a:t> </a:t>
-            </a:r>
-            <a:endParaRPr lang="en-US" dirty="0">
-              <a:latin typeface="Arial"/>
-              <a:cs typeface="Arial"/>
-            </a:endParaRPr>
-          </a:p>
-          <a:p>
-            <a:endParaRPr lang="hu-HU" dirty="0">
-              <a:ea typeface="Calibri Light"/>
-              <a:cs typeface="Calibri Light"/>
-            </a:endParaRPr>
-          </a:p>
-        </p:txBody>
-      </p:sp>
-      <p:sp>
-        <p:nvSpPr>
-          <p:cNvPr id="4" name="Szövegdoboz 3">
+            <a:r>
+              <a:rPr lang="hu-HU" dirty="0"/>
+              <a:t>Munkamegosztás</a:t>
+            </a:r>
+          </a:p>
+        </p:txBody>
+      </p:sp>
+      <p:sp>
+        <p:nvSpPr>
+          <p:cNvPr id="5" name="Szövegdoboz 4">
             <a:extLst>
               <a:ext uri="{FF2B5EF4-FFF2-40B4-BE49-F238E27FC236}">
-                <a16:creationId xmlns:a16="http://schemas.microsoft.com/office/drawing/2014/main" id="{14BA33D7-B191-EE62-8A1A-8160F8BD564F}"/>
+                <a16:creationId xmlns:a16="http://schemas.microsoft.com/office/drawing/2014/main" id="{25CED86D-9152-47E3-947D-FB6F8B532C78}"/>
               </a:ext>
             </a:extLst>
           </p:cNvPr>
@@ -14262,8 +14599,8 @@
         </p:nvSpPr>
         <p:spPr>
           <a:xfrm>
-            <a:off x="81876" y="1135248"/>
-            <a:ext cx="6479931" cy="861774"/>
+            <a:off x="5037869" y="1463953"/>
+            <a:ext cx="6106258" cy="461665"/>
           </a:xfrm>
           <a:prstGeom prst="rect">
             <a:avLst/>
@@ -14271,69 +14608,28 @@
           <a:noFill/>
         </p:spPr>
         <p:txBody>
-          <a:bodyPr rot="0" spcFirstLastPara="0" vertOverflow="overflow" horzOverflow="overflow" vert="horz" wrap="square" lIns="91440" tIns="45720" rIns="91440" bIns="45720" numCol="1" spcCol="0" rtlCol="0" fromWordArt="0" anchor="t" anchorCtr="0" forceAA="0" compatLnSpc="1">
-            <a:prstTxWarp prst="textNoShape">
-              <a:avLst/>
-            </a:prstTxWarp>
+          <a:bodyPr wrap="square">
             <a:spAutoFit/>
           </a:bodyPr>
           <a:lstStyle/>
           <a:p>
-            <a:pPr algn="l" rtl="0">
-              <a:lnSpc>
-                <a:spcPts val="2025"/>
-              </a:lnSpc>
-            </a:pPr>
-            <a:r>
-              <a:rPr lang="hu-HU" b="0" i="0" dirty="0">
-                <a:latin typeface="Arial"/>
-                <a:ea typeface="Arial"/>
-                <a:cs typeface="Arial"/>
-              </a:rPr>
-              <a:t>A projekt célja a </a:t>
-            </a:r>
-            <a:r>
-              <a:rPr lang="hu-HU" b="1" i="0" dirty="0" err="1">
-                <a:latin typeface="Arial"/>
-                <a:ea typeface="Arial"/>
-                <a:cs typeface="Arial"/>
-              </a:rPr>
-              <a:t>Vexora</a:t>
-            </a:r>
-            <a:r>
-              <a:rPr lang="hu-HU" b="1" i="0" dirty="0">
-                <a:latin typeface="Arial"/>
-                <a:ea typeface="Arial"/>
-                <a:cs typeface="Arial"/>
-              </a:rPr>
-              <a:t> </a:t>
-            </a:r>
-            <a:r>
-              <a:rPr lang="hu-HU" b="1" i="0" dirty="0" err="1">
-                <a:latin typeface="Arial"/>
-                <a:ea typeface="Arial"/>
-                <a:cs typeface="Arial"/>
-              </a:rPr>
-              <a:t>Detailing</a:t>
-            </a:r>
-            <a:r>
-              <a:rPr lang="hu-HU" b="0" i="0" dirty="0">
-                <a:latin typeface="Arial"/>
-                <a:ea typeface="Arial"/>
-                <a:cs typeface="Arial"/>
-              </a:rPr>
-              <a:t> nevű prémium autókozmetikai vállalkozás online jelenlétének megteremtése és egy interaktív weboldal kifejlesztése. </a:t>
-            </a:r>
-            <a:endParaRPr lang="hu-HU" dirty="0"/>
-          </a:p>
-        </p:txBody>
-      </p:sp>
-      <p:sp>
-        <p:nvSpPr>
-          <p:cNvPr id="9" name="Szövegdoboz 8">
+            <a:r>
+              <a:rPr lang="hu-HU" sz="2400" u="sng" dirty="0"/>
+              <a:t>Backend</a:t>
+            </a:r>
+            <a:r>
+              <a:rPr lang="hu-HU" dirty="0"/>
+              <a:t>:</a:t>
+            </a:r>
+          </a:p>
+        </p:txBody>
+      </p:sp>
+      <p:sp>
+        <p:nvSpPr>
+          <p:cNvPr id="11" name="Szövegdoboz 10">
             <a:extLst>
               <a:ext uri="{FF2B5EF4-FFF2-40B4-BE49-F238E27FC236}">
-                <a16:creationId xmlns:a16="http://schemas.microsoft.com/office/drawing/2014/main" id="{EE96B4C2-5024-496C-A6DA-823A6C22FCAF}"/>
+                <a16:creationId xmlns:a16="http://schemas.microsoft.com/office/drawing/2014/main" id="{77791832-9108-483A-BAFA-05E7DCC9F049}"/>
               </a:ext>
             </a:extLst>
           </p:cNvPr>
@@ -14342,8 +14638,8 @@
         </p:nvSpPr>
         <p:spPr>
           <a:xfrm>
-            <a:off x="81876" y="4907144"/>
-            <a:ext cx="6220558" cy="1631216"/>
+            <a:off x="6191128" y="2352283"/>
+            <a:ext cx="6950318" cy="369332"/>
           </a:xfrm>
           <a:prstGeom prst="rect">
             <a:avLst/>
@@ -14356,44 +14652,20 @@
           </a:bodyPr>
           <a:lstStyle/>
           <a:p>
-            <a:pPr algn="l" rtl="0">
-              <a:lnSpc>
-                <a:spcPts val="2025"/>
-              </a:lnSpc>
-            </a:pPr>
-            <a:r>
-              <a:rPr lang="hu-HU" sz="1800" b="0" i="0" dirty="0">
-                <a:latin typeface="Arial"/>
-                <a:ea typeface="Arial"/>
-                <a:cs typeface="Arial"/>
-              </a:rPr>
-              <a:t>A rendszer lehetővé teszi a látogatók számára, hogy a járművük kategóriája és a választott autóápolási/</a:t>
-            </a:r>
-            <a:r>
-              <a:rPr lang="hu-HU" sz="1800" b="0" i="0" dirty="0" err="1">
-                <a:latin typeface="Arial"/>
-                <a:ea typeface="Arial"/>
-                <a:cs typeface="Arial"/>
-              </a:rPr>
-              <a:t>detailing</a:t>
-            </a:r>
-            <a:r>
-              <a:rPr lang="hu-HU" sz="1800" b="0" i="0" dirty="0">
-                <a:latin typeface="Arial"/>
-                <a:ea typeface="Arial"/>
-                <a:cs typeface="Arial"/>
-              </a:rPr>
-              <a:t> csomagok (pl. külső-belső takarítás, polírozás, kerámia bevonat) alapján azonnali, személyre szabott becslést kapjanak a várható költségekről és a munkavégzés időtartamáról. </a:t>
-            </a:r>
-          </a:p>
-        </p:txBody>
-      </p:sp>
-      <p:sp>
-        <p:nvSpPr>
-          <p:cNvPr id="11" name="Szövegdoboz 10">
+            <a:pPr algn="ctr"/>
+            <a:r>
+              <a:rPr lang="hu-HU" sz="1800" dirty="0"/>
+              <a:t>Hegedüs Milán:</a:t>
+            </a:r>
+          </a:p>
+        </p:txBody>
+      </p:sp>
+      <p:sp>
+        <p:nvSpPr>
+          <p:cNvPr id="13" name="Szövegdoboz 12">
             <a:extLst>
               <a:ext uri="{FF2B5EF4-FFF2-40B4-BE49-F238E27FC236}">
-                <a16:creationId xmlns:a16="http://schemas.microsoft.com/office/drawing/2014/main" id="{0D261407-B455-4152-80B5-388631409BFE}"/>
+                <a16:creationId xmlns:a16="http://schemas.microsoft.com/office/drawing/2014/main" id="{00C4F9BD-A631-43A2-A834-A2083BD978F2}"/>
               </a:ext>
             </a:extLst>
           </p:cNvPr>
@@ -14402,8 +14674,8 @@
         </p:nvSpPr>
         <p:spPr>
           <a:xfrm>
-            <a:off x="81876" y="2967335"/>
-            <a:ext cx="6220558" cy="923330"/>
+            <a:off x="-2490528" y="2352283"/>
+            <a:ext cx="6950318" cy="369332"/>
           </a:xfrm>
           <a:prstGeom prst="rect">
             <a:avLst/>
@@ -14416,40 +14688,20 @@
           </a:bodyPr>
           <a:lstStyle/>
           <a:p>
-            <a:r>
-              <a:rPr lang="hu-HU" sz="1800" b="0" i="0" dirty="0">
-                <a:latin typeface="Arial"/>
-                <a:ea typeface="Arial"/>
-                <a:cs typeface="Arial"/>
-              </a:rPr>
-              <a:t>A weboldal elsődleges funkciója a cég szolgáltatásainak bemutatása mellett egy dinamikus </a:t>
-            </a:r>
-            <a:r>
-              <a:rPr lang="hu-HU" sz="1800" b="1" i="0" dirty="0">
-                <a:latin typeface="Arial"/>
-                <a:ea typeface="Arial"/>
-                <a:cs typeface="Arial"/>
-              </a:rPr>
-              <a:t>ár- és időtartam-kalkulátor</a:t>
-            </a:r>
-            <a:r>
-              <a:rPr lang="hu-HU" sz="1800" b="0" i="0" dirty="0">
-                <a:latin typeface="Arial"/>
-                <a:ea typeface="Arial"/>
-                <a:cs typeface="Arial"/>
-              </a:rPr>
-              <a:t> biztosítása. </a:t>
-            </a:r>
-            <a:endParaRPr lang="hu-HU" dirty="0"/>
-          </a:p>
-        </p:txBody>
-      </p:sp>
-      <p:sp>
-        <p:nvSpPr>
-          <p:cNvPr id="10" name="Szövegdoboz 9">
+            <a:pPr algn="ctr"/>
+            <a:r>
+              <a:rPr lang="hu-HU" sz="1800" dirty="0"/>
+              <a:t>Joó Zoltán:</a:t>
+            </a:r>
+          </a:p>
+        </p:txBody>
+      </p:sp>
+      <p:sp>
+        <p:nvSpPr>
+          <p:cNvPr id="15" name="Szövegdoboz 14">
             <a:extLst>
               <a:ext uri="{FF2B5EF4-FFF2-40B4-BE49-F238E27FC236}">
-                <a16:creationId xmlns:a16="http://schemas.microsoft.com/office/drawing/2014/main" id="{FC430B3E-2627-4708-ABED-B898E59D779F}"/>
+                <a16:creationId xmlns:a16="http://schemas.microsoft.com/office/drawing/2014/main" id="{EF84411E-D738-4BA2-AF49-FBBF3F12434B}"/>
               </a:ext>
             </a:extLst>
           </p:cNvPr>
@@ -14458,8 +14710,8 @@
         </p:nvSpPr>
         <p:spPr>
           <a:xfrm>
-            <a:off x="8671960" y="2367170"/>
-            <a:ext cx="2039816" cy="1200329"/>
+            <a:off x="1482573" y="2352283"/>
+            <a:ext cx="8347294" cy="369332"/>
           </a:xfrm>
           <a:prstGeom prst="rect">
             <a:avLst/>
@@ -14467,42 +14719,15 @@
           <a:noFill/>
         </p:spPr>
         <p:txBody>
-          <a:bodyPr wrap="square" rtlCol="0">
+          <a:bodyPr wrap="square">
             <a:spAutoFit/>
           </a:bodyPr>
           <a:lstStyle/>
           <a:p>
-            <a:r>
-              <a:rPr lang="hu-HU" dirty="0" err="1"/>
-              <a:t>Specifikáciot</a:t>
-            </a:r>
-            <a:r>
-              <a:rPr lang="hu-HU" dirty="0"/>
-              <a:t> </a:t>
-            </a:r>
-            <a:r>
-              <a:rPr lang="hu-HU" dirty="0" err="1"/>
-              <a:t>jelemző</a:t>
-            </a:r>
-            <a:r>
-              <a:rPr lang="hu-HU" dirty="0"/>
-              <a:t> kép vagy szintén egy </a:t>
-            </a:r>
-            <a:r>
-              <a:rPr lang="hu-HU" dirty="0" err="1"/>
-              <a:t>auto</a:t>
-            </a:r>
-            <a:r>
-              <a:rPr lang="hu-HU" dirty="0"/>
-              <a:t> kozmetikai kép(</a:t>
-            </a:r>
-            <a:r>
-              <a:rPr lang="hu-HU" dirty="0" err="1"/>
-              <a:t>ek</a:t>
-            </a:r>
-            <a:r>
-              <a:rPr lang="hu-HU" dirty="0"/>
-              <a:t>)</a:t>
+            <a:pPr algn="ctr"/>
+            <a:r>
+              <a:rPr lang="hu-HU" sz="1800" dirty="0"/>
+              <a:t>Deák Bence:</a:t>
             </a:r>
           </a:p>
         </p:txBody>
@@ -14510,19 +14735,30 @@
     </p:spTree>
     <p:extLst>
       <p:ext uri="{BB962C8B-B14F-4D97-AF65-F5344CB8AC3E}">
-        <p14:creationId xmlns:p14="http://schemas.microsoft.com/office/powerpoint/2010/main" val="1183916578"/>
+        <p14:creationId xmlns:p14="http://schemas.microsoft.com/office/powerpoint/2010/main" val="1968432360"/>
       </p:ext>
     </p:extLst>
   </p:cSld>
   <p:clrMapOvr>
     <a:masterClrMapping/>
   </p:clrMapOvr>
+  <p:transition spd="slow">
+    <p:cover/>
+  </p:transition>
 </p:sld>
 </file>
 
-<file path=ppt/slides/slide4.xml><?xml version="1.0" encoding="utf-8"?>
+<file path=ppt/slides/slide21.xml><?xml version="1.0" encoding="utf-8"?>
 <p:sld xmlns:a="http://schemas.openxmlformats.org/drawingml/2006/main" xmlns:r="http://schemas.openxmlformats.org/officeDocument/2006/relationships" xmlns:p="http://schemas.openxmlformats.org/presentationml/2006/main">
   <p:cSld>
+    <p:bg>
+      <p:bgPr>
+        <a:solidFill>
+          <a:schemeClr val="bg1"/>
+        </a:solidFill>
+        <a:effectLst/>
+      </p:bgPr>
+    </p:bg>
     <p:spTree>
       <p:nvGrpSpPr>
         <p:cNvPr id="1" name=""/>
@@ -14539,24 +14775,53 @@
       </p:grpSpPr>
       <p:sp>
         <p:nvSpPr>
-          <p:cNvPr id="4" name="Tartalom helye 3">
+          <p:cNvPr id="2" name="Cím 1">
             <a:extLst>
               <a:ext uri="{FF2B5EF4-FFF2-40B4-BE49-F238E27FC236}">
-                <a16:creationId xmlns:a16="http://schemas.microsoft.com/office/drawing/2014/main" id="{FA4B7AE8-3572-41C3-A1E7-85E06A8AE562}"/>
+                <a16:creationId xmlns:a16="http://schemas.microsoft.com/office/drawing/2014/main" id="{201F5512-F406-4009-8C52-DBE498A42B87}"/>
               </a:ext>
             </a:extLst>
           </p:cNvPr>
-          <p:cNvSpPr txBox="1">
+          <p:cNvSpPr>
             <a:spLocks noGrp="1"/>
           </p:cNvSpPr>
           <p:nvPr>
-            <p:ph idx="1"/>
+            <p:ph type="title"/>
           </p:nvPr>
         </p:nvSpPr>
         <p:spPr>
           <a:xfrm>
-            <a:off x="1014046" y="4904413"/>
-            <a:ext cx="10515600" cy="1637371"/>
+            <a:off x="3628244" y="131391"/>
+            <a:ext cx="9905998" cy="1478570"/>
+          </a:xfrm>
+        </p:spPr>
+        <p:txBody>
+          <a:bodyPr/>
+          <a:lstStyle/>
+          <a:p>
+            <a:r>
+              <a:rPr lang="hu-HU" dirty="0"/>
+              <a:t>Munkamegosztás</a:t>
+            </a:r>
+          </a:p>
+        </p:txBody>
+      </p:sp>
+      <p:sp>
+        <p:nvSpPr>
+          <p:cNvPr id="7" name="Szövegdoboz 6">
+            <a:extLst>
+              <a:ext uri="{FF2B5EF4-FFF2-40B4-BE49-F238E27FC236}">
+                <a16:creationId xmlns:a16="http://schemas.microsoft.com/office/drawing/2014/main" id="{85940077-0161-476B-BD94-AEEE8EE11CEC}"/>
+              </a:ext>
+            </a:extLst>
+          </p:cNvPr>
+          <p:cNvSpPr txBox="1"/>
+          <p:nvPr/>
+        </p:nvSpPr>
+        <p:spPr>
+          <a:xfrm>
+            <a:off x="4904649" y="1379128"/>
+            <a:ext cx="6106258" cy="461665"/>
           </a:xfrm>
           <a:prstGeom prst="rect">
             <a:avLst/>
@@ -14564,60 +14829,28 @@
           <a:noFill/>
         </p:spPr>
         <p:txBody>
-          <a:bodyPr rot="0" spcFirstLastPara="0" vertOverflow="overflow" horzOverflow="overflow" vert="horz" wrap="square" lIns="91440" tIns="45720" rIns="91440" bIns="45720" numCol="1" spcCol="0" rtlCol="0" fromWordArt="0" anchor="t" anchorCtr="0" forceAA="0" compatLnSpc="1">
-            <a:prstTxWarp prst="textNoShape">
-              <a:avLst/>
-            </a:prstTxWarp>
+          <a:bodyPr wrap="square">
             <a:spAutoFit/>
           </a:bodyPr>
           <a:lstStyle/>
           <a:p>
-            <a:pPr marL="0" lvl="0" indent="0" algn="l" rtl="0">
-              <a:lnSpc>
-                <a:spcPts val="2025"/>
-              </a:lnSpc>
-              <a:buNone/>
-            </a:pPr>
-            <a:r>
-              <a:rPr lang="hu-HU" sz="1800" b="1" i="0" dirty="0">
-                <a:latin typeface="Arial"/>
-                <a:ea typeface="Arial"/>
-                <a:cs typeface="Arial"/>
-              </a:rPr>
-              <a:t>Időpont-egyeztetés / Ajánlat beküldése:</a:t>
-            </a:r>
-            <a:r>
-              <a:rPr lang="hu-HU" sz="1800" b="0" i="0" dirty="0">
-                <a:latin typeface="Arial"/>
-                <a:ea typeface="Arial"/>
-                <a:cs typeface="Arial"/>
-              </a:rPr>
-              <a:t> A kalkuláció végén az ügyfél egyetlen gombnyomással elküldheti az igényét a megadott adataival (név, telefonszám, e-mail, rendszám/típus).</a:t>
-            </a:r>
-            <a:r>
-              <a:rPr sz="1800" b="0" i="0" dirty="0">
-                <a:latin typeface="Arial"/>
-                <a:ea typeface="Arial"/>
-                <a:cs typeface="Arial"/>
-              </a:rPr>
-              <a:t> </a:t>
-            </a:r>
-          </a:p>
-          <a:p>
-            <a:endParaRPr dirty="0"/>
-          </a:p>
-          <a:p>
-            <a:pPr algn="ctr"/>
-            <a:endParaRPr lang="hu-HU" dirty="0"/>
-          </a:p>
-        </p:txBody>
-      </p:sp>
-      <p:sp>
-        <p:nvSpPr>
-          <p:cNvPr id="6" name="Szövegdoboz 5">
+            <a:r>
+              <a:rPr lang="hu-HU" sz="2400" u="sng" dirty="0"/>
+              <a:t>Adatbázis</a:t>
+            </a:r>
+            <a:r>
+              <a:rPr lang="hu-HU" dirty="0"/>
+              <a:t>:</a:t>
+            </a:r>
+          </a:p>
+        </p:txBody>
+      </p:sp>
+      <p:sp>
+        <p:nvSpPr>
+          <p:cNvPr id="11" name="Szövegdoboz 10">
             <a:extLst>
               <a:ext uri="{FF2B5EF4-FFF2-40B4-BE49-F238E27FC236}">
-                <a16:creationId xmlns:a16="http://schemas.microsoft.com/office/drawing/2014/main" id="{06D79576-9A2B-4AC2-9388-EB7566DE21BF}"/>
+                <a16:creationId xmlns:a16="http://schemas.microsoft.com/office/drawing/2014/main" id="{77791832-9108-483A-BAFA-05E7DCC9F049}"/>
               </a:ext>
             </a:extLst>
           </p:cNvPr>
@@ -14626,8 +14859,8 @@
         </p:nvSpPr>
         <p:spPr>
           <a:xfrm>
-            <a:off x="174382" y="595968"/>
-            <a:ext cx="6097464" cy="861774"/>
+            <a:off x="6096000" y="2381257"/>
+            <a:ext cx="6950318" cy="369332"/>
           </a:xfrm>
           <a:prstGeom prst="rect">
             <a:avLst/>
@@ -14640,69 +14873,20 @@
           </a:bodyPr>
           <a:lstStyle/>
           <a:p>
-            <a:pPr marL="0" lvl="0" indent="0" algn="l" rtl="0">
-              <a:lnSpc>
-                <a:spcPts val="2025"/>
-              </a:lnSpc>
-              <a:buNone/>
-            </a:pPr>
-            <a:r>
-              <a:rPr lang="hu-HU" sz="1800" b="1" i="0" dirty="0">
-                <a:latin typeface="Arial"/>
-                <a:ea typeface="Arial"/>
-                <a:cs typeface="Arial"/>
-              </a:rPr>
-              <a:t>Szolgáltatások böngészése:</a:t>
-            </a:r>
-            <a:r>
-              <a:rPr lang="hu-HU" sz="1800" b="0" i="0" dirty="0">
-                <a:latin typeface="Arial"/>
-                <a:ea typeface="Arial"/>
-                <a:cs typeface="Arial"/>
-              </a:rPr>
-              <a:t> A látogató áttekintheti a </a:t>
-            </a:r>
-            <a:r>
-              <a:rPr lang="hu-HU" sz="1800" b="0" i="0" dirty="0" err="1">
-                <a:latin typeface="Arial"/>
-                <a:ea typeface="Arial"/>
-                <a:cs typeface="Arial"/>
-              </a:rPr>
-              <a:t>Vexora</a:t>
-            </a:r>
-            <a:r>
-              <a:rPr lang="hu-HU" sz="1800" b="0" i="0" dirty="0">
-                <a:latin typeface="Arial"/>
-                <a:ea typeface="Arial"/>
-                <a:cs typeface="Arial"/>
-              </a:rPr>
-              <a:t> </a:t>
-            </a:r>
-            <a:r>
-              <a:rPr lang="hu-HU" sz="1800" b="0" i="0" dirty="0" err="1">
-                <a:latin typeface="Arial"/>
-                <a:ea typeface="Arial"/>
-                <a:cs typeface="Arial"/>
-              </a:rPr>
-              <a:t>Detailing</a:t>
-            </a:r>
-            <a:r>
-              <a:rPr lang="hu-HU" sz="1800" b="0" i="0" dirty="0">
-                <a:latin typeface="Arial"/>
-                <a:ea typeface="Arial"/>
-                <a:cs typeface="Arial"/>
-              </a:rPr>
-              <a:t> professzionális szolgáltatásait, részletes leírásokkal és referenciákkal. </a:t>
-            </a:r>
-          </a:p>
-        </p:txBody>
-      </p:sp>
-      <p:sp>
-        <p:nvSpPr>
-          <p:cNvPr id="8" name="Szövegdoboz 7">
+            <a:pPr algn="ctr"/>
+            <a:r>
+              <a:rPr lang="hu-HU" sz="1800" dirty="0"/>
+              <a:t>Hegedüs Milán:</a:t>
+            </a:r>
+          </a:p>
+        </p:txBody>
+      </p:sp>
+      <p:sp>
+        <p:nvSpPr>
+          <p:cNvPr id="13" name="Szövegdoboz 12">
             <a:extLst>
               <a:ext uri="{FF2B5EF4-FFF2-40B4-BE49-F238E27FC236}">
-                <a16:creationId xmlns:a16="http://schemas.microsoft.com/office/drawing/2014/main" id="{D20267D4-1CCB-4013-9DDF-5D75B345FAEE}"/>
+                <a16:creationId xmlns:a16="http://schemas.microsoft.com/office/drawing/2014/main" id="{00C4F9BD-A631-43A2-A834-A2083BD978F2}"/>
               </a:ext>
             </a:extLst>
           </p:cNvPr>
@@ -14711,8 +14895,8 @@
         </p:nvSpPr>
         <p:spPr>
           <a:xfrm>
-            <a:off x="6068158" y="2565418"/>
-            <a:ext cx="6123842" cy="1374735"/>
+            <a:off x="-2553902" y="2417442"/>
+            <a:ext cx="6950318" cy="369332"/>
           </a:xfrm>
           <a:prstGeom prst="rect">
             <a:avLst/>
@@ -14725,88 +14909,20 @@
           </a:bodyPr>
           <a:lstStyle/>
           <a:p>
-            <a:pPr marL="0" lvl="0" indent="0" algn="l" rtl="0">
-              <a:lnSpc>
-                <a:spcPts val="2025"/>
-              </a:lnSpc>
-              <a:buNone/>
-            </a:pPr>
-            <a:r>
-              <a:rPr lang="hu-HU" b="1" i="0" dirty="0">
-                <a:latin typeface="Arial"/>
-                <a:ea typeface="Arial"/>
-                <a:cs typeface="Arial"/>
-              </a:rPr>
-              <a:t>Interaktív árajánlat-készítés (Kalkulátor):</a:t>
-            </a:r>
-            <a:r>
-              <a:rPr lang="hu-HU" b="0" i="0" dirty="0">
-                <a:latin typeface="Arial"/>
-                <a:ea typeface="Arial"/>
-                <a:cs typeface="Arial"/>
-              </a:rPr>
-              <a:t> </a:t>
-            </a:r>
-          </a:p>
-          <a:p>
-            <a:pPr marL="228600" lvl="1" indent="-228600" algn="l" rtl="0">
-              <a:lnSpc>
-                <a:spcPts val="2025"/>
-              </a:lnSpc>
-              <a:buFont typeface="Courier New"/>
-              <a:buChar char="•"/>
-            </a:pPr>
-            <a:r>
-              <a:rPr lang="hu-HU" b="0" i="0" dirty="0">
-                <a:latin typeface="Arial"/>
-                <a:ea typeface="Arial"/>
-                <a:cs typeface="Arial"/>
-              </a:rPr>
-              <a:t>Az ügyfél kiválasztja a jármű kategóriáját  </a:t>
-            </a:r>
-          </a:p>
-          <a:p>
-            <a:pPr marL="228600" lvl="1" indent="-228600" algn="l" rtl="0">
-              <a:lnSpc>
-                <a:spcPts val="2025"/>
-              </a:lnSpc>
-              <a:buFont typeface="Courier New"/>
-              <a:buChar char="•"/>
-            </a:pPr>
-            <a:r>
-              <a:rPr lang="hu-HU" b="0" i="0" dirty="0">
-                <a:latin typeface="Arial"/>
-                <a:ea typeface="Arial"/>
-                <a:cs typeface="Arial"/>
-              </a:rPr>
-              <a:t>Kiválasztja a kívánt szolgáltatásokat  </a:t>
-            </a:r>
-          </a:p>
-          <a:p>
-            <a:pPr marL="228600" lvl="1" indent="-228600" algn="l" rtl="0">
-              <a:lnSpc>
-                <a:spcPts val="2025"/>
-              </a:lnSpc>
-              <a:buFont typeface="Courier New"/>
-              <a:buChar char="•"/>
-            </a:pPr>
-            <a:r>
-              <a:rPr lang="hu-HU" b="0" i="0" dirty="0">
-                <a:latin typeface="Arial"/>
-                <a:ea typeface="Arial"/>
-                <a:cs typeface="Arial"/>
-              </a:rPr>
-              <a:t>A rendszer automatikusan kiszámítja a becsült árat és a szükséges munkaidőt (pl. 2-3 munkanap). </a:t>
-            </a:r>
-          </a:p>
-        </p:txBody>
-      </p:sp>
-      <p:sp>
-        <p:nvSpPr>
-          <p:cNvPr id="9" name="Szövegdoboz 8">
+            <a:pPr algn="ctr"/>
+            <a:r>
+              <a:rPr lang="hu-HU" sz="1800" dirty="0"/>
+              <a:t>Joó Zoltán:</a:t>
+            </a:r>
+          </a:p>
+        </p:txBody>
+      </p:sp>
+      <p:sp>
+        <p:nvSpPr>
+          <p:cNvPr id="15" name="Szövegdoboz 14">
             <a:extLst>
               <a:ext uri="{FF2B5EF4-FFF2-40B4-BE49-F238E27FC236}">
-                <a16:creationId xmlns:a16="http://schemas.microsoft.com/office/drawing/2014/main" id="{EE782F83-7969-45F7-B4D3-943E3D043D61}"/>
+                <a16:creationId xmlns:a16="http://schemas.microsoft.com/office/drawing/2014/main" id="{EF84411E-D738-4BA2-AF49-FBBF3F12434B}"/>
               </a:ext>
             </a:extLst>
           </p:cNvPr>
@@ -14815,8 +14931,8 @@
         </p:nvSpPr>
         <p:spPr>
           <a:xfrm>
-            <a:off x="8721969" y="842189"/>
-            <a:ext cx="641839" cy="369332"/>
+            <a:off x="1373931" y="2381257"/>
+            <a:ext cx="8347294" cy="369332"/>
           </a:xfrm>
           <a:prstGeom prst="rect">
             <a:avLst/>
@@ -14824,92 +14940,46 @@
           <a:noFill/>
         </p:spPr>
         <p:txBody>
-          <a:bodyPr wrap="square" rtlCol="0">
-            <a:spAutoFit/>
-          </a:bodyPr>
-          <a:lstStyle/>
-          <a:p>
-            <a:r>
-              <a:rPr lang="hu-HU" dirty="0"/>
-              <a:t>kép</a:t>
-            </a:r>
-          </a:p>
-        </p:txBody>
-      </p:sp>
-      <p:sp>
-        <p:nvSpPr>
-          <p:cNvPr id="11" name="Szövegdoboz 10">
-            <a:extLst>
-              <a:ext uri="{FF2B5EF4-FFF2-40B4-BE49-F238E27FC236}">
-                <a16:creationId xmlns:a16="http://schemas.microsoft.com/office/drawing/2014/main" id="{9767F290-C620-4553-A523-59548A8A8658}"/>
-              </a:ext>
-            </a:extLst>
-          </p:cNvPr>
-          <p:cNvSpPr txBox="1"/>
-          <p:nvPr/>
-        </p:nvSpPr>
-        <p:spPr>
-          <a:xfrm>
-            <a:off x="2242038" y="2919614"/>
-            <a:ext cx="870439" cy="576248"/>
-          </a:xfrm>
-          <a:prstGeom prst="rect">
-            <a:avLst/>
-          </a:prstGeom>
-          <a:noFill/>
-        </p:spPr>
-        <p:txBody>
           <a:bodyPr wrap="square">
             <a:spAutoFit/>
           </a:bodyPr>
           <a:lstStyle/>
           <a:p>
-            <a:pPr marL="0" lvl="0" indent="0" algn="l" rtl="0">
-              <a:lnSpc>
-                <a:spcPts val="2025"/>
-              </a:lnSpc>
-              <a:buNone/>
-            </a:pPr>
-            <a:r>
-              <a:rPr lang="hu-HU" b="0" i="0" dirty="0">
-                <a:latin typeface="Arial"/>
-                <a:ea typeface="Arial"/>
-                <a:cs typeface="Arial"/>
-              </a:rPr>
-              <a:t>Kép</a:t>
-            </a:r>
-          </a:p>
-          <a:p>
-            <a:pPr marL="0" lvl="0" indent="0" algn="l" rtl="0">
-              <a:lnSpc>
-                <a:spcPts val="2025"/>
-              </a:lnSpc>
-              <a:buNone/>
-            </a:pPr>
-            <a:endParaRPr lang="hu-HU" sz="1200" b="0" i="0" dirty="0">
-              <a:latin typeface="Arial"/>
-              <a:ea typeface="Arial"/>
-              <a:cs typeface="Arial"/>
-            </a:endParaRPr>
+            <a:pPr algn="ctr"/>
+            <a:r>
+              <a:rPr lang="hu-HU" sz="1800" dirty="0"/>
+              <a:t>Deák Bence:</a:t>
+            </a:r>
           </a:p>
         </p:txBody>
       </p:sp>
     </p:spTree>
     <p:extLst>
       <p:ext uri="{BB962C8B-B14F-4D97-AF65-F5344CB8AC3E}">
-        <p14:creationId xmlns:p14="http://schemas.microsoft.com/office/powerpoint/2010/main" val="1645029031"/>
+        <p14:creationId xmlns:p14="http://schemas.microsoft.com/office/powerpoint/2010/main" val="3787720111"/>
       </p:ext>
     </p:extLst>
   </p:cSld>
   <p:clrMapOvr>
     <a:masterClrMapping/>
   </p:clrMapOvr>
+  <p:transition spd="slow">
+    <p:cover/>
+  </p:transition>
 </p:sld>
 </file>
 
-<file path=ppt/slides/slide5.xml><?xml version="1.0" encoding="utf-8"?>
+<file path=ppt/slides/slide22.xml><?xml version="1.0" encoding="utf-8"?>
 <p:sld xmlns:a="http://schemas.openxmlformats.org/drawingml/2006/main" xmlns:r="http://schemas.openxmlformats.org/officeDocument/2006/relationships" xmlns:p="http://schemas.openxmlformats.org/presentationml/2006/main">
   <p:cSld>
+    <p:bg>
+      <p:bgPr>
+        <a:solidFill>
+          <a:schemeClr val="bg1"/>
+        </a:solidFill>
+        <a:effectLst/>
+      </p:bgPr>
+    </p:bg>
     <p:spTree>
       <p:nvGrpSpPr>
         <p:cNvPr id="1" name=""/>
@@ -14926,10 +14996,47 @@
       </p:grpSpPr>
       <p:sp>
         <p:nvSpPr>
+          <p:cNvPr id="2" name="Cím 1">
+            <a:extLst>
+              <a:ext uri="{FF2B5EF4-FFF2-40B4-BE49-F238E27FC236}">
+                <a16:creationId xmlns:a16="http://schemas.microsoft.com/office/drawing/2014/main" id="{E573A856-500D-4F83-9948-26626CDBF720}"/>
+              </a:ext>
+            </a:extLst>
+          </p:cNvPr>
+          <p:cNvSpPr>
+            <a:spLocks noGrp="1"/>
+          </p:cNvSpPr>
+          <p:nvPr>
+            <p:ph type="title"/>
+          </p:nvPr>
+        </p:nvSpPr>
+        <p:spPr>
+          <a:xfrm>
+            <a:off x="1263961" y="0"/>
+            <a:ext cx="1733762" cy="1478570"/>
+          </a:xfrm>
+          <a:noFill/>
+        </p:spPr>
+        <p:txBody>
+          <a:bodyPr>
+            <a:normAutofit/>
+          </a:bodyPr>
+          <a:lstStyle/>
+          <a:p>
+            <a:r>
+              <a:rPr lang="hu-HU" dirty="0" err="1"/>
+              <a:t>Demo</a:t>
+            </a:r>
+            <a:endParaRPr lang="hu-HU" dirty="0"/>
+          </a:p>
+        </p:txBody>
+      </p:sp>
+      <p:sp>
+        <p:nvSpPr>
           <p:cNvPr id="3" name="Tartalom helye 2">
             <a:extLst>
               <a:ext uri="{FF2B5EF4-FFF2-40B4-BE49-F238E27FC236}">
-                <a16:creationId xmlns:a16="http://schemas.microsoft.com/office/drawing/2014/main" id="{48FD925D-E93C-4FF0-8F36-50F874D3BCD7}"/>
+                <a16:creationId xmlns:a16="http://schemas.microsoft.com/office/drawing/2014/main" id="{7C35D271-2F94-45A0-9C2C-F2D629211D01}"/>
               </a:ext>
             </a:extLst>
           </p:cNvPr>
@@ -14940,235 +15047,10 @@
             <p:ph idx="1"/>
           </p:nvPr>
         </p:nvSpPr>
-        <p:spPr>
-          <a:xfrm>
-            <a:off x="805962" y="3568861"/>
-            <a:ext cx="5290038" cy="1542805"/>
-          </a:xfrm>
-        </p:spPr>
-        <p:txBody>
-          <a:bodyPr>
-            <a:normAutofit/>
-          </a:bodyPr>
+        <p:spPr/>
+        <p:txBody>
+          <a:bodyPr/>
           <a:lstStyle/>
-          <a:p>
-            <a:pPr marL="0" lvl="0" indent="0" algn="l" rtl="0">
-              <a:lnSpc>
-                <a:spcPts val="2025"/>
-              </a:lnSpc>
-              <a:buNone/>
-            </a:pPr>
-            <a:r>
-              <a:rPr lang="hu-HU" sz="1900" b="1" i="0" dirty="0">
-                <a:latin typeface="Arial"/>
-                <a:ea typeface="Arial"/>
-                <a:cs typeface="Arial"/>
-              </a:rPr>
-              <a:t>Nem-funkcionális követelmények:</a:t>
-            </a:r>
-            <a:r>
-              <a:rPr lang="hu-HU" sz="1900" b="0" i="0" dirty="0">
-                <a:latin typeface="Arial"/>
-                <a:ea typeface="Arial"/>
-                <a:cs typeface="Arial"/>
-              </a:rPr>
-              <a:t> </a:t>
-            </a:r>
-          </a:p>
-          <a:p>
-            <a:pPr marL="228600" lvl="1" indent="-228600" algn="l" rtl="0">
-              <a:lnSpc>
-                <a:spcPts val="2025"/>
-              </a:lnSpc>
-              <a:buFont typeface="Courier New"/>
-              <a:buChar char="•"/>
-            </a:pPr>
-            <a:r>
-              <a:rPr lang="hu-HU" sz="1900" b="0" i="0" dirty="0">
-                <a:latin typeface="Arial"/>
-                <a:ea typeface="Arial"/>
-                <a:cs typeface="Arial"/>
-              </a:rPr>
-              <a:t>Esztétikus, modern, a prémium autóápoláshoz méltó dizájn. </a:t>
-            </a:r>
-          </a:p>
-          <a:p>
-            <a:pPr marL="228600" lvl="1" indent="-228600" algn="l" rtl="0">
-              <a:lnSpc>
-                <a:spcPts val="2025"/>
-              </a:lnSpc>
-              <a:buFont typeface="Courier New"/>
-              <a:buChar char="•"/>
-            </a:pPr>
-            <a:r>
-              <a:rPr lang="hu-HU" sz="1900" b="0" i="0" dirty="0">
-                <a:latin typeface="Arial"/>
-                <a:ea typeface="Arial"/>
-                <a:cs typeface="Arial"/>
-              </a:rPr>
-              <a:t>Gyors betöltési idő és zökkenőmentes működés. </a:t>
-            </a:r>
-          </a:p>
-          <a:p>
-            <a:endParaRPr lang="hu-HU" dirty="0"/>
-          </a:p>
-          <a:p>
-            <a:endParaRPr lang="hu-HU" dirty="0"/>
-          </a:p>
-        </p:txBody>
-      </p:sp>
-      <p:sp>
-        <p:nvSpPr>
-          <p:cNvPr id="5" name="Szövegdoboz 4">
-            <a:extLst>
-              <a:ext uri="{FF2B5EF4-FFF2-40B4-BE49-F238E27FC236}">
-                <a16:creationId xmlns:a16="http://schemas.microsoft.com/office/drawing/2014/main" id="{96B46E47-A63F-4DA6-9EAD-7E45FBB045E8}"/>
-              </a:ext>
-            </a:extLst>
-          </p:cNvPr>
-          <p:cNvSpPr txBox="1"/>
-          <p:nvPr/>
-        </p:nvSpPr>
-        <p:spPr>
-          <a:xfrm>
-            <a:off x="805962" y="932961"/>
-            <a:ext cx="6097464" cy="1374735"/>
-          </a:xfrm>
-          <a:prstGeom prst="rect">
-            <a:avLst/>
-          </a:prstGeom>
-          <a:noFill/>
-        </p:spPr>
-        <p:txBody>
-          <a:bodyPr wrap="square">
-            <a:spAutoFit/>
-          </a:bodyPr>
-          <a:lstStyle/>
-          <a:p>
-            <a:pPr marL="0" lvl="0" indent="0" algn="l" rtl="0">
-              <a:lnSpc>
-                <a:spcPts val="2025"/>
-              </a:lnSpc>
-              <a:buNone/>
-            </a:pPr>
-            <a:r>
-              <a:rPr lang="hu-HU" b="1" i="0" dirty="0">
-                <a:latin typeface="Arial"/>
-                <a:ea typeface="Arial"/>
-                <a:cs typeface="Arial"/>
-              </a:rPr>
-              <a:t>Funkcionális követelmények:</a:t>
-            </a:r>
-            <a:r>
-              <a:rPr lang="hu-HU" b="0" i="0" dirty="0">
-                <a:latin typeface="Arial"/>
-                <a:ea typeface="Arial"/>
-                <a:cs typeface="Arial"/>
-              </a:rPr>
-              <a:t> </a:t>
-            </a:r>
-          </a:p>
-          <a:p>
-            <a:pPr marL="228600" lvl="1" indent="-228600" algn="l" rtl="0">
-              <a:lnSpc>
-                <a:spcPts val="2025"/>
-              </a:lnSpc>
-              <a:buFont typeface="Courier New"/>
-              <a:buChar char="•"/>
-            </a:pPr>
-            <a:r>
-              <a:rPr lang="hu-HU" b="0" i="0" dirty="0">
-                <a:latin typeface="Arial"/>
-                <a:ea typeface="Arial"/>
-                <a:cs typeface="Arial"/>
-              </a:rPr>
-              <a:t>Dinamikus árkalkulációs modul </a:t>
-            </a:r>
-          </a:p>
-          <a:p>
-            <a:pPr marL="228600" lvl="1" indent="-228600" algn="l" rtl="0">
-              <a:lnSpc>
-                <a:spcPts val="2025"/>
-              </a:lnSpc>
-              <a:buFont typeface="Courier New"/>
-              <a:buChar char="•"/>
-            </a:pPr>
-            <a:r>
-              <a:rPr lang="hu-HU" b="0" i="0" dirty="0">
-                <a:latin typeface="Arial"/>
-                <a:ea typeface="Arial"/>
-                <a:cs typeface="Arial"/>
-              </a:rPr>
-              <a:t>Mobilbarát, reszponzív felület </a:t>
-            </a:r>
-          </a:p>
-          <a:p>
-            <a:pPr marL="228600" lvl="1" indent="-228600" algn="l" rtl="0">
-              <a:lnSpc>
-                <a:spcPts val="2025"/>
-              </a:lnSpc>
-              <a:buFont typeface="Courier New"/>
-              <a:buChar char="•"/>
-            </a:pPr>
-            <a:r>
-              <a:rPr lang="hu-HU" b="0" i="0" dirty="0">
-                <a:latin typeface="Arial"/>
-                <a:ea typeface="Arial"/>
-                <a:cs typeface="Arial"/>
-              </a:rPr>
-              <a:t>Előtte-utána galéria a referenciamunkák bemutatására. </a:t>
-            </a:r>
-          </a:p>
-          <a:p>
-            <a:pPr marL="171450" lvl="1" indent="-171450">
-              <a:lnSpc>
-                <a:spcPts val="2025"/>
-              </a:lnSpc>
-            </a:pPr>
-            <a:r>
-              <a:rPr lang="hu-HU" b="0" i="0" dirty="0">
-                <a:latin typeface="Arial"/>
-                <a:ea typeface="Arial"/>
-                <a:cs typeface="Arial"/>
-              </a:rPr>
-              <a:t>Kapcsolatfelvételi és ajánlatkérő űrlap. </a:t>
-            </a:r>
-          </a:p>
-        </p:txBody>
-      </p:sp>
-      <p:sp>
-        <p:nvSpPr>
-          <p:cNvPr id="6" name="Szövegdoboz 5">
-            <a:extLst>
-              <a:ext uri="{FF2B5EF4-FFF2-40B4-BE49-F238E27FC236}">
-                <a16:creationId xmlns:a16="http://schemas.microsoft.com/office/drawing/2014/main" id="{7B1465CC-7698-45C8-A57A-2061D700E1CD}"/>
-              </a:ext>
-            </a:extLst>
-          </p:cNvPr>
-          <p:cNvSpPr txBox="1"/>
-          <p:nvPr/>
-        </p:nvSpPr>
-        <p:spPr>
-          <a:xfrm>
-            <a:off x="8818684" y="2782669"/>
-            <a:ext cx="844061" cy="646331"/>
-          </a:xfrm>
-          <a:prstGeom prst="rect">
-            <a:avLst/>
-          </a:prstGeom>
-          <a:noFill/>
-        </p:spPr>
-        <p:txBody>
-          <a:bodyPr wrap="square" rtlCol="0">
-            <a:spAutoFit/>
-          </a:bodyPr>
-          <a:lstStyle/>
-          <a:p>
-            <a:r>
-              <a:rPr lang="hu-HU" dirty="0"/>
-              <a:t>Kép</a:t>
-            </a:r>
-          </a:p>
           <a:p>
             <a:endParaRPr lang="hu-HU" dirty="0"/>
           </a:p>
@@ -15177,7 +15059,7 @@
     </p:spTree>
     <p:extLst>
       <p:ext uri="{BB962C8B-B14F-4D97-AF65-F5344CB8AC3E}">
-        <p14:creationId xmlns:p14="http://schemas.microsoft.com/office/powerpoint/2010/main" val="4164945641"/>
+        <p14:creationId xmlns:p14="http://schemas.microsoft.com/office/powerpoint/2010/main" val="3599427092"/>
       </p:ext>
     </p:extLst>
   </p:cSld>
@@ -15187,9 +15069,17 @@
 </p:sld>
 </file>
 
-<file path=ppt/slides/slide6.xml><?xml version="1.0" encoding="utf-8"?>
+<file path=ppt/slides/slide3.xml><?xml version="1.0" encoding="utf-8"?>
 <p:sld xmlns:a="http://schemas.openxmlformats.org/drawingml/2006/main" xmlns:r="http://schemas.openxmlformats.org/officeDocument/2006/relationships" xmlns:p="http://schemas.openxmlformats.org/presentationml/2006/main">
   <p:cSld>
+    <p:bg>
+      <p:bgPr>
+        <a:solidFill>
+          <a:schemeClr val="bg1"/>
+        </a:solidFill>
+        <a:effectLst/>
+      </p:bgPr>
+    </p:bg>
     <p:spTree>
       <p:nvGrpSpPr>
         <p:cNvPr id="1" name=""/>
@@ -15209,7 +15099,7 @@
           <p:cNvPr id="2" name="Cím 1">
             <a:extLst>
               <a:ext uri="{FF2B5EF4-FFF2-40B4-BE49-F238E27FC236}">
-                <a16:creationId xmlns:a16="http://schemas.microsoft.com/office/drawing/2014/main" id="{A07D3974-A1AE-C64F-4F45-E80272814933}"/>
+                <a16:creationId xmlns:a16="http://schemas.microsoft.com/office/drawing/2014/main" id="{47BD16F4-5B70-4050-8ED0-567D829C57EB}"/>
               </a:ext>
             </a:extLst>
           </p:cNvPr>
@@ -15222,8 +15112,8 @@
         </p:nvSpPr>
         <p:spPr>
           <a:xfrm>
-            <a:off x="3132" y="-217"/>
-            <a:ext cx="10515600" cy="1325563"/>
+            <a:off x="1295322" y="0"/>
+            <a:ext cx="9905998" cy="1478570"/>
           </a:xfrm>
         </p:spPr>
         <p:txBody>
@@ -15231,350 +15121,108 @@
           <a:lstStyle/>
           <a:p>
             <a:r>
-              <a:rPr lang="hu-HU" b="1" dirty="0">
-                <a:latin typeface="Arial"/>
-                <a:cs typeface="Arial"/>
-              </a:rPr>
-              <a:t>Tervezés</a:t>
-            </a:r>
-          </a:p>
-          <a:p>
-            <a:endParaRPr lang="hu-HU" dirty="0">
-              <a:ea typeface="Calibri Light"/>
-              <a:cs typeface="Calibri Light"/>
-            </a:endParaRPr>
-          </a:p>
-        </p:txBody>
-      </p:sp>
-      <p:sp>
-        <p:nvSpPr>
-          <p:cNvPr id="4" name="Szövegdoboz 3">
+              <a:rPr lang="hu-HU" dirty="0"/>
+              <a:t>Funkciók</a:t>
+            </a:r>
+          </a:p>
+        </p:txBody>
+      </p:sp>
+      <p:sp>
+        <p:nvSpPr>
+          <p:cNvPr id="3" name="Tartalom helye 2">
             <a:extLst>
               <a:ext uri="{FF2B5EF4-FFF2-40B4-BE49-F238E27FC236}">
-                <a16:creationId xmlns:a16="http://schemas.microsoft.com/office/drawing/2014/main" id="{6FE10868-0813-5A50-9DF3-76EEA12858FA}"/>
+                <a16:creationId xmlns:a16="http://schemas.microsoft.com/office/drawing/2014/main" id="{5D907A15-D950-4146-B215-3040A0FA8F7C}"/>
               </a:ext>
             </a:extLst>
           </p:cNvPr>
-          <p:cNvSpPr txBox="1"/>
-          <p:nvPr/>
+          <p:cNvSpPr>
+            <a:spLocks noGrp="1"/>
+          </p:cNvSpPr>
+          <p:nvPr>
+            <p:ph idx="1"/>
+          </p:nvPr>
         </p:nvSpPr>
         <p:spPr>
           <a:xfrm>
-            <a:off x="4659922" y="1212758"/>
-            <a:ext cx="8554915" cy="966931"/>
+            <a:off x="1295322" y="1307927"/>
+            <a:ext cx="9905999" cy="3541714"/>
           </a:xfrm>
-          <a:prstGeom prst="rect">
-            <a:avLst/>
-          </a:prstGeom>
-          <a:noFill/>
         </p:spPr>
         <p:txBody>
-          <a:bodyPr rot="0" spcFirstLastPara="0" vertOverflow="overflow" horzOverflow="overflow" vert="horz" wrap="square" lIns="91440" tIns="45720" rIns="91440" bIns="45720" numCol="1" spcCol="0" rtlCol="0" fromWordArt="0" anchor="t" anchorCtr="0" forceAA="0" compatLnSpc="1">
-            <a:prstTxWarp prst="textNoShape">
-              <a:avLst/>
-            </a:prstTxWarp>
-            <a:spAutoFit/>
-          </a:bodyPr>
+          <a:bodyPr/>
           <a:lstStyle/>
           <a:p>
-            <a:pPr algn="l" rtl="0">
-              <a:lnSpc>
-                <a:spcPts val="2475"/>
-              </a:lnSpc>
-            </a:pPr>
-            <a:r>
-              <a:rPr lang="hu-HU" sz="2000" b="1" i="0" u="sng" dirty="0">
-                <a:latin typeface="Arial"/>
-                <a:ea typeface="Arial"/>
-                <a:cs typeface="Arial"/>
-              </a:rPr>
-              <a:t>Alkalmazás</a:t>
-            </a:r>
-            <a:r>
-              <a:rPr sz="2000" b="1" i="0" u="sng" dirty="0">
-                <a:latin typeface="Arial"/>
-                <a:ea typeface="Arial"/>
-                <a:cs typeface="Arial"/>
-              </a:rPr>
-              <a:t> </a:t>
-            </a:r>
-          </a:p>
-          <a:p>
-            <a:endParaRPr dirty="0"/>
-          </a:p>
-          <a:p>
-            <a:pPr algn="ctr"/>
+            <a:r>
+              <a:rPr lang="hu-HU" dirty="0"/>
+              <a:t>Regisztrálás</a:t>
+            </a:r>
+          </a:p>
+          <a:p>
+            <a:r>
+              <a:rPr lang="hu-HU" dirty="0"/>
+              <a:t>Bejelentkezés</a:t>
+            </a:r>
+          </a:p>
+          <a:p>
+            <a:r>
+              <a:rPr lang="hu-HU" dirty="0"/>
+              <a:t>kijelentkezés</a:t>
+            </a:r>
+          </a:p>
+          <a:p>
+            <a:r>
+              <a:rPr lang="hu-HU" dirty="0"/>
+              <a:t>Számlaírás</a:t>
+            </a:r>
+          </a:p>
+          <a:p>
+            <a:r>
+              <a:rPr lang="hu-HU" dirty="0"/>
+              <a:t>Kapcsolatfelvétel</a:t>
+            </a:r>
+          </a:p>
+          <a:p>
             <a:endParaRPr lang="hu-HU" dirty="0"/>
           </a:p>
-        </p:txBody>
-      </p:sp>
-      <p:sp>
-        <p:nvSpPr>
-          <p:cNvPr id="9" name="Szövegdoboz 8">
-            <a:extLst>
-              <a:ext uri="{FF2B5EF4-FFF2-40B4-BE49-F238E27FC236}">
-                <a16:creationId xmlns:a16="http://schemas.microsoft.com/office/drawing/2014/main" id="{0F292E9B-E870-412D-BBA0-03BBC60837EC}"/>
-              </a:ext>
-            </a:extLst>
-          </p:cNvPr>
-          <p:cNvSpPr txBox="1"/>
-          <p:nvPr/>
-        </p:nvSpPr>
-        <p:spPr>
-          <a:xfrm>
-            <a:off x="2864094" y="3034034"/>
-            <a:ext cx="6220558" cy="605294"/>
-          </a:xfrm>
-          <a:prstGeom prst="rect">
-            <a:avLst/>
-          </a:prstGeom>
-          <a:noFill/>
-        </p:spPr>
-        <p:txBody>
-          <a:bodyPr wrap="square">
-            <a:spAutoFit/>
-          </a:bodyPr>
-          <a:lstStyle/>
-          <a:p>
-            <a:pPr marL="228600" lvl="0" indent="-228600" algn="l" rtl="0">
-              <a:lnSpc>
-                <a:spcPts val="2025"/>
-              </a:lnSpc>
-              <a:buFont typeface="Symbol"/>
-              <a:buChar char="•"/>
-            </a:pPr>
-            <a:r>
-              <a:rPr lang="hu-HU" sz="1800" b="1" i="0" dirty="0">
-                <a:latin typeface="Arial"/>
-                <a:ea typeface="Arial"/>
-                <a:cs typeface="Arial"/>
-              </a:rPr>
-              <a:t>Projekt neve:</a:t>
-            </a:r>
-            <a:r>
-              <a:rPr lang="hu-HU" sz="1800" b="0" i="0" dirty="0">
-                <a:latin typeface="Arial"/>
-                <a:ea typeface="Arial"/>
-                <a:cs typeface="Arial"/>
-              </a:rPr>
-              <a:t> </a:t>
-            </a:r>
-            <a:r>
-              <a:rPr lang="hu-HU" sz="1800" b="0" i="0" dirty="0" err="1">
-                <a:latin typeface="Arial"/>
-                <a:ea typeface="Arial"/>
-                <a:cs typeface="Arial"/>
-              </a:rPr>
-              <a:t>Vexora</a:t>
-            </a:r>
-            <a:r>
-              <a:rPr lang="hu-HU" sz="1800" b="0" i="0" dirty="0">
-                <a:latin typeface="Arial"/>
-                <a:ea typeface="Arial"/>
-                <a:cs typeface="Arial"/>
-              </a:rPr>
-              <a:t> </a:t>
-            </a:r>
-            <a:r>
-              <a:rPr lang="hu-HU" sz="1800" b="0" i="0" dirty="0" err="1">
-                <a:latin typeface="Arial"/>
-                <a:ea typeface="Arial"/>
-                <a:cs typeface="Arial"/>
-              </a:rPr>
-              <a:t>Detailing</a:t>
-            </a:r>
-            <a:r>
-              <a:rPr lang="hu-HU" sz="1800" b="0" i="0" dirty="0">
-                <a:latin typeface="Arial"/>
-                <a:ea typeface="Arial"/>
-                <a:cs typeface="Arial"/>
-              </a:rPr>
-              <a:t> Weboldal és Interaktív Kalkulátor </a:t>
-            </a:r>
-          </a:p>
-        </p:txBody>
-      </p:sp>
-      <p:sp>
-        <p:nvSpPr>
-          <p:cNvPr id="11" name="Szövegdoboz 10">
-            <a:extLst>
-              <a:ext uri="{FF2B5EF4-FFF2-40B4-BE49-F238E27FC236}">
-                <a16:creationId xmlns:a16="http://schemas.microsoft.com/office/drawing/2014/main" id="{7214B334-4249-4E86-B865-40753858AD45}"/>
-              </a:ext>
-            </a:extLst>
-          </p:cNvPr>
-          <p:cNvSpPr txBox="1"/>
-          <p:nvPr/>
-        </p:nvSpPr>
-        <p:spPr>
-          <a:xfrm>
-            <a:off x="2864094" y="3798433"/>
-            <a:ext cx="6220558" cy="605294"/>
-          </a:xfrm>
-          <a:prstGeom prst="rect">
-            <a:avLst/>
-          </a:prstGeom>
-          <a:noFill/>
-        </p:spPr>
-        <p:txBody>
-          <a:bodyPr wrap="square">
-            <a:spAutoFit/>
-          </a:bodyPr>
-          <a:lstStyle/>
-          <a:p>
-            <a:pPr marL="228600" lvl="0" indent="-228600" algn="l" rtl="0">
-              <a:lnSpc>
-                <a:spcPts val="2025"/>
-              </a:lnSpc>
-              <a:buFont typeface="Symbol"/>
-              <a:buChar char="•"/>
-            </a:pPr>
-            <a:r>
-              <a:rPr lang="hu-HU" sz="1800" b="1" i="0" dirty="0">
-                <a:latin typeface="Arial"/>
-                <a:ea typeface="Arial"/>
-                <a:cs typeface="Arial"/>
-              </a:rPr>
-              <a:t>Célcsoport:</a:t>
-            </a:r>
-            <a:r>
-              <a:rPr lang="hu-HU" sz="1800" b="0" i="0" dirty="0">
-                <a:latin typeface="Arial"/>
-                <a:ea typeface="Arial"/>
-                <a:cs typeface="Arial"/>
-              </a:rPr>
-              <a:t> Igényes autó, prémium kategóriás jármű tulajdonosok </a:t>
-            </a:r>
-          </a:p>
-        </p:txBody>
-      </p:sp>
-      <p:sp>
-        <p:nvSpPr>
-          <p:cNvPr id="13" name="Szövegdoboz 12">
-            <a:extLst>
-              <a:ext uri="{FF2B5EF4-FFF2-40B4-BE49-F238E27FC236}">
-                <a16:creationId xmlns:a16="http://schemas.microsoft.com/office/drawing/2014/main" id="{68128B67-4A95-4AEF-B720-6A9BE546CCAA}"/>
-              </a:ext>
-            </a:extLst>
-          </p:cNvPr>
-          <p:cNvSpPr txBox="1"/>
-          <p:nvPr/>
-        </p:nvSpPr>
-        <p:spPr>
-          <a:xfrm>
-            <a:off x="2864094" y="4481121"/>
-            <a:ext cx="6220558" cy="348813"/>
-          </a:xfrm>
-          <a:prstGeom prst="rect">
-            <a:avLst/>
-          </a:prstGeom>
-          <a:noFill/>
-        </p:spPr>
-        <p:txBody>
-          <a:bodyPr wrap="square">
-            <a:spAutoFit/>
-          </a:bodyPr>
-          <a:lstStyle/>
-          <a:p>
-            <a:pPr marL="228600" lvl="0" indent="-228600" algn="l" rtl="0">
-              <a:lnSpc>
-                <a:spcPts val="2025"/>
-              </a:lnSpc>
-              <a:buFont typeface="Symbol"/>
-              <a:buChar char="•"/>
-            </a:pPr>
-            <a:r>
-              <a:rPr lang="hu-HU" sz="1800" b="1" i="0" dirty="0">
-                <a:latin typeface="Arial"/>
-                <a:ea typeface="Arial"/>
-                <a:cs typeface="Arial"/>
-              </a:rPr>
-              <a:t>Technológiai környezet:</a:t>
-            </a:r>
-            <a:r>
-              <a:rPr lang="hu-HU" sz="1800" b="0" i="0" dirty="0">
-                <a:latin typeface="Arial"/>
-                <a:ea typeface="Arial"/>
-                <a:cs typeface="Arial"/>
-              </a:rPr>
-              <a:t> </a:t>
-            </a:r>
-          </a:p>
-        </p:txBody>
-      </p:sp>
-      <p:sp>
-        <p:nvSpPr>
-          <p:cNvPr id="15" name="Szövegdoboz 14">
-            <a:extLst>
-              <a:ext uri="{FF2B5EF4-FFF2-40B4-BE49-F238E27FC236}">
-                <a16:creationId xmlns:a16="http://schemas.microsoft.com/office/drawing/2014/main" id="{8AFFED19-2B67-4D67-BCCE-D7DADCAF3C22}"/>
-              </a:ext>
-            </a:extLst>
-          </p:cNvPr>
-          <p:cNvSpPr txBox="1"/>
-          <p:nvPr/>
-        </p:nvSpPr>
-        <p:spPr>
-          <a:xfrm>
-            <a:off x="2864094" y="2504968"/>
-            <a:ext cx="6220558" cy="326371"/>
-          </a:xfrm>
-          <a:prstGeom prst="rect">
-            <a:avLst/>
-          </a:prstGeom>
-          <a:noFill/>
-        </p:spPr>
-        <p:txBody>
-          <a:bodyPr wrap="square">
-            <a:spAutoFit/>
-          </a:bodyPr>
-          <a:lstStyle/>
-          <a:p>
-            <a:pPr algn="l" rtl="0">
-              <a:lnSpc>
-                <a:spcPts val="1781"/>
-              </a:lnSpc>
-            </a:pPr>
-            <a:r>
-              <a:rPr lang="hu-HU" sz="1800" b="1" i="0" dirty="0">
-                <a:latin typeface="Calibri Light"/>
-                <a:ea typeface="Calibri Light"/>
-                <a:cs typeface="Calibri Light"/>
-              </a:rPr>
-              <a:t>Alap információk</a:t>
-            </a:r>
-            <a:r>
-              <a:rPr lang="hu-HU" sz="1800" b="1" dirty="0">
-                <a:latin typeface="Calibri Light"/>
-                <a:ea typeface="Calibri Light"/>
-                <a:cs typeface="Calibri Light"/>
-              </a:rPr>
-              <a:t>:</a:t>
-            </a:r>
-            <a:endParaRPr lang="hu-HU" sz="1800" b="1" i="0" dirty="0">
-              <a:latin typeface="Calibri Light"/>
-              <a:ea typeface="Calibri Light"/>
-              <a:cs typeface="Calibri Light"/>
-            </a:endParaRPr>
+          <a:p>
+            <a:endParaRPr lang="hu-HU" dirty="0"/>
+          </a:p>
+          <a:p>
+            <a:endParaRPr lang="hu-HU" dirty="0"/>
+          </a:p>
+          <a:p>
+            <a:endParaRPr lang="hu-HU" dirty="0"/>
           </a:p>
         </p:txBody>
       </p:sp>
     </p:spTree>
     <p:extLst>
       <p:ext uri="{BB962C8B-B14F-4D97-AF65-F5344CB8AC3E}">
-        <p14:creationId xmlns:p14="http://schemas.microsoft.com/office/powerpoint/2010/main" val="3919525108"/>
+        <p14:creationId xmlns:p14="http://schemas.microsoft.com/office/powerpoint/2010/main" val="3771105314"/>
       </p:ext>
     </p:extLst>
   </p:cSld>
   <p:clrMapOvr>
     <a:masterClrMapping/>
   </p:clrMapOvr>
+  <p:transition spd="slow">
+    <p:cover/>
+  </p:transition>
 </p:sld>
 </file>
 
-<file path=ppt/slides/slide7.xml><?xml version="1.0" encoding="utf-8"?>
+<file path=ppt/slides/slide4.xml><?xml version="1.0" encoding="utf-8"?>
 <p:sld xmlns:a="http://schemas.openxmlformats.org/drawingml/2006/main" xmlns:r="http://schemas.openxmlformats.org/officeDocument/2006/relationships" xmlns:p="http://schemas.openxmlformats.org/presentationml/2006/main">
   <p:cSld>
+    <p:bg>
+      <p:bgPr>
+        <a:solidFill>
+          <a:schemeClr val="bg1"/>
+        </a:solidFill>
+        <a:effectLst/>
+      </p:bgPr>
+    </p:bg>
     <p:spTree>
       <p:nvGrpSpPr>
         <p:cNvPr id="1" name=""/>
@@ -15591,10 +15239,10 @@
       </p:grpSpPr>
       <p:sp>
         <p:nvSpPr>
-          <p:cNvPr id="3" name="Tartalom helye 2">
+          <p:cNvPr id="2" name="Cím 1">
             <a:extLst>
               <a:ext uri="{FF2B5EF4-FFF2-40B4-BE49-F238E27FC236}">
-                <a16:creationId xmlns:a16="http://schemas.microsoft.com/office/drawing/2014/main" id="{09BF441A-BC39-4BB6-A46F-24A002D8C126}"/>
+                <a16:creationId xmlns:a16="http://schemas.microsoft.com/office/drawing/2014/main" id="{531E0B75-C70C-AFA2-4D6C-D91D854F6878}"/>
               </a:ext>
             </a:extLst>
           </p:cNvPr>
@@ -15602,56 +15250,60 @@
             <a:spLocks noGrp="1"/>
           </p:cNvSpPr>
           <p:nvPr>
-            <p:ph idx="1"/>
+            <p:ph type="title"/>
           </p:nvPr>
         </p:nvSpPr>
         <p:spPr>
           <a:xfrm>
-            <a:off x="2716098" y="145902"/>
-            <a:ext cx="10515600" cy="4351338"/>
+            <a:off x="4103792" y="0"/>
+            <a:ext cx="10515600" cy="1325563"/>
           </a:xfrm>
         </p:spPr>
         <p:txBody>
           <a:bodyPr/>
           <a:lstStyle/>
           <a:p>
-            <a:pPr marL="0" indent="0" algn="l" rtl="0">
+            <a:pPr>
               <a:lnSpc>
-                <a:spcPts val="1781"/>
+                <a:spcPts val="3038"/>
               </a:lnSpc>
-              <a:buNone/>
+              <a:spcBef>
+                <a:spcPts val="0"/>
+              </a:spcBef>
             </a:pPr>
             <a:r>
-              <a:rPr lang="hu-HU" sz="2400" b="1" u="sng" dirty="0">
-                <a:latin typeface="Calibri Light"/>
-                <a:ea typeface="Calibri Light"/>
-                <a:cs typeface="Calibri Light"/>
+              <a:rPr lang="hu-HU" b="1" dirty="0">
+                <a:latin typeface="Arial"/>
+                <a:cs typeface="Arial"/>
               </a:rPr>
-              <a:t>T</a:t>
-            </a:r>
-            <a:r>
-              <a:rPr lang="hu-HU" sz="2400" b="1" i="0" u="sng" dirty="0">
-                <a:latin typeface="Calibri Light"/>
-                <a:ea typeface="Calibri Light"/>
-                <a:cs typeface="Calibri Light"/>
+              <a:t>Specifikáció</a:t>
+            </a:r>
+            <a:r>
+              <a:rPr lang="en-US" b="1" dirty="0">
+                <a:latin typeface="Arial"/>
+                <a:cs typeface="Arial"/>
               </a:rPr>
-              <a:t>elepített szolgáltatások és egyéb alkalmazások </a:t>
-            </a:r>
-          </a:p>
-          <a:p>
-            <a:endParaRPr lang="hu-HU" dirty="0"/>
-          </a:p>
-          <a:p>
-            <a:endParaRPr lang="hu-HU" dirty="0"/>
-          </a:p>
-        </p:txBody>
-      </p:sp>
-      <p:sp>
-        <p:nvSpPr>
-          <p:cNvPr id="5" name="Szövegdoboz 4">
+              <a:t> </a:t>
+            </a:r>
+            <a:endParaRPr lang="en-US" dirty="0">
+              <a:latin typeface="Arial"/>
+              <a:cs typeface="Arial"/>
+            </a:endParaRPr>
+          </a:p>
+          <a:p>
+            <a:endParaRPr lang="hu-HU" dirty="0">
+              <a:ea typeface="Calibri Light"/>
+              <a:cs typeface="Calibri Light"/>
+            </a:endParaRPr>
+          </a:p>
+        </p:txBody>
+      </p:sp>
+      <p:sp>
+        <p:nvSpPr>
+          <p:cNvPr id="4" name="Szövegdoboz 3">
             <a:extLst>
               <a:ext uri="{FF2B5EF4-FFF2-40B4-BE49-F238E27FC236}">
-                <a16:creationId xmlns:a16="http://schemas.microsoft.com/office/drawing/2014/main" id="{92630321-3779-4865-AD03-A3592E8467A8}"/>
+                <a16:creationId xmlns:a16="http://schemas.microsoft.com/office/drawing/2014/main" id="{14BA33D7-B191-EE62-8A1A-8160F8BD564F}"/>
               </a:ext>
             </a:extLst>
           </p:cNvPr>
@@ -15660,8 +15312,8 @@
         </p:nvSpPr>
         <p:spPr>
           <a:xfrm>
-            <a:off x="3045803" y="2941714"/>
-            <a:ext cx="6097464" cy="605294"/>
+            <a:off x="81876" y="1135248"/>
+            <a:ext cx="6479931" cy="861774"/>
           </a:xfrm>
           <a:prstGeom prst="rect">
             <a:avLst/>
@@ -15669,59 +15321,69 @@
           <a:noFill/>
         </p:spPr>
         <p:txBody>
-          <a:bodyPr wrap="square">
+          <a:bodyPr rot="0" spcFirstLastPara="0" vertOverflow="overflow" horzOverflow="overflow" vert="horz" wrap="square" lIns="91440" tIns="45720" rIns="91440" bIns="45720" numCol="1" spcCol="0" rtlCol="0" fromWordArt="0" anchor="t" anchorCtr="0" forceAA="0" compatLnSpc="1">
+            <a:prstTxWarp prst="textNoShape">
+              <a:avLst/>
+            </a:prstTxWarp>
             <a:spAutoFit/>
           </a:bodyPr>
           <a:lstStyle/>
           <a:p>
-            <a:pPr marL="228600" lvl="0" indent="-228600" algn="l" rtl="0">
+            <a:pPr algn="l" rtl="0">
               <a:lnSpc>
                 <a:spcPts val="2025"/>
               </a:lnSpc>
-              <a:buFont typeface="Symbol"/>
-              <a:buChar char="•"/>
             </a:pPr>
             <a:r>
-              <a:rPr lang="hu-HU" sz="1800" b="1" i="0" dirty="0">
+              <a:rPr lang="hu-HU" b="0" i="0" dirty="0">
                 <a:latin typeface="Arial"/>
                 <a:ea typeface="Arial"/>
                 <a:cs typeface="Arial"/>
               </a:rPr>
-              <a:t>Webszerver és Tárhely:</a:t>
-            </a:r>
-            <a:r>
-              <a:rPr lang="hu-HU" sz="1800" b="0" i="0" dirty="0">
+              <a:t>A projekt célja a </a:t>
+            </a:r>
+            <a:r>
+              <a:rPr lang="hu-HU" b="1" i="0" dirty="0" err="1">
                 <a:latin typeface="Arial"/>
                 <a:ea typeface="Arial"/>
                 <a:cs typeface="Arial"/>
               </a:rPr>
-              <a:t> Gyors, megbízható SSD alapú </a:t>
-            </a:r>
-            <a:r>
-              <a:rPr lang="hu-HU" sz="1800" b="0" i="0" dirty="0" err="1">
+              <a:t>Vexora</a:t>
+            </a:r>
+            <a:r>
+              <a:rPr lang="hu-HU" b="1" i="0" dirty="0">
                 <a:latin typeface="Arial"/>
                 <a:ea typeface="Arial"/>
                 <a:cs typeface="Arial"/>
               </a:rPr>
-              <a:t>hoszting</a:t>
-            </a:r>
-            <a:r>
-              <a:rPr lang="hu-HU" sz="1800" b="0" i="0" dirty="0">
+              <a:t> </a:t>
+            </a:r>
+            <a:r>
+              <a:rPr lang="hu-HU" b="1" i="0" dirty="0" err="1">
                 <a:latin typeface="Arial"/>
                 <a:ea typeface="Arial"/>
                 <a:cs typeface="Arial"/>
               </a:rPr>
-              <a:t> a gyors képbetöltés érdekében. </a:t>
-            </a:r>
-          </a:p>
-        </p:txBody>
-      </p:sp>
-      <p:sp>
-        <p:nvSpPr>
-          <p:cNvPr id="7" name="Szövegdoboz 6">
+              <a:t>Detailing</a:t>
+            </a:r>
+            <a:r>
+              <a:rPr lang="hu-HU" b="0" i="0" dirty="0">
+                <a:latin typeface="Arial"/>
+                <a:ea typeface="Arial"/>
+                <a:cs typeface="Arial"/>
+              </a:rPr>
+              <a:t> nevű prémium autókozmetikai vállalkozás online jelenlétének megteremtése és egy interaktív weboldal kifejlesztése. </a:t>
+            </a:r>
+            <a:endParaRPr lang="hu-HU" dirty="0"/>
+          </a:p>
+        </p:txBody>
+      </p:sp>
+      <p:sp>
+        <p:nvSpPr>
+          <p:cNvPr id="9" name="Szövegdoboz 8">
             <a:extLst>
               <a:ext uri="{FF2B5EF4-FFF2-40B4-BE49-F238E27FC236}">
-                <a16:creationId xmlns:a16="http://schemas.microsoft.com/office/drawing/2014/main" id="{E1451CBA-C99C-478C-8D9D-1E35B9E15F39}"/>
+                <a16:creationId xmlns:a16="http://schemas.microsoft.com/office/drawing/2014/main" id="{EE96B4C2-5024-496C-A6DA-823A6C22FCAF}"/>
               </a:ext>
             </a:extLst>
           </p:cNvPr>
@@ -15730,8 +15392,8 @@
         </p:nvSpPr>
         <p:spPr>
           <a:xfrm>
-            <a:off x="3045803" y="4241958"/>
-            <a:ext cx="6097464" cy="861774"/>
+            <a:off x="81876" y="4907144"/>
+            <a:ext cx="6220558" cy="1631216"/>
           </a:xfrm>
           <a:prstGeom prst="rect">
             <a:avLst/>
@@ -15744,38 +15406,44 @@
           </a:bodyPr>
           <a:lstStyle/>
           <a:p>
-            <a:pPr marL="228600" lvl="0" indent="-228600" algn="l" rtl="0">
+            <a:pPr algn="l" rtl="0">
               <a:lnSpc>
                 <a:spcPts val="2025"/>
               </a:lnSpc>
-              <a:buFont typeface="Symbol"/>
-              <a:buChar char="•"/>
             </a:pPr>
-            <a:r>
-              <a:rPr lang="hu-HU" sz="1800" b="1" i="0" dirty="0">
-                <a:latin typeface="Arial"/>
-                <a:ea typeface="Arial"/>
-                <a:cs typeface="Arial"/>
-              </a:rPr>
-              <a:t>Képoptimalizáló modul:</a:t>
-            </a:r>
             <a:r>
               <a:rPr lang="hu-HU" sz="1800" b="0" i="0" dirty="0">
                 <a:latin typeface="Arial"/>
                 <a:ea typeface="Arial"/>
                 <a:cs typeface="Arial"/>
               </a:rPr>
-              <a:t> A feltöltött nagy felbontású referenciaképek automatikus tömörítése a gyors oldalbetöltésért. </a:t>
-            </a:r>
-          </a:p>
-        </p:txBody>
-      </p:sp>
-      <p:sp>
-        <p:nvSpPr>
-          <p:cNvPr id="9" name="Szövegdoboz 8">
+              <a:t>A rendszer lehetővé teszi a látogatók számára, hogy a járművük kategóriája és a választott autóápolási/</a:t>
+            </a:r>
+            <a:r>
+              <a:rPr lang="hu-HU" sz="1800" b="0" i="0" dirty="0" err="1">
+                <a:latin typeface="Arial"/>
+                <a:ea typeface="Arial"/>
+                <a:cs typeface="Arial"/>
+              </a:rPr>
+              <a:t>detailing</a:t>
+            </a:r>
+            <a:r>
+              <a:rPr lang="hu-HU" sz="1800" b="0" i="0" dirty="0">
+                <a:latin typeface="Arial"/>
+                <a:ea typeface="Arial"/>
+                <a:cs typeface="Arial"/>
+              </a:rPr>
+              <a:t> csomagok (pl. külső-belső takarítás, polírozás, kerámia bevonat) alapján azonnali, személyre szabott becslést kapjanak a várható költségekről és a munkavégzés időtartamáról. </a:t>
+            </a:r>
+          </a:p>
+        </p:txBody>
+      </p:sp>
+      <p:sp>
+        <p:nvSpPr>
+          <p:cNvPr id="11" name="Szövegdoboz 10">
             <a:extLst>
               <a:ext uri="{FF2B5EF4-FFF2-40B4-BE49-F238E27FC236}">
-                <a16:creationId xmlns:a16="http://schemas.microsoft.com/office/drawing/2014/main" id="{AF8A34B3-5AFB-41B5-AE3E-E36BB5570366}"/>
+                <a16:creationId xmlns:a16="http://schemas.microsoft.com/office/drawing/2014/main" id="{0D261407-B455-4152-80B5-388631409BFE}"/>
               </a:ext>
             </a:extLst>
           </p:cNvPr>
@@ -15784,8 +15452,8 @@
         </p:nvSpPr>
         <p:spPr>
           <a:xfrm>
-            <a:off x="3045803" y="1459797"/>
-            <a:ext cx="6097464" cy="861774"/>
+            <a:off x="81876" y="2967335"/>
+            <a:ext cx="6220558" cy="923330"/>
           </a:xfrm>
           <a:prstGeom prst="rect">
             <a:avLst/>
@@ -15798,20 +15466,21 @@
           </a:bodyPr>
           <a:lstStyle/>
           <a:p>
-            <a:pPr marL="228600" lvl="0" indent="-228600" algn="l" rtl="0">
-              <a:lnSpc>
-                <a:spcPts val="2025"/>
-              </a:lnSpc>
-              <a:buFont typeface="Symbol"/>
-              <a:buChar char="•"/>
-            </a:pPr>
+            <a:r>
+              <a:rPr lang="hu-HU" sz="1800" b="0" i="0" dirty="0">
+                <a:latin typeface="Arial"/>
+                <a:ea typeface="Arial"/>
+                <a:cs typeface="Arial"/>
+              </a:rPr>
+              <a:t>A weboldal elsődleges funkciója a cég szolgáltatásainak bemutatása mellett egy dinamikus </a:t>
+            </a:r>
             <a:r>
               <a:rPr lang="hu-HU" sz="1800" b="1" i="0" dirty="0">
                 <a:latin typeface="Arial"/>
                 <a:ea typeface="Arial"/>
                 <a:cs typeface="Arial"/>
               </a:rPr>
-              <a:t>Email / Értesítési rendszer:</a:t>
+              <a:t>ár- és időtartam-kalkulátor</a:t>
             </a:r>
             <a:r>
               <a:rPr lang="hu-HU" sz="1800" b="0" i="0" dirty="0">
@@ -15819,7 +15488,71 @@
                 <a:ea typeface="Arial"/>
                 <a:cs typeface="Arial"/>
               </a:rPr>
-              <a:t> Azonnali e-mail értesítés küldése a műhelynek, ha egy ügyfél árajánlatot kér a kalkulátoron keresztül. </a:t>
+              <a:t> biztosítása. </a:t>
+            </a:r>
+            <a:endParaRPr lang="hu-HU" dirty="0"/>
+          </a:p>
+        </p:txBody>
+      </p:sp>
+      <p:sp>
+        <p:nvSpPr>
+          <p:cNvPr id="10" name="Szövegdoboz 9">
+            <a:extLst>
+              <a:ext uri="{FF2B5EF4-FFF2-40B4-BE49-F238E27FC236}">
+                <a16:creationId xmlns:a16="http://schemas.microsoft.com/office/drawing/2014/main" id="{FC430B3E-2627-4708-ABED-B898E59D779F}"/>
+              </a:ext>
+            </a:extLst>
+          </p:cNvPr>
+          <p:cNvSpPr txBox="1"/>
+          <p:nvPr/>
+        </p:nvSpPr>
+        <p:spPr>
+          <a:xfrm>
+            <a:off x="8671960" y="2367170"/>
+            <a:ext cx="2039816" cy="1200329"/>
+          </a:xfrm>
+          <a:prstGeom prst="rect">
+            <a:avLst/>
+          </a:prstGeom>
+          <a:noFill/>
+        </p:spPr>
+        <p:txBody>
+          <a:bodyPr wrap="square" rtlCol="0">
+            <a:spAutoFit/>
+          </a:bodyPr>
+          <a:lstStyle/>
+          <a:p>
+            <a:r>
+              <a:rPr lang="hu-HU" dirty="0" err="1"/>
+              <a:t>Specifikáciot</a:t>
+            </a:r>
+            <a:r>
+              <a:rPr lang="hu-HU" dirty="0"/>
+              <a:t> </a:t>
+            </a:r>
+            <a:r>
+              <a:rPr lang="hu-HU" dirty="0" err="1"/>
+              <a:t>jelemző</a:t>
+            </a:r>
+            <a:r>
+              <a:rPr lang="hu-HU" dirty="0"/>
+              <a:t> kép vagy szintén egy </a:t>
+            </a:r>
+            <a:r>
+              <a:rPr lang="hu-HU" dirty="0" err="1"/>
+              <a:t>auto</a:t>
+            </a:r>
+            <a:r>
+              <a:rPr lang="hu-HU" dirty="0"/>
+              <a:t> kozmetikai kép(</a:t>
+            </a:r>
+            <a:r>
+              <a:rPr lang="hu-HU" dirty="0" err="1"/>
+              <a:t>ek</a:t>
+            </a:r>
+            <a:r>
+              <a:rPr lang="hu-HU" dirty="0"/>
+              <a:t>)</a:t>
             </a:r>
           </a:p>
         </p:txBody>
@@ -15827,19 +15560,30 @@
     </p:spTree>
     <p:extLst>
       <p:ext uri="{BB962C8B-B14F-4D97-AF65-F5344CB8AC3E}">
-        <p14:creationId xmlns:p14="http://schemas.microsoft.com/office/powerpoint/2010/main" val="2648066028"/>
+        <p14:creationId xmlns:p14="http://schemas.microsoft.com/office/powerpoint/2010/main" val="1183916578"/>
       </p:ext>
     </p:extLst>
   </p:cSld>
   <p:clrMapOvr>
     <a:masterClrMapping/>
   </p:clrMapOvr>
+  <p:transition spd="slow">
+    <p:cover/>
+  </p:transition>
 </p:sld>
 </file>
 
-<file path=ppt/slides/slide8.xml><?xml version="1.0" encoding="utf-8"?>
+<file path=ppt/slides/slide5.xml><?xml version="1.0" encoding="utf-8"?>
 <p:sld xmlns:a="http://schemas.openxmlformats.org/drawingml/2006/main" xmlns:r="http://schemas.openxmlformats.org/officeDocument/2006/relationships" xmlns:p="http://schemas.openxmlformats.org/presentationml/2006/main">
   <p:cSld>
+    <p:bg>
+      <p:bgPr>
+        <a:solidFill>
+          <a:schemeClr val="bg1"/>
+        </a:solidFill>
+        <a:effectLst/>
+      </p:bgPr>
+    </p:bg>
     <p:spTree>
       <p:nvGrpSpPr>
         <p:cNvPr id="1" name=""/>
@@ -15856,75 +15600,24 @@
       </p:grpSpPr>
       <p:sp>
         <p:nvSpPr>
-          <p:cNvPr id="2" name="Cím 1">
+          <p:cNvPr id="4" name="Tartalom helye 3">
             <a:extLst>
               <a:ext uri="{FF2B5EF4-FFF2-40B4-BE49-F238E27FC236}">
-                <a16:creationId xmlns:a16="http://schemas.microsoft.com/office/drawing/2014/main" id="{114EA305-5E25-48F8-8629-ECE88D7D3D9F}"/>
+                <a16:creationId xmlns:a16="http://schemas.microsoft.com/office/drawing/2014/main" id="{FA4B7AE8-3572-41C3-A1E7-85E06A8AE562}"/>
               </a:ext>
             </a:extLst>
           </p:cNvPr>
-          <p:cNvSpPr>
+          <p:cNvSpPr txBox="1">
             <a:spLocks noGrp="1"/>
           </p:cNvSpPr>
           <p:nvPr>
-            <p:ph type="title"/>
+            <p:ph idx="1"/>
           </p:nvPr>
         </p:nvSpPr>
         <p:spPr>
           <a:xfrm>
-            <a:off x="2362955" y="0"/>
-            <a:ext cx="10515600" cy="958362"/>
-          </a:xfrm>
-        </p:spPr>
-        <p:txBody>
-          <a:bodyPr>
-            <a:normAutofit/>
-          </a:bodyPr>
-          <a:lstStyle/>
-          <a:p>
-            <a:r>
-              <a:rPr lang="hu-HU" sz="2400" b="1" u="sng" dirty="0">
-                <a:latin typeface="Calibri Light"/>
-                <a:ea typeface="Calibri Light"/>
-                <a:cs typeface="Calibri Light"/>
-              </a:rPr>
-              <a:t>A rendszer felhasználói fiókok és csoportjai</a:t>
-            </a:r>
-            <a:r>
-              <a:rPr lang="en-US" sz="2400" b="1" u="sng" dirty="0">
-                <a:latin typeface="Calibri Light"/>
-                <a:ea typeface="Calibri Light"/>
-                <a:cs typeface="Calibri Light"/>
-              </a:rPr>
-              <a:t> </a:t>
-            </a:r>
-            <a:br>
-              <a:rPr lang="en-US" sz="4400" b="1" u="sng" dirty="0">
-                <a:latin typeface="Calibri Light"/>
-                <a:ea typeface="Calibri Light"/>
-                <a:cs typeface="Calibri Light"/>
-              </a:rPr>
-            </a:br>
-            <a:endParaRPr lang="hu-HU" dirty="0"/>
-          </a:p>
-        </p:txBody>
-      </p:sp>
-      <p:sp>
-        <p:nvSpPr>
-          <p:cNvPr id="5" name="Szövegdoboz 4">
-            <a:extLst>
-              <a:ext uri="{FF2B5EF4-FFF2-40B4-BE49-F238E27FC236}">
-                <a16:creationId xmlns:a16="http://schemas.microsoft.com/office/drawing/2014/main" id="{644C47BA-1FEF-491A-BD21-85DA71097912}"/>
-              </a:ext>
-            </a:extLst>
-          </p:cNvPr>
-          <p:cNvSpPr txBox="1"/>
-          <p:nvPr/>
-        </p:nvSpPr>
-        <p:spPr>
-          <a:xfrm>
-            <a:off x="6096000" y="2439724"/>
-            <a:ext cx="6137030" cy="1374735"/>
+            <a:off x="1014046" y="4904413"/>
+            <a:ext cx="10515600" cy="1637371"/>
           </a:xfrm>
           <a:prstGeom prst="rect">
             <a:avLst/>
@@ -15932,110 +15625,60 @@
           <a:noFill/>
         </p:spPr>
         <p:txBody>
-          <a:bodyPr wrap="square">
+          <a:bodyPr rot="0" spcFirstLastPara="0" vertOverflow="overflow" horzOverflow="overflow" vert="horz" wrap="square" lIns="91440" tIns="45720" rIns="91440" bIns="45720" numCol="1" spcCol="0" rtlCol="0" fromWordArt="0" anchor="t" anchorCtr="0" forceAA="0" compatLnSpc="1">
+            <a:prstTxWarp prst="textNoShape">
+              <a:avLst/>
+            </a:prstTxWarp>
             <a:spAutoFit/>
           </a:bodyPr>
           <a:lstStyle/>
           <a:p>
-            <a:pPr marL="228600" indent="-228600">
+            <a:pPr marL="0" lvl="0" indent="0" algn="l" rtl="0">
               <a:lnSpc>
                 <a:spcPts val="2025"/>
               </a:lnSpc>
-              <a:buFont typeface="Symbol,sans-serif"/>
-              <a:buChar char="•"/>
+              <a:buNone/>
             </a:pPr>
             <a:r>
-              <a:rPr lang="hu-HU" b="1" dirty="0">
+              <a:rPr lang="hu-HU" sz="1800" b="1" i="0" dirty="0">
                 <a:latin typeface="Arial"/>
+                <a:ea typeface="Arial"/>
                 <a:cs typeface="Arial"/>
               </a:rPr>
-              <a:t>Látogató / Ügyfél:</a:t>
-            </a:r>
-            <a:r>
-              <a:rPr lang="en-US" dirty="0">
+              <a:t>Időpont-egyeztetés / Ajánlat beküldése:</a:t>
+            </a:r>
+            <a:r>
+              <a:rPr lang="hu-HU" sz="1800" b="0" i="0" dirty="0">
                 <a:latin typeface="Arial"/>
+                <a:ea typeface="Arial"/>
+                <a:cs typeface="Arial"/>
+              </a:rPr>
+              <a:t> A kalkuláció végén az ügyfél egyetlen gombnyomással elküldheti az igényét a megadott adataival (név, telefonszám, e-mail, rendszám/típus).</a:t>
+            </a:r>
+            <a:r>
+              <a:rPr sz="1800" b="0" i="0" dirty="0">
+                <a:latin typeface="Arial"/>
+                <a:ea typeface="Arial"/>
                 <a:cs typeface="Arial"/>
               </a:rPr>
               <a:t> </a:t>
             </a:r>
           </a:p>
           <a:p>
-            <a:pPr marL="228600" lvl="1" indent="-228600">
-              <a:lnSpc>
-                <a:spcPts val="2025"/>
-              </a:lnSpc>
-              <a:buFont typeface="Courier New,monospace"/>
-              <a:buChar char="•"/>
-            </a:pPr>
-            <a:r>
-              <a:rPr lang="hu-HU" dirty="0">
-                <a:latin typeface="Arial"/>
-                <a:cs typeface="Arial"/>
-              </a:rPr>
-              <a:t>Böngészheti a szolgáltatásokat és a galériát.</a:t>
-            </a:r>
-            <a:r>
-              <a:rPr lang="en-US" dirty="0">
-                <a:latin typeface="Arial"/>
-                <a:cs typeface="Arial"/>
-              </a:rPr>
-              <a:t> </a:t>
-            </a:r>
-          </a:p>
-          <a:p>
-            <a:pPr marL="228600" lvl="1" indent="-228600">
-              <a:lnSpc>
-                <a:spcPts val="2025"/>
-              </a:lnSpc>
-              <a:buFont typeface="Courier New,monospace"/>
-              <a:buChar char="•"/>
-            </a:pPr>
-            <a:r>
-              <a:rPr lang="hu-HU" dirty="0">
-                <a:latin typeface="Arial"/>
-                <a:cs typeface="Arial"/>
-              </a:rPr>
-              <a:t>Használhatja az árajánlat-kalkulátort regisztráció nélkül is.</a:t>
-            </a:r>
-            <a:r>
-              <a:rPr lang="en-US" dirty="0">
-                <a:latin typeface="Arial"/>
-                <a:cs typeface="Arial"/>
-              </a:rPr>
-              <a:t> </a:t>
-            </a:r>
-          </a:p>
-          <a:p>
-            <a:pPr marL="228600" lvl="1" indent="-228600">
-              <a:lnSpc>
-                <a:spcPts val="2025"/>
-              </a:lnSpc>
-              <a:buFont typeface="Courier New,monospace"/>
-              <a:buChar char="•"/>
-            </a:pPr>
-            <a:r>
-              <a:rPr lang="hu-HU" dirty="0">
-                <a:latin typeface="Arial"/>
-                <a:cs typeface="Arial"/>
-              </a:rPr>
-              <a:t>Ajánlatot küldhet be a megadott adataival.</a:t>
-            </a:r>
-            <a:r>
-              <a:rPr lang="en-US" dirty="0">
-                <a:latin typeface="Arial"/>
-                <a:cs typeface="Arial"/>
-              </a:rPr>
-              <a:t> </a:t>
-            </a:r>
-          </a:p>
-        </p:txBody>
-      </p:sp>
-      <p:sp>
-        <p:nvSpPr>
-          <p:cNvPr id="7" name="Szövegdoboz 6">
+            <a:endParaRPr dirty="0"/>
+          </a:p>
+          <a:p>
+            <a:pPr algn="ctr"/>
+            <a:endParaRPr lang="hu-HU" dirty="0"/>
+          </a:p>
+        </p:txBody>
+      </p:sp>
+      <p:sp>
+        <p:nvSpPr>
+          <p:cNvPr id="6" name="Szövegdoboz 5">
             <a:extLst>
               <a:ext uri="{FF2B5EF4-FFF2-40B4-BE49-F238E27FC236}">
-                <a16:creationId xmlns:a16="http://schemas.microsoft.com/office/drawing/2014/main" id="{46141623-A37F-4210-BD9B-6534B7141F4F}"/>
+                <a16:creationId xmlns:a16="http://schemas.microsoft.com/office/drawing/2014/main" id="{06D79576-9A2B-4AC2-9388-EB7566DE21BF}"/>
               </a:ext>
             </a:extLst>
           </p:cNvPr>
@@ -16044,8 +15687,8 @@
         </p:nvSpPr>
         <p:spPr>
           <a:xfrm>
-            <a:off x="70338" y="2439724"/>
-            <a:ext cx="6137030" cy="2164695"/>
+            <a:off x="174382" y="595968"/>
+            <a:ext cx="6097464" cy="861774"/>
           </a:xfrm>
           <a:prstGeom prst="rect">
             <a:avLst/>
@@ -16058,149 +15701,287 @@
           </a:bodyPr>
           <a:lstStyle/>
           <a:p>
-            <a:pPr marL="228600" indent="-228600">
+            <a:pPr marL="0" lvl="0" indent="0" algn="l" rtl="0">
               <a:lnSpc>
                 <a:spcPts val="2025"/>
               </a:lnSpc>
-              <a:buFont typeface="Symbol,sans-serif"/>
-              <a:buChar char="•"/>
+              <a:buNone/>
             </a:pPr>
             <a:r>
-              <a:rPr lang="hu-HU" b="1" dirty="0">
+              <a:rPr lang="hu-HU" sz="1800" b="1" i="0" dirty="0">
                 <a:latin typeface="Arial"/>
+                <a:ea typeface="Arial"/>
                 <a:cs typeface="Arial"/>
               </a:rPr>
-              <a:t>Adminisztrátor (</a:t>
-            </a:r>
-            <a:r>
-              <a:rPr lang="hu-HU" b="1" dirty="0" err="1">
+              <a:t>Szolgáltatások böngészése:</a:t>
+            </a:r>
+            <a:r>
+              <a:rPr lang="hu-HU" sz="1800" b="0" i="0" dirty="0">
                 <a:latin typeface="Arial"/>
+                <a:ea typeface="Arial"/>
+                <a:cs typeface="Arial"/>
+              </a:rPr>
+              <a:t> A látogató áttekintheti a </a:t>
+            </a:r>
+            <a:r>
+              <a:rPr lang="hu-HU" sz="1800" b="0" i="0" dirty="0" err="1">
+                <a:latin typeface="Arial"/>
+                <a:ea typeface="Arial"/>
                 <a:cs typeface="Arial"/>
               </a:rPr>
               <a:t>Vexora</a:t>
             </a:r>
             <a:r>
-              <a:rPr lang="hu-HU" b="1" dirty="0">
+              <a:rPr lang="hu-HU" sz="1800" b="0" i="0" dirty="0">
                 <a:latin typeface="Arial"/>
+                <a:ea typeface="Arial"/>
                 <a:cs typeface="Arial"/>
               </a:rPr>
-              <a:t> Műhelyvezető):</a:t>
-            </a:r>
-            <a:r>
-              <a:rPr lang="en-US" dirty="0">
+              <a:t> </a:t>
+            </a:r>
+            <a:r>
+              <a:rPr lang="hu-HU" sz="1800" b="0" i="0" dirty="0" err="1">
                 <a:latin typeface="Arial"/>
+                <a:ea typeface="Arial"/>
+                <a:cs typeface="Arial"/>
+              </a:rPr>
+              <a:t>Detailing</a:t>
+            </a:r>
+            <a:r>
+              <a:rPr lang="hu-HU" sz="1800" b="0" i="0" dirty="0">
+                <a:latin typeface="Arial"/>
+                <a:ea typeface="Arial"/>
+                <a:cs typeface="Arial"/>
+              </a:rPr>
+              <a:t> professzionális szolgáltatásait, részletes leírásokkal és referenciákkal. </a:t>
+            </a:r>
+          </a:p>
+        </p:txBody>
+      </p:sp>
+      <p:sp>
+        <p:nvSpPr>
+          <p:cNvPr id="8" name="Szövegdoboz 7">
+            <a:extLst>
+              <a:ext uri="{FF2B5EF4-FFF2-40B4-BE49-F238E27FC236}">
+                <a16:creationId xmlns:a16="http://schemas.microsoft.com/office/drawing/2014/main" id="{D20267D4-1CCB-4013-9DDF-5D75B345FAEE}"/>
+              </a:ext>
+            </a:extLst>
+          </p:cNvPr>
+          <p:cNvSpPr txBox="1"/>
+          <p:nvPr/>
+        </p:nvSpPr>
+        <p:spPr>
+          <a:xfrm>
+            <a:off x="6068158" y="2565418"/>
+            <a:ext cx="6123842" cy="1374735"/>
+          </a:xfrm>
+          <a:prstGeom prst="rect">
+            <a:avLst/>
+          </a:prstGeom>
+          <a:noFill/>
+        </p:spPr>
+        <p:txBody>
+          <a:bodyPr wrap="square">
+            <a:spAutoFit/>
+          </a:bodyPr>
+          <a:lstStyle/>
+          <a:p>
+            <a:pPr marL="0" lvl="0" indent="0" algn="l" rtl="0">
+              <a:lnSpc>
+                <a:spcPts val="2025"/>
+              </a:lnSpc>
+              <a:buNone/>
+            </a:pPr>
+            <a:r>
+              <a:rPr lang="hu-HU" b="1" i="0" dirty="0">
+                <a:latin typeface="Arial"/>
+                <a:ea typeface="Arial"/>
+                <a:cs typeface="Arial"/>
+              </a:rPr>
+              <a:t>Interaktív árajánlat-készítés (Kalkulátor):</a:t>
+            </a:r>
+            <a:r>
+              <a:rPr lang="hu-HU" b="0" i="0" dirty="0">
+                <a:latin typeface="Arial"/>
+                <a:ea typeface="Arial"/>
                 <a:cs typeface="Arial"/>
               </a:rPr>
               <a:t> </a:t>
             </a:r>
           </a:p>
           <a:p>
-            <a:endParaRPr lang="en-US" dirty="0">
-              <a:ea typeface="Calibri"/>
-              <a:cs typeface="Calibri"/>
-            </a:endParaRPr>
-          </a:p>
-          <a:p>
-            <a:pPr marL="228600" lvl="1" indent="-228600">
+            <a:pPr marL="228600" lvl="1" indent="-228600" algn="l" rtl="0">
               <a:lnSpc>
                 <a:spcPts val="2025"/>
               </a:lnSpc>
-              <a:buFont typeface="Courier New,monospace"/>
+              <a:buFont typeface="Courier New"/>
               <a:buChar char="•"/>
             </a:pPr>
             <a:r>
-              <a:rPr lang="hu-HU" dirty="0">
+              <a:rPr lang="hu-HU" b="0" i="0" dirty="0">
                 <a:latin typeface="Arial"/>
+                <a:ea typeface="Arial"/>
                 <a:cs typeface="Arial"/>
               </a:rPr>
-              <a:t>Kezelheti a kalkulátor árait, járműkategóriáit és szolgáltatásait a háttérben (CMS felületen keresztül).</a:t>
-            </a:r>
-            <a:r>
-              <a:rPr lang="en-US" dirty="0">
-                <a:latin typeface="Arial"/>
-                <a:cs typeface="Arial"/>
-              </a:rPr>
-              <a:t> </a:t>
-            </a:r>
-          </a:p>
-          <a:p>
-            <a:pPr marL="228600" lvl="1" indent="-228600">
+              <a:t>Az ügyfél kiválasztja a jármű kategóriáját  </a:t>
+            </a:r>
+          </a:p>
+          <a:p>
+            <a:pPr marL="228600" lvl="1" indent="-228600" algn="l" rtl="0">
               <a:lnSpc>
                 <a:spcPts val="2025"/>
               </a:lnSpc>
-              <a:buFont typeface="Courier New,monospace"/>
+              <a:buFont typeface="Courier New"/>
               <a:buChar char="•"/>
             </a:pPr>
             <a:r>
-              <a:rPr lang="hu-HU" dirty="0">
+              <a:rPr lang="hu-HU" b="0" i="0" dirty="0">
                 <a:latin typeface="Arial"/>
+                <a:ea typeface="Arial"/>
                 <a:cs typeface="Arial"/>
               </a:rPr>
-              <a:t>Megtekintheti és kezelheti a weboldalon </a:t>
-            </a:r>
-            <a:r>
-              <a:rPr lang="hu-HU" dirty="0" err="1">
-                <a:latin typeface="Arial"/>
-                <a:cs typeface="Arial"/>
-              </a:rPr>
-              <a:t>beértkezett</a:t>
-            </a:r>
-            <a:r>
-              <a:rPr lang="hu-HU" dirty="0">
-                <a:latin typeface="Arial"/>
-                <a:cs typeface="Arial"/>
-              </a:rPr>
-              <a:t> árajánlatkéréseket.</a:t>
-            </a:r>
-            <a:r>
-              <a:rPr lang="en-US" dirty="0">
-                <a:latin typeface="Arial"/>
-                <a:cs typeface="Arial"/>
-              </a:rPr>
-              <a:t> </a:t>
-            </a:r>
-          </a:p>
-          <a:p>
-            <a:pPr marL="228600" lvl="1" indent="-228600">
+              <a:t>Kiválasztja a kívánt szolgáltatásokat  </a:t>
+            </a:r>
+          </a:p>
+          <a:p>
+            <a:pPr marL="228600" lvl="1" indent="-228600" algn="l" rtl="0">
               <a:lnSpc>
                 <a:spcPts val="2025"/>
               </a:lnSpc>
-              <a:buFont typeface="Courier New,monospace"/>
+              <a:buFont typeface="Courier New"/>
               <a:buChar char="•"/>
             </a:pPr>
             <a:r>
-              <a:rPr lang="hu-HU" dirty="0">
+              <a:rPr lang="hu-HU" b="0" i="0" dirty="0">
                 <a:latin typeface="Arial"/>
+                <a:ea typeface="Arial"/>
                 <a:cs typeface="Arial"/>
               </a:rPr>
-              <a:t>Feltöltheti a friss "előtte-utána" fotókat a referenciák közé.</a:t>
-            </a:r>
-            <a:r>
-              <a:rPr lang="en-US" dirty="0">
+              <a:t>A rendszer automatikusan kiszámítja a becsült árat és a szükséges munkaidőt (pl. 2-3 munkanap). </a:t>
+            </a:r>
+          </a:p>
+        </p:txBody>
+      </p:sp>
+      <p:sp>
+        <p:nvSpPr>
+          <p:cNvPr id="9" name="Szövegdoboz 8">
+            <a:extLst>
+              <a:ext uri="{FF2B5EF4-FFF2-40B4-BE49-F238E27FC236}">
+                <a16:creationId xmlns:a16="http://schemas.microsoft.com/office/drawing/2014/main" id="{EE782F83-7969-45F7-B4D3-943E3D043D61}"/>
+              </a:ext>
+            </a:extLst>
+          </p:cNvPr>
+          <p:cNvSpPr txBox="1"/>
+          <p:nvPr/>
+        </p:nvSpPr>
+        <p:spPr>
+          <a:xfrm>
+            <a:off x="8721969" y="842189"/>
+            <a:ext cx="641839" cy="369332"/>
+          </a:xfrm>
+          <a:prstGeom prst="rect">
+            <a:avLst/>
+          </a:prstGeom>
+          <a:noFill/>
+        </p:spPr>
+        <p:txBody>
+          <a:bodyPr wrap="square" rtlCol="0">
+            <a:spAutoFit/>
+          </a:bodyPr>
+          <a:lstStyle/>
+          <a:p>
+            <a:r>
+              <a:rPr lang="hu-HU" dirty="0"/>
+              <a:t>kép</a:t>
+            </a:r>
+          </a:p>
+        </p:txBody>
+      </p:sp>
+      <p:sp>
+        <p:nvSpPr>
+          <p:cNvPr id="11" name="Szövegdoboz 10">
+            <a:extLst>
+              <a:ext uri="{FF2B5EF4-FFF2-40B4-BE49-F238E27FC236}">
+                <a16:creationId xmlns:a16="http://schemas.microsoft.com/office/drawing/2014/main" id="{9767F290-C620-4553-A523-59548A8A8658}"/>
+              </a:ext>
+            </a:extLst>
+          </p:cNvPr>
+          <p:cNvSpPr txBox="1"/>
+          <p:nvPr/>
+        </p:nvSpPr>
+        <p:spPr>
+          <a:xfrm>
+            <a:off x="2242038" y="2919614"/>
+            <a:ext cx="870439" cy="576248"/>
+          </a:xfrm>
+          <a:prstGeom prst="rect">
+            <a:avLst/>
+          </a:prstGeom>
+          <a:noFill/>
+        </p:spPr>
+        <p:txBody>
+          <a:bodyPr wrap="square">
+            <a:spAutoFit/>
+          </a:bodyPr>
+          <a:lstStyle/>
+          <a:p>
+            <a:pPr marL="0" lvl="0" indent="0" algn="l" rtl="0">
+              <a:lnSpc>
+                <a:spcPts val="2025"/>
+              </a:lnSpc>
+              <a:buNone/>
+            </a:pPr>
+            <a:r>
+              <a:rPr lang="hu-HU" b="0" i="0" dirty="0">
                 <a:latin typeface="Arial"/>
+                <a:ea typeface="Arial"/>
                 <a:cs typeface="Arial"/>
               </a:rPr>
-              <a:t> </a:t>
-            </a:r>
+              <a:t>Kép</a:t>
+            </a:r>
+          </a:p>
+          <a:p>
+            <a:pPr marL="0" lvl="0" indent="0" algn="l" rtl="0">
+              <a:lnSpc>
+                <a:spcPts val="2025"/>
+              </a:lnSpc>
+              <a:buNone/>
+            </a:pPr>
+            <a:endParaRPr lang="hu-HU" sz="1200" b="0" i="0" dirty="0">
+              <a:latin typeface="Arial"/>
+              <a:ea typeface="Arial"/>
+              <a:cs typeface="Arial"/>
+            </a:endParaRPr>
           </a:p>
         </p:txBody>
       </p:sp>
     </p:spTree>
     <p:extLst>
       <p:ext uri="{BB962C8B-B14F-4D97-AF65-F5344CB8AC3E}">
-        <p14:creationId xmlns:p14="http://schemas.microsoft.com/office/powerpoint/2010/main" val="2606705777"/>
+        <p14:creationId xmlns:p14="http://schemas.microsoft.com/office/powerpoint/2010/main" val="1645029031"/>
       </p:ext>
     </p:extLst>
   </p:cSld>
   <p:clrMapOvr>
     <a:masterClrMapping/>
   </p:clrMapOvr>
+  <p:transition spd="slow">
+    <p:cover/>
+  </p:transition>
 </p:sld>
 </file>
 
-<file path=ppt/slides/slide9.xml><?xml version="1.0" encoding="utf-8"?>
+<file path=ppt/slides/slide6.xml><?xml version="1.0" encoding="utf-8"?>
 <p:sld xmlns:a="http://schemas.openxmlformats.org/drawingml/2006/main" xmlns:r="http://schemas.openxmlformats.org/officeDocument/2006/relationships" xmlns:p="http://schemas.openxmlformats.org/presentationml/2006/main">
   <p:cSld>
+    <p:bg>
+      <p:bgPr>
+        <a:solidFill>
+          <a:schemeClr val="bg1"/>
+        </a:solidFill>
+        <a:effectLst/>
+      </p:bgPr>
+    </p:bg>
     <p:spTree>
       <p:nvGrpSpPr>
         <p:cNvPr id="1" name=""/>
@@ -16217,10 +15998,301 @@
       </p:grpSpPr>
       <p:sp>
         <p:nvSpPr>
+          <p:cNvPr id="3" name="Tartalom helye 2">
+            <a:extLst>
+              <a:ext uri="{FF2B5EF4-FFF2-40B4-BE49-F238E27FC236}">
+                <a16:creationId xmlns:a16="http://schemas.microsoft.com/office/drawing/2014/main" id="{48FD925D-E93C-4FF0-8F36-50F874D3BCD7}"/>
+              </a:ext>
+            </a:extLst>
+          </p:cNvPr>
+          <p:cNvSpPr>
+            <a:spLocks noGrp="1"/>
+          </p:cNvSpPr>
+          <p:nvPr>
+            <p:ph idx="1"/>
+          </p:nvPr>
+        </p:nvSpPr>
+        <p:spPr>
+          <a:xfrm>
+            <a:off x="805962" y="3568861"/>
+            <a:ext cx="5290038" cy="1542805"/>
+          </a:xfrm>
+        </p:spPr>
+        <p:txBody>
+          <a:bodyPr>
+            <a:normAutofit/>
+          </a:bodyPr>
+          <a:lstStyle/>
+          <a:p>
+            <a:pPr marL="0" lvl="0" indent="0" algn="l" rtl="0">
+              <a:lnSpc>
+                <a:spcPts val="2025"/>
+              </a:lnSpc>
+              <a:buNone/>
+            </a:pPr>
+            <a:r>
+              <a:rPr lang="hu-HU" sz="1900" b="1" i="0" dirty="0">
+                <a:latin typeface="Arial"/>
+                <a:ea typeface="Arial"/>
+                <a:cs typeface="Arial"/>
+              </a:rPr>
+              <a:t>Nem-funkcionális követelmények:</a:t>
+            </a:r>
+            <a:r>
+              <a:rPr lang="hu-HU" sz="1900" b="0" i="0" dirty="0">
+                <a:latin typeface="Arial"/>
+                <a:ea typeface="Arial"/>
+                <a:cs typeface="Arial"/>
+              </a:rPr>
+              <a:t> </a:t>
+            </a:r>
+          </a:p>
+          <a:p>
+            <a:pPr marL="228600" lvl="1" indent="-228600" algn="l" rtl="0">
+              <a:lnSpc>
+                <a:spcPts val="2025"/>
+              </a:lnSpc>
+              <a:buFont typeface="Courier New"/>
+              <a:buChar char="•"/>
+            </a:pPr>
+            <a:r>
+              <a:rPr lang="hu-HU" sz="1900" b="0" i="0" dirty="0">
+                <a:latin typeface="Arial"/>
+                <a:ea typeface="Arial"/>
+                <a:cs typeface="Arial"/>
+              </a:rPr>
+              <a:t>Esztétikus, modern, a prémium autóápoláshoz méltó dizájn. </a:t>
+            </a:r>
+          </a:p>
+          <a:p>
+            <a:pPr marL="228600" lvl="1" indent="-228600" algn="l" rtl="0">
+              <a:lnSpc>
+                <a:spcPts val="2025"/>
+              </a:lnSpc>
+              <a:buFont typeface="Courier New"/>
+              <a:buChar char="•"/>
+            </a:pPr>
+            <a:r>
+              <a:rPr lang="hu-HU" sz="1900" b="0" i="0" dirty="0">
+                <a:latin typeface="Arial"/>
+                <a:ea typeface="Arial"/>
+                <a:cs typeface="Arial"/>
+              </a:rPr>
+              <a:t>Gyors betöltési idő és zökkenőmentes működés. </a:t>
+            </a:r>
+          </a:p>
+          <a:p>
+            <a:endParaRPr lang="hu-HU" dirty="0"/>
+          </a:p>
+          <a:p>
+            <a:endParaRPr lang="hu-HU" dirty="0"/>
+          </a:p>
+        </p:txBody>
+      </p:sp>
+      <p:sp>
+        <p:nvSpPr>
+          <p:cNvPr id="5" name="Szövegdoboz 4">
+            <a:extLst>
+              <a:ext uri="{FF2B5EF4-FFF2-40B4-BE49-F238E27FC236}">
+                <a16:creationId xmlns:a16="http://schemas.microsoft.com/office/drawing/2014/main" id="{96B46E47-A63F-4DA6-9EAD-7E45FBB045E8}"/>
+              </a:ext>
+            </a:extLst>
+          </p:cNvPr>
+          <p:cNvSpPr txBox="1"/>
+          <p:nvPr/>
+        </p:nvSpPr>
+        <p:spPr>
+          <a:xfrm>
+            <a:off x="805962" y="932961"/>
+            <a:ext cx="6097464" cy="1374735"/>
+          </a:xfrm>
+          <a:prstGeom prst="rect">
+            <a:avLst/>
+          </a:prstGeom>
+          <a:noFill/>
+        </p:spPr>
+        <p:txBody>
+          <a:bodyPr wrap="square">
+            <a:spAutoFit/>
+          </a:bodyPr>
+          <a:lstStyle/>
+          <a:p>
+            <a:pPr marL="0" lvl="0" indent="0" algn="l" rtl="0">
+              <a:lnSpc>
+                <a:spcPts val="2025"/>
+              </a:lnSpc>
+              <a:buNone/>
+            </a:pPr>
+            <a:r>
+              <a:rPr lang="hu-HU" b="1" i="0" dirty="0">
+                <a:latin typeface="Arial"/>
+                <a:ea typeface="Arial"/>
+                <a:cs typeface="Arial"/>
+              </a:rPr>
+              <a:t>Funkcionális követelmények:</a:t>
+            </a:r>
+            <a:r>
+              <a:rPr lang="hu-HU" b="0" i="0" dirty="0">
+                <a:latin typeface="Arial"/>
+                <a:ea typeface="Arial"/>
+                <a:cs typeface="Arial"/>
+              </a:rPr>
+              <a:t> </a:t>
+            </a:r>
+          </a:p>
+          <a:p>
+            <a:pPr marL="228600" lvl="1" indent="-228600" algn="l" rtl="0">
+              <a:lnSpc>
+                <a:spcPts val="2025"/>
+              </a:lnSpc>
+              <a:buFont typeface="Courier New"/>
+              <a:buChar char="•"/>
+            </a:pPr>
+            <a:r>
+              <a:rPr lang="hu-HU" b="0" i="0" dirty="0">
+                <a:latin typeface="Arial"/>
+                <a:ea typeface="Arial"/>
+                <a:cs typeface="Arial"/>
+              </a:rPr>
+              <a:t>Dinamikus árkalkulációs modul </a:t>
+            </a:r>
+          </a:p>
+          <a:p>
+            <a:pPr marL="228600" lvl="1" indent="-228600" algn="l" rtl="0">
+              <a:lnSpc>
+                <a:spcPts val="2025"/>
+              </a:lnSpc>
+              <a:buFont typeface="Courier New"/>
+              <a:buChar char="•"/>
+            </a:pPr>
+            <a:r>
+              <a:rPr lang="hu-HU" b="0" i="0" dirty="0">
+                <a:latin typeface="Arial"/>
+                <a:ea typeface="Arial"/>
+                <a:cs typeface="Arial"/>
+              </a:rPr>
+              <a:t>Mobilbarát, reszponzív felület </a:t>
+            </a:r>
+          </a:p>
+          <a:p>
+            <a:pPr marL="228600" lvl="1" indent="-228600" algn="l" rtl="0">
+              <a:lnSpc>
+                <a:spcPts val="2025"/>
+              </a:lnSpc>
+              <a:buFont typeface="Courier New"/>
+              <a:buChar char="•"/>
+            </a:pPr>
+            <a:r>
+              <a:rPr lang="hu-HU" b="0" i="0" dirty="0">
+                <a:latin typeface="Arial"/>
+                <a:ea typeface="Arial"/>
+                <a:cs typeface="Arial"/>
+              </a:rPr>
+              <a:t>Előtte-utána galéria a referenciamunkák bemutatására. </a:t>
+            </a:r>
+          </a:p>
+          <a:p>
+            <a:pPr marL="171450" lvl="1" indent="-171450">
+              <a:lnSpc>
+                <a:spcPts val="2025"/>
+              </a:lnSpc>
+            </a:pPr>
+            <a:r>
+              <a:rPr lang="hu-HU" b="0" i="0" dirty="0">
+                <a:latin typeface="Arial"/>
+                <a:ea typeface="Arial"/>
+                <a:cs typeface="Arial"/>
+              </a:rPr>
+              <a:t>Kapcsolatfelvételi és ajánlatkérő űrlap. </a:t>
+            </a:r>
+          </a:p>
+        </p:txBody>
+      </p:sp>
+      <p:sp>
+        <p:nvSpPr>
+          <p:cNvPr id="6" name="Szövegdoboz 5">
+            <a:extLst>
+              <a:ext uri="{FF2B5EF4-FFF2-40B4-BE49-F238E27FC236}">
+                <a16:creationId xmlns:a16="http://schemas.microsoft.com/office/drawing/2014/main" id="{7B1465CC-7698-45C8-A57A-2061D700E1CD}"/>
+              </a:ext>
+            </a:extLst>
+          </p:cNvPr>
+          <p:cNvSpPr txBox="1"/>
+          <p:nvPr/>
+        </p:nvSpPr>
+        <p:spPr>
+          <a:xfrm>
+            <a:off x="8818684" y="2782669"/>
+            <a:ext cx="844061" cy="646331"/>
+          </a:xfrm>
+          <a:prstGeom prst="rect">
+            <a:avLst/>
+          </a:prstGeom>
+          <a:noFill/>
+        </p:spPr>
+        <p:txBody>
+          <a:bodyPr wrap="square" rtlCol="0">
+            <a:spAutoFit/>
+          </a:bodyPr>
+          <a:lstStyle/>
+          <a:p>
+            <a:r>
+              <a:rPr lang="hu-HU" dirty="0"/>
+              <a:t>Kép</a:t>
+            </a:r>
+          </a:p>
+          <a:p>
+            <a:endParaRPr lang="hu-HU" dirty="0"/>
+          </a:p>
+        </p:txBody>
+      </p:sp>
+    </p:spTree>
+    <p:extLst>
+      <p:ext uri="{BB962C8B-B14F-4D97-AF65-F5344CB8AC3E}">
+        <p14:creationId xmlns:p14="http://schemas.microsoft.com/office/powerpoint/2010/main" val="4164945641"/>
+      </p:ext>
+    </p:extLst>
+  </p:cSld>
+  <p:clrMapOvr>
+    <a:masterClrMapping/>
+  </p:clrMapOvr>
+  <p:transition spd="slow">
+    <p:cover/>
+  </p:transition>
+</p:sld>
+</file>
+
+<file path=ppt/slides/slide7.xml><?xml version="1.0" encoding="utf-8"?>
+<p:sld xmlns:a="http://schemas.openxmlformats.org/drawingml/2006/main" xmlns:r="http://schemas.openxmlformats.org/officeDocument/2006/relationships" xmlns:p="http://schemas.openxmlformats.org/presentationml/2006/main">
+  <p:cSld>
+    <p:bg>
+      <p:bgPr>
+        <a:solidFill>
+          <a:schemeClr val="bg1"/>
+        </a:solidFill>
+        <a:effectLst/>
+      </p:bgPr>
+    </p:bg>
+    <p:spTree>
+      <p:nvGrpSpPr>
+        <p:cNvPr id="1" name=""/>
+        <p:cNvGrpSpPr/>
+        <p:nvPr/>
+      </p:nvGrpSpPr>
+      <p:grpSpPr>
+        <a:xfrm>
+          <a:off x="0" y="0"/>
+          <a:ext cx="0" cy="0"/>
+          <a:chOff x="0" y="0"/>
+          <a:chExt cx="0" cy="0"/>
+        </a:xfrm>
+      </p:grpSpPr>
+      <p:sp>
+        <p:nvSpPr>
           <p:cNvPr id="2" name="Cím 1">
             <a:extLst>
               <a:ext uri="{FF2B5EF4-FFF2-40B4-BE49-F238E27FC236}">
-                <a16:creationId xmlns:a16="http://schemas.microsoft.com/office/drawing/2014/main" id="{CC44354D-C145-4299-978C-0A76F64E1393}"/>
+                <a16:creationId xmlns:a16="http://schemas.microsoft.com/office/drawing/2014/main" id="{A07D3974-A1AE-C64F-4F45-E80272814933}"/>
               </a:ext>
             </a:extLst>
           </p:cNvPr>
@@ -16233,41 +16305,36 @@
         </p:nvSpPr>
         <p:spPr>
           <a:xfrm>
-            <a:off x="3906715" y="0"/>
-            <a:ext cx="10515600" cy="1072662"/>
+            <a:off x="4235767" y="0"/>
+            <a:ext cx="10515600" cy="1325563"/>
           </a:xfrm>
         </p:spPr>
         <p:txBody>
-          <a:bodyPr>
-            <a:normAutofit/>
-          </a:bodyPr>
+          <a:bodyPr/>
           <a:lstStyle/>
           <a:p>
             <a:r>
-              <a:rPr lang="hu-HU" sz="2200" b="1" i="0" u="sng" dirty="0">
-                <a:latin typeface="Calibri Light"/>
-                <a:ea typeface="Calibri Light"/>
-                <a:cs typeface="Calibri Light"/>
+              <a:rPr lang="hu-HU" b="1" dirty="0">
+                <a:latin typeface="Arial"/>
+                <a:cs typeface="Arial"/>
               </a:rPr>
-              <a:t>Mentés és monitorozás </a:t>
-            </a:r>
-            <a:br>
-              <a:rPr lang="hu-HU" sz="4400" b="1" i="0" u="sng" dirty="0">
-                <a:latin typeface="Calibri Light"/>
-                <a:ea typeface="Calibri Light"/>
-                <a:cs typeface="Calibri Light"/>
-              </a:rPr>
-            </a:br>
-            <a:endParaRPr lang="hu-HU" dirty="0"/>
-          </a:p>
-        </p:txBody>
-      </p:sp>
-      <p:sp>
-        <p:nvSpPr>
-          <p:cNvPr id="5" name="Szövegdoboz 4">
+              <a:t>Tervezés</a:t>
+            </a:r>
+          </a:p>
+          <a:p>
+            <a:endParaRPr lang="hu-HU" dirty="0">
+              <a:ea typeface="Calibri Light"/>
+              <a:cs typeface="Calibri Light"/>
+            </a:endParaRPr>
+          </a:p>
+        </p:txBody>
+      </p:sp>
+      <p:sp>
+        <p:nvSpPr>
+          <p:cNvPr id="4" name="Szövegdoboz 3">
             <a:extLst>
               <a:ext uri="{FF2B5EF4-FFF2-40B4-BE49-F238E27FC236}">
-                <a16:creationId xmlns:a16="http://schemas.microsoft.com/office/drawing/2014/main" id="{CCD4E8FD-E6D5-455B-91EE-17EA00B1F793}"/>
+                <a16:creationId xmlns:a16="http://schemas.microsoft.com/office/drawing/2014/main" id="{6FE10868-0813-5A50-9DF3-76EEA12858FA}"/>
               </a:ext>
             </a:extLst>
           </p:cNvPr>
@@ -16276,8 +16343,70 @@
         </p:nvSpPr>
         <p:spPr>
           <a:xfrm>
-            <a:off x="6096000" y="5486335"/>
-            <a:ext cx="6137030" cy="861774"/>
+            <a:off x="4659922" y="1212758"/>
+            <a:ext cx="8554915" cy="966931"/>
+          </a:xfrm>
+          <a:prstGeom prst="rect">
+            <a:avLst/>
+          </a:prstGeom>
+          <a:noFill/>
+        </p:spPr>
+        <p:txBody>
+          <a:bodyPr rot="0" spcFirstLastPara="0" vertOverflow="overflow" horzOverflow="overflow" vert="horz" wrap="square" lIns="91440" tIns="45720" rIns="91440" bIns="45720" numCol="1" spcCol="0" rtlCol="0" fromWordArt="0" anchor="t" anchorCtr="0" forceAA="0" compatLnSpc="1">
+            <a:prstTxWarp prst="textNoShape">
+              <a:avLst/>
+            </a:prstTxWarp>
+            <a:spAutoFit/>
+          </a:bodyPr>
+          <a:lstStyle/>
+          <a:p>
+            <a:pPr algn="l" rtl="0">
+              <a:lnSpc>
+                <a:spcPts val="2475"/>
+              </a:lnSpc>
+            </a:pPr>
+            <a:r>
+              <a:rPr lang="hu-HU" sz="2000" b="1" i="0" u="sng" dirty="0">
+                <a:latin typeface="Arial"/>
+                <a:ea typeface="Arial"/>
+                <a:cs typeface="Arial"/>
+              </a:rPr>
+              <a:t>Alkalmazás</a:t>
+            </a:r>
+            <a:r>
+              <a:rPr sz="2000" b="1" i="0" u="sng" dirty="0">
+                <a:latin typeface="Arial"/>
+                <a:ea typeface="Arial"/>
+                <a:cs typeface="Arial"/>
+              </a:rPr>
+              <a:t> </a:t>
+            </a:r>
+          </a:p>
+          <a:p>
+            <a:endParaRPr dirty="0"/>
+          </a:p>
+          <a:p>
+            <a:pPr algn="ctr"/>
+            <a:endParaRPr lang="hu-HU" dirty="0"/>
+          </a:p>
+        </p:txBody>
+      </p:sp>
+      <p:sp>
+        <p:nvSpPr>
+          <p:cNvPr id="9" name="Szövegdoboz 8">
+            <a:extLst>
+              <a:ext uri="{FF2B5EF4-FFF2-40B4-BE49-F238E27FC236}">
+                <a16:creationId xmlns:a16="http://schemas.microsoft.com/office/drawing/2014/main" id="{0F292E9B-E870-412D-BBA0-03BBC60837EC}"/>
+              </a:ext>
+            </a:extLst>
+          </p:cNvPr>
+          <p:cNvSpPr txBox="1"/>
+          <p:nvPr/>
+        </p:nvSpPr>
+        <p:spPr>
+          <a:xfrm>
+            <a:off x="2864094" y="3034034"/>
+            <a:ext cx="6220558" cy="605294"/>
           </a:xfrm>
           <a:prstGeom prst="rect">
             <a:avLst/>
@@ -16303,7 +16432,7 @@
                 <a:ea typeface="Arial"/>
                 <a:cs typeface="Arial"/>
               </a:rPr>
-              <a:t>Adatmentés:</a:t>
+              <a:t>Projekt neve:</a:t>
             </a:r>
             <a:r>
               <a:rPr lang="hu-HU" sz="1800" b="0" i="0" dirty="0">
@@ -16311,17 +16440,49 @@
                 <a:ea typeface="Arial"/>
                 <a:cs typeface="Arial"/>
               </a:rPr>
-              <a:t> Heti automatikus biztonsági mentés a weboldal fájljairól és az adatbázisról az esetleges adatvesztés megelőzésére. </a:t>
-            </a:r>
-          </a:p>
-        </p:txBody>
-      </p:sp>
-      <p:sp>
-        <p:nvSpPr>
-          <p:cNvPr id="7" name="Szövegdoboz 6">
+              <a:t> </a:t>
+            </a:r>
+            <a:r>
+              <a:rPr lang="hu-HU" sz="1800" b="0" i="0" dirty="0" err="1">
+                <a:latin typeface="Arial"/>
+                <a:ea typeface="Arial"/>
+                <a:cs typeface="Arial"/>
+              </a:rPr>
+              <a:t>Vexora</a:t>
+            </a:r>
+            <a:r>
+              <a:rPr lang="hu-HU" sz="1800" b="0" i="0" dirty="0">
+                <a:latin typeface="Arial"/>
+                <a:ea typeface="Arial"/>
+                <a:cs typeface="Arial"/>
+              </a:rPr>
+              <a:t> </a:t>
+            </a:r>
+            <a:r>
+              <a:rPr lang="hu-HU" sz="1800" b="0" i="0" dirty="0" err="1">
+                <a:latin typeface="Arial"/>
+                <a:ea typeface="Arial"/>
+                <a:cs typeface="Arial"/>
+              </a:rPr>
+              <a:t>Detailing</a:t>
+            </a:r>
+            <a:r>
+              <a:rPr lang="hu-HU" sz="1800" b="0" i="0" dirty="0">
+                <a:latin typeface="Arial"/>
+                <a:ea typeface="Arial"/>
+                <a:cs typeface="Arial"/>
+              </a:rPr>
+              <a:t> Weboldal és Interaktív Kalkulátor </a:t>
+            </a:r>
+          </a:p>
+        </p:txBody>
+      </p:sp>
+      <p:sp>
+        <p:nvSpPr>
+          <p:cNvPr id="11" name="Szövegdoboz 10">
             <a:extLst>
               <a:ext uri="{FF2B5EF4-FFF2-40B4-BE49-F238E27FC236}">
-                <a16:creationId xmlns:a16="http://schemas.microsoft.com/office/drawing/2014/main" id="{868FB8AF-B6E3-49A3-A91C-E931BB353323}"/>
+                <a16:creationId xmlns:a16="http://schemas.microsoft.com/office/drawing/2014/main" id="{7214B334-4249-4E86-B865-40753858AD45}"/>
               </a:ext>
             </a:extLst>
           </p:cNvPr>
@@ -16330,8 +16491,8 @@
         </p:nvSpPr>
         <p:spPr>
           <a:xfrm>
-            <a:off x="0" y="1488421"/>
-            <a:ext cx="6137030" cy="861774"/>
+            <a:off x="2864094" y="3798433"/>
+            <a:ext cx="6220558" cy="605294"/>
           </a:xfrm>
           <a:prstGeom prst="rect">
             <a:avLst/>
@@ -16357,7 +16518,7 @@
                 <a:ea typeface="Arial"/>
                 <a:cs typeface="Arial"/>
               </a:rPr>
-              <a:t>Monitorozás:</a:t>
+              <a:t>Célcsoport:</a:t>
             </a:r>
             <a:r>
               <a:rPr lang="hu-HU" sz="1800" b="0" i="0" dirty="0">
@@ -16365,21 +16526,764 @@
                 <a:ea typeface="Arial"/>
                 <a:cs typeface="Arial"/>
               </a:rPr>
-              <a:t> Weboldal elérhetőségének ellenőrzése és SSL-tanúsítvány (biztonságos HTTPS kapcsolat) folyamatos felügyelete. </a:t>
-            </a:r>
+              <a:t> Igényes autó, prémium kategóriás jármű tulajdonosok </a:t>
+            </a:r>
+          </a:p>
+        </p:txBody>
+      </p:sp>
+      <p:sp>
+        <p:nvSpPr>
+          <p:cNvPr id="13" name="Szövegdoboz 12">
+            <a:extLst>
+              <a:ext uri="{FF2B5EF4-FFF2-40B4-BE49-F238E27FC236}">
+                <a16:creationId xmlns:a16="http://schemas.microsoft.com/office/drawing/2014/main" id="{68128B67-4A95-4AEF-B720-6A9BE546CCAA}"/>
+              </a:ext>
+            </a:extLst>
+          </p:cNvPr>
+          <p:cNvSpPr txBox="1"/>
+          <p:nvPr/>
+        </p:nvSpPr>
+        <p:spPr>
+          <a:xfrm>
+            <a:off x="2864094" y="4481121"/>
+            <a:ext cx="6220558" cy="348813"/>
+          </a:xfrm>
+          <a:prstGeom prst="rect">
+            <a:avLst/>
+          </a:prstGeom>
+          <a:noFill/>
+        </p:spPr>
+        <p:txBody>
+          <a:bodyPr wrap="square">
+            <a:spAutoFit/>
+          </a:bodyPr>
+          <a:lstStyle/>
+          <a:p>
+            <a:pPr marL="228600" lvl="0" indent="-228600" algn="l" rtl="0">
+              <a:lnSpc>
+                <a:spcPts val="2025"/>
+              </a:lnSpc>
+              <a:buFont typeface="Symbol"/>
+              <a:buChar char="•"/>
+            </a:pPr>
+            <a:r>
+              <a:rPr lang="hu-HU" sz="1800" b="1" i="0" dirty="0">
+                <a:latin typeface="Arial"/>
+                <a:ea typeface="Arial"/>
+                <a:cs typeface="Arial"/>
+              </a:rPr>
+              <a:t>Technológiai környezet:</a:t>
+            </a:r>
+            <a:r>
+              <a:rPr lang="hu-HU" sz="1800" b="0" i="0" dirty="0">
+                <a:latin typeface="Arial"/>
+                <a:ea typeface="Arial"/>
+                <a:cs typeface="Arial"/>
+              </a:rPr>
+              <a:t> </a:t>
+            </a:r>
+          </a:p>
+        </p:txBody>
+      </p:sp>
+      <p:sp>
+        <p:nvSpPr>
+          <p:cNvPr id="15" name="Szövegdoboz 14">
+            <a:extLst>
+              <a:ext uri="{FF2B5EF4-FFF2-40B4-BE49-F238E27FC236}">
+                <a16:creationId xmlns:a16="http://schemas.microsoft.com/office/drawing/2014/main" id="{8AFFED19-2B67-4D67-BCCE-D7DADCAF3C22}"/>
+              </a:ext>
+            </a:extLst>
+          </p:cNvPr>
+          <p:cNvSpPr txBox="1"/>
+          <p:nvPr/>
+        </p:nvSpPr>
+        <p:spPr>
+          <a:xfrm>
+            <a:off x="2864094" y="2504968"/>
+            <a:ext cx="6220558" cy="326371"/>
+          </a:xfrm>
+          <a:prstGeom prst="rect">
+            <a:avLst/>
+          </a:prstGeom>
+          <a:noFill/>
+        </p:spPr>
+        <p:txBody>
+          <a:bodyPr wrap="square">
+            <a:spAutoFit/>
+          </a:bodyPr>
+          <a:lstStyle/>
+          <a:p>
+            <a:pPr algn="l" rtl="0">
+              <a:lnSpc>
+                <a:spcPts val="1781"/>
+              </a:lnSpc>
+            </a:pPr>
+            <a:r>
+              <a:rPr lang="hu-HU" sz="1800" b="1" i="0" dirty="0">
+                <a:latin typeface="Calibri Light"/>
+                <a:ea typeface="Calibri Light"/>
+                <a:cs typeface="Calibri Light"/>
+              </a:rPr>
+              <a:t>Alap információk</a:t>
+            </a:r>
+            <a:r>
+              <a:rPr lang="hu-HU" sz="1800" b="1" dirty="0">
+                <a:latin typeface="Calibri Light"/>
+                <a:ea typeface="Calibri Light"/>
+                <a:cs typeface="Calibri Light"/>
+              </a:rPr>
+              <a:t>:</a:t>
+            </a:r>
+            <a:endParaRPr lang="hu-HU" sz="1800" b="1" i="0" dirty="0">
+              <a:latin typeface="Calibri Light"/>
+              <a:ea typeface="Calibri Light"/>
+              <a:cs typeface="Calibri Light"/>
+            </a:endParaRPr>
           </a:p>
         </p:txBody>
       </p:sp>
     </p:spTree>
     <p:extLst>
       <p:ext uri="{BB962C8B-B14F-4D97-AF65-F5344CB8AC3E}">
-        <p14:creationId xmlns:p14="http://schemas.microsoft.com/office/powerpoint/2010/main" val="717366566"/>
+        <p14:creationId xmlns:p14="http://schemas.microsoft.com/office/powerpoint/2010/main" val="3919525108"/>
       </p:ext>
     </p:extLst>
   </p:cSld>
   <p:clrMapOvr>
     <a:masterClrMapping/>
   </p:clrMapOvr>
+  <p:transition spd="slow">
+    <p:cover/>
+  </p:transition>
+</p:sld>
+</file>
+
+<file path=ppt/slides/slide8.xml><?xml version="1.0" encoding="utf-8"?>
+<p:sld xmlns:a="http://schemas.openxmlformats.org/drawingml/2006/main" xmlns:r="http://schemas.openxmlformats.org/officeDocument/2006/relationships" xmlns:p="http://schemas.openxmlformats.org/presentationml/2006/main">
+  <p:cSld>
+    <p:bg>
+      <p:bgPr>
+        <a:solidFill>
+          <a:schemeClr val="bg1"/>
+        </a:solidFill>
+        <a:effectLst/>
+      </p:bgPr>
+    </p:bg>
+    <p:spTree>
+      <p:nvGrpSpPr>
+        <p:cNvPr id="1" name=""/>
+        <p:cNvGrpSpPr/>
+        <p:nvPr/>
+      </p:nvGrpSpPr>
+      <p:grpSpPr>
+        <a:xfrm>
+          <a:off x="0" y="0"/>
+          <a:ext cx="0" cy="0"/>
+          <a:chOff x="0" y="0"/>
+          <a:chExt cx="0" cy="0"/>
+        </a:xfrm>
+      </p:grpSpPr>
+      <p:sp>
+        <p:nvSpPr>
+          <p:cNvPr id="3" name="Tartalom helye 2">
+            <a:extLst>
+              <a:ext uri="{FF2B5EF4-FFF2-40B4-BE49-F238E27FC236}">
+                <a16:creationId xmlns:a16="http://schemas.microsoft.com/office/drawing/2014/main" id="{09BF441A-BC39-4BB6-A46F-24A002D8C126}"/>
+              </a:ext>
+            </a:extLst>
+          </p:cNvPr>
+          <p:cNvSpPr>
+            <a:spLocks noGrp="1"/>
+          </p:cNvSpPr>
+          <p:nvPr>
+            <p:ph idx="1"/>
+          </p:nvPr>
+        </p:nvSpPr>
+        <p:spPr>
+          <a:xfrm>
+            <a:off x="3045803" y="145902"/>
+            <a:ext cx="10515600" cy="4351338"/>
+          </a:xfrm>
+        </p:spPr>
+        <p:txBody>
+          <a:bodyPr/>
+          <a:lstStyle/>
+          <a:p>
+            <a:pPr marL="0" indent="0" algn="l" rtl="0">
+              <a:lnSpc>
+                <a:spcPts val="1781"/>
+              </a:lnSpc>
+              <a:buNone/>
+            </a:pPr>
+            <a:r>
+              <a:rPr lang="hu-HU" sz="2400" b="1" u="sng" dirty="0">
+                <a:latin typeface="Calibri Light"/>
+                <a:ea typeface="Calibri Light"/>
+                <a:cs typeface="Calibri Light"/>
+              </a:rPr>
+              <a:t>T</a:t>
+            </a:r>
+            <a:r>
+              <a:rPr lang="hu-HU" sz="2400" b="1" i="0" u="sng" dirty="0">
+                <a:latin typeface="Calibri Light"/>
+                <a:ea typeface="Calibri Light"/>
+                <a:cs typeface="Calibri Light"/>
+              </a:rPr>
+              <a:t>elepített szolgáltatások és egyéb alkalmazások </a:t>
+            </a:r>
+          </a:p>
+          <a:p>
+            <a:endParaRPr lang="hu-HU" dirty="0"/>
+          </a:p>
+          <a:p>
+            <a:endParaRPr lang="hu-HU" dirty="0"/>
+          </a:p>
+        </p:txBody>
+      </p:sp>
+      <p:sp>
+        <p:nvSpPr>
+          <p:cNvPr id="5" name="Szövegdoboz 4">
+            <a:extLst>
+              <a:ext uri="{FF2B5EF4-FFF2-40B4-BE49-F238E27FC236}">
+                <a16:creationId xmlns:a16="http://schemas.microsoft.com/office/drawing/2014/main" id="{92630321-3779-4865-AD03-A3592E8467A8}"/>
+              </a:ext>
+            </a:extLst>
+          </p:cNvPr>
+          <p:cNvSpPr txBox="1"/>
+          <p:nvPr/>
+        </p:nvSpPr>
+        <p:spPr>
+          <a:xfrm>
+            <a:off x="3045803" y="2941714"/>
+            <a:ext cx="6097464" cy="348813"/>
+          </a:xfrm>
+          <a:prstGeom prst="rect">
+            <a:avLst/>
+          </a:prstGeom>
+          <a:noFill/>
+        </p:spPr>
+        <p:txBody>
+          <a:bodyPr wrap="square">
+            <a:spAutoFit/>
+          </a:bodyPr>
+          <a:lstStyle/>
+          <a:p>
+            <a:pPr marL="228600" lvl="0" indent="-228600" algn="l" rtl="0">
+              <a:lnSpc>
+                <a:spcPts val="2025"/>
+              </a:lnSpc>
+              <a:buFont typeface="Symbol"/>
+              <a:buChar char="•"/>
+            </a:pPr>
+            <a:r>
+              <a:rPr lang="hu-HU" sz="1800" b="1" i="0" dirty="0">
+                <a:latin typeface="Arial"/>
+                <a:ea typeface="Arial"/>
+                <a:cs typeface="Arial"/>
+              </a:rPr>
+              <a:t>Webszerver és Tárhely:</a:t>
+            </a:r>
+            <a:endParaRPr lang="hu-HU" sz="1800" b="0" i="0" dirty="0">
+              <a:latin typeface="Arial"/>
+              <a:ea typeface="Arial"/>
+              <a:cs typeface="Arial"/>
+            </a:endParaRPr>
+          </a:p>
+        </p:txBody>
+      </p:sp>
+      <p:sp>
+        <p:nvSpPr>
+          <p:cNvPr id="7" name="Szövegdoboz 6">
+            <a:extLst>
+              <a:ext uri="{FF2B5EF4-FFF2-40B4-BE49-F238E27FC236}">
+                <a16:creationId xmlns:a16="http://schemas.microsoft.com/office/drawing/2014/main" id="{E1451CBA-C99C-478C-8D9D-1E35B9E15F39}"/>
+              </a:ext>
+            </a:extLst>
+          </p:cNvPr>
+          <p:cNvSpPr txBox="1"/>
+          <p:nvPr/>
+        </p:nvSpPr>
+        <p:spPr>
+          <a:xfrm>
+            <a:off x="3045803" y="4241958"/>
+            <a:ext cx="6097464" cy="861774"/>
+          </a:xfrm>
+          <a:prstGeom prst="rect">
+            <a:avLst/>
+          </a:prstGeom>
+          <a:noFill/>
+        </p:spPr>
+        <p:txBody>
+          <a:bodyPr wrap="square">
+            <a:spAutoFit/>
+          </a:bodyPr>
+          <a:lstStyle/>
+          <a:p>
+            <a:pPr marL="228600" lvl="0" indent="-228600" algn="l" rtl="0">
+              <a:lnSpc>
+                <a:spcPts val="2025"/>
+              </a:lnSpc>
+              <a:buFont typeface="Symbol"/>
+              <a:buChar char="•"/>
+            </a:pPr>
+            <a:r>
+              <a:rPr lang="hu-HU" sz="1800" b="1" i="0" dirty="0">
+                <a:latin typeface="Arial"/>
+                <a:ea typeface="Arial"/>
+                <a:cs typeface="Arial"/>
+              </a:rPr>
+              <a:t>Képoptimalizáló modul:</a:t>
+            </a:r>
+            <a:r>
+              <a:rPr lang="hu-HU" sz="1800" b="0" i="0" dirty="0">
+                <a:latin typeface="Arial"/>
+                <a:ea typeface="Arial"/>
+                <a:cs typeface="Arial"/>
+              </a:rPr>
+              <a:t> A feltöltött nagy felbontású referenciaképek automatikus tömörítése a gyors oldalbetöltésért. </a:t>
+            </a:r>
+          </a:p>
+        </p:txBody>
+      </p:sp>
+      <p:sp>
+        <p:nvSpPr>
+          <p:cNvPr id="9" name="Szövegdoboz 8">
+            <a:extLst>
+              <a:ext uri="{FF2B5EF4-FFF2-40B4-BE49-F238E27FC236}">
+                <a16:creationId xmlns:a16="http://schemas.microsoft.com/office/drawing/2014/main" id="{AF8A34B3-5AFB-41B5-AE3E-E36BB5570366}"/>
+              </a:ext>
+            </a:extLst>
+          </p:cNvPr>
+          <p:cNvSpPr txBox="1"/>
+          <p:nvPr/>
+        </p:nvSpPr>
+        <p:spPr>
+          <a:xfrm>
+            <a:off x="3045803" y="1459797"/>
+            <a:ext cx="6097464" cy="861774"/>
+          </a:xfrm>
+          <a:prstGeom prst="rect">
+            <a:avLst/>
+          </a:prstGeom>
+          <a:noFill/>
+        </p:spPr>
+        <p:txBody>
+          <a:bodyPr wrap="square">
+            <a:spAutoFit/>
+          </a:bodyPr>
+          <a:lstStyle/>
+          <a:p>
+            <a:pPr marL="228600" lvl="0" indent="-228600" algn="l" rtl="0">
+              <a:lnSpc>
+                <a:spcPts val="2025"/>
+              </a:lnSpc>
+              <a:buFont typeface="Symbol"/>
+              <a:buChar char="•"/>
+            </a:pPr>
+            <a:r>
+              <a:rPr lang="hu-HU" sz="1800" b="1" i="0" dirty="0">
+                <a:latin typeface="Arial"/>
+                <a:ea typeface="Arial"/>
+                <a:cs typeface="Arial"/>
+              </a:rPr>
+              <a:t>Email / Értesítési rendszer:</a:t>
+            </a:r>
+            <a:r>
+              <a:rPr lang="hu-HU" sz="1800" b="0" i="0" dirty="0">
+                <a:latin typeface="Arial"/>
+                <a:ea typeface="Arial"/>
+                <a:cs typeface="Arial"/>
+              </a:rPr>
+              <a:t> Azonnali e-mail értesítés küldése a műhelynek, ha egy ügyfél árajánlatot kér a kalkulátoron keresztül. </a:t>
+            </a:r>
+          </a:p>
+        </p:txBody>
+      </p:sp>
+    </p:spTree>
+    <p:extLst>
+      <p:ext uri="{BB962C8B-B14F-4D97-AF65-F5344CB8AC3E}">
+        <p14:creationId xmlns:p14="http://schemas.microsoft.com/office/powerpoint/2010/main" val="2648066028"/>
+      </p:ext>
+    </p:extLst>
+  </p:cSld>
+  <p:clrMapOvr>
+    <a:masterClrMapping/>
+  </p:clrMapOvr>
+  <p:transition spd="slow">
+    <p:cover/>
+  </p:transition>
+</p:sld>
+</file>
+
+<file path=ppt/slides/slide9.xml><?xml version="1.0" encoding="utf-8"?>
+<p:sld xmlns:a="http://schemas.openxmlformats.org/drawingml/2006/main" xmlns:r="http://schemas.openxmlformats.org/officeDocument/2006/relationships" xmlns:p="http://schemas.openxmlformats.org/presentationml/2006/main">
+  <p:cSld>
+    <p:bg>
+      <p:bgPr>
+        <a:solidFill>
+          <a:schemeClr val="bg1"/>
+        </a:solidFill>
+        <a:effectLst/>
+      </p:bgPr>
+    </p:bg>
+    <p:spTree>
+      <p:nvGrpSpPr>
+        <p:cNvPr id="1" name=""/>
+        <p:cNvGrpSpPr/>
+        <p:nvPr/>
+      </p:nvGrpSpPr>
+      <p:grpSpPr>
+        <a:xfrm>
+          <a:off x="0" y="0"/>
+          <a:ext cx="0" cy="0"/>
+          <a:chOff x="0" y="0"/>
+          <a:chExt cx="0" cy="0"/>
+        </a:xfrm>
+      </p:grpSpPr>
+      <p:sp>
+        <p:nvSpPr>
+          <p:cNvPr id="2" name="Cím 1">
+            <a:extLst>
+              <a:ext uri="{FF2B5EF4-FFF2-40B4-BE49-F238E27FC236}">
+                <a16:creationId xmlns:a16="http://schemas.microsoft.com/office/drawing/2014/main" id="{114EA305-5E25-48F8-8629-ECE88D7D3D9F}"/>
+              </a:ext>
+            </a:extLst>
+          </p:cNvPr>
+          <p:cNvSpPr>
+            <a:spLocks noGrp="1"/>
+          </p:cNvSpPr>
+          <p:nvPr>
+            <p:ph type="title"/>
+          </p:nvPr>
+        </p:nvSpPr>
+        <p:spPr>
+          <a:xfrm>
+            <a:off x="2532638" y="254524"/>
+            <a:ext cx="10515600" cy="958362"/>
+          </a:xfrm>
+        </p:spPr>
+        <p:txBody>
+          <a:bodyPr>
+            <a:normAutofit/>
+          </a:bodyPr>
+          <a:lstStyle/>
+          <a:p>
+            <a:r>
+              <a:rPr lang="hu-HU" sz="2400" b="1" u="sng" dirty="0">
+                <a:latin typeface="Calibri Light"/>
+                <a:ea typeface="Calibri Light"/>
+                <a:cs typeface="Calibri Light"/>
+              </a:rPr>
+              <a:t>A rendszer felhasználói fiókok és csoportjai</a:t>
+            </a:r>
+            <a:r>
+              <a:rPr lang="en-US" sz="2400" b="1" u="sng" dirty="0">
+                <a:latin typeface="Calibri Light"/>
+                <a:ea typeface="Calibri Light"/>
+                <a:cs typeface="Calibri Light"/>
+              </a:rPr>
+              <a:t> </a:t>
+            </a:r>
+            <a:br>
+              <a:rPr lang="en-US" sz="4400" b="1" u="sng" dirty="0">
+                <a:latin typeface="Calibri Light"/>
+                <a:ea typeface="Calibri Light"/>
+                <a:cs typeface="Calibri Light"/>
+              </a:rPr>
+            </a:br>
+            <a:endParaRPr lang="hu-HU" dirty="0"/>
+          </a:p>
+        </p:txBody>
+      </p:sp>
+      <p:sp>
+        <p:nvSpPr>
+          <p:cNvPr id="5" name="Szövegdoboz 4">
+            <a:extLst>
+              <a:ext uri="{FF2B5EF4-FFF2-40B4-BE49-F238E27FC236}">
+                <a16:creationId xmlns:a16="http://schemas.microsoft.com/office/drawing/2014/main" id="{644C47BA-1FEF-491A-BD21-85DA71097912}"/>
+              </a:ext>
+            </a:extLst>
+          </p:cNvPr>
+          <p:cNvSpPr txBox="1"/>
+          <p:nvPr/>
+        </p:nvSpPr>
+        <p:spPr>
+          <a:xfrm>
+            <a:off x="6096000" y="2439724"/>
+            <a:ext cx="6137030" cy="1374735"/>
+          </a:xfrm>
+          <a:prstGeom prst="rect">
+            <a:avLst/>
+          </a:prstGeom>
+          <a:noFill/>
+        </p:spPr>
+        <p:txBody>
+          <a:bodyPr wrap="square">
+            <a:spAutoFit/>
+          </a:bodyPr>
+          <a:lstStyle/>
+          <a:p>
+            <a:pPr marL="228600" indent="-228600">
+              <a:lnSpc>
+                <a:spcPts val="2025"/>
+              </a:lnSpc>
+              <a:buFont typeface="Symbol,sans-serif"/>
+              <a:buChar char="•"/>
+            </a:pPr>
+            <a:r>
+              <a:rPr lang="hu-HU" b="1" dirty="0">
+                <a:latin typeface="Arial"/>
+                <a:cs typeface="Arial"/>
+              </a:rPr>
+              <a:t>Látogató / Ügyfél:</a:t>
+            </a:r>
+            <a:r>
+              <a:rPr lang="en-US" dirty="0">
+                <a:latin typeface="Arial"/>
+                <a:cs typeface="Arial"/>
+              </a:rPr>
+              <a:t> </a:t>
+            </a:r>
+          </a:p>
+          <a:p>
+            <a:pPr marL="228600" lvl="1" indent="-228600">
+              <a:lnSpc>
+                <a:spcPts val="2025"/>
+              </a:lnSpc>
+              <a:buFont typeface="Courier New,monospace"/>
+              <a:buChar char="•"/>
+            </a:pPr>
+            <a:r>
+              <a:rPr lang="hu-HU" dirty="0">
+                <a:latin typeface="Arial"/>
+                <a:cs typeface="Arial"/>
+              </a:rPr>
+              <a:t>Böngészheti a szolgáltatásokat és a galériát.</a:t>
+            </a:r>
+            <a:r>
+              <a:rPr lang="en-US" dirty="0">
+                <a:latin typeface="Arial"/>
+                <a:cs typeface="Arial"/>
+              </a:rPr>
+              <a:t> </a:t>
+            </a:r>
+          </a:p>
+          <a:p>
+            <a:pPr marL="228600" lvl="1" indent="-228600">
+              <a:lnSpc>
+                <a:spcPts val="2025"/>
+              </a:lnSpc>
+              <a:buFont typeface="Courier New,monospace"/>
+              <a:buChar char="•"/>
+            </a:pPr>
+            <a:r>
+              <a:rPr lang="hu-HU" dirty="0">
+                <a:latin typeface="Arial"/>
+                <a:cs typeface="Arial"/>
+              </a:rPr>
+              <a:t>Használhatja az árajánlat-kalkulátort regisztráció nélkül is.</a:t>
+            </a:r>
+            <a:r>
+              <a:rPr lang="en-US" dirty="0">
+                <a:latin typeface="Arial"/>
+                <a:cs typeface="Arial"/>
+              </a:rPr>
+              <a:t> </a:t>
+            </a:r>
+          </a:p>
+          <a:p>
+            <a:pPr marL="228600" lvl="1" indent="-228600">
+              <a:lnSpc>
+                <a:spcPts val="2025"/>
+              </a:lnSpc>
+              <a:buFont typeface="Courier New,monospace"/>
+              <a:buChar char="•"/>
+            </a:pPr>
+            <a:r>
+              <a:rPr lang="hu-HU" dirty="0">
+                <a:latin typeface="Arial"/>
+                <a:cs typeface="Arial"/>
+              </a:rPr>
+              <a:t>Ajánlatot küldhet be a megadott adataival.</a:t>
+            </a:r>
+            <a:r>
+              <a:rPr lang="en-US" dirty="0">
+                <a:latin typeface="Arial"/>
+                <a:cs typeface="Arial"/>
+              </a:rPr>
+              <a:t> </a:t>
+            </a:r>
+          </a:p>
+        </p:txBody>
+      </p:sp>
+      <p:sp>
+        <p:nvSpPr>
+          <p:cNvPr id="7" name="Szövegdoboz 6">
+            <a:extLst>
+              <a:ext uri="{FF2B5EF4-FFF2-40B4-BE49-F238E27FC236}">
+                <a16:creationId xmlns:a16="http://schemas.microsoft.com/office/drawing/2014/main" id="{46141623-A37F-4210-BD9B-6534B7141F4F}"/>
+              </a:ext>
+            </a:extLst>
+          </p:cNvPr>
+          <p:cNvSpPr txBox="1"/>
+          <p:nvPr/>
+        </p:nvSpPr>
+        <p:spPr>
+          <a:xfrm>
+            <a:off x="70338" y="2439724"/>
+            <a:ext cx="6137030" cy="2164695"/>
+          </a:xfrm>
+          <a:prstGeom prst="rect">
+            <a:avLst/>
+          </a:prstGeom>
+          <a:noFill/>
+        </p:spPr>
+        <p:txBody>
+          <a:bodyPr wrap="square">
+            <a:spAutoFit/>
+          </a:bodyPr>
+          <a:lstStyle/>
+          <a:p>
+            <a:pPr marL="228600" indent="-228600">
+              <a:lnSpc>
+                <a:spcPts val="2025"/>
+              </a:lnSpc>
+              <a:buFont typeface="Symbol,sans-serif"/>
+              <a:buChar char="•"/>
+            </a:pPr>
+            <a:r>
+              <a:rPr lang="hu-HU" b="1" dirty="0">
+                <a:latin typeface="Arial"/>
+                <a:cs typeface="Arial"/>
+              </a:rPr>
+              <a:t>Adminisztrátor (</a:t>
+            </a:r>
+            <a:r>
+              <a:rPr lang="hu-HU" b="1" dirty="0" err="1">
+                <a:latin typeface="Arial"/>
+                <a:cs typeface="Arial"/>
+              </a:rPr>
+              <a:t>Vexora</a:t>
+            </a:r>
+            <a:r>
+              <a:rPr lang="hu-HU" b="1" dirty="0">
+                <a:latin typeface="Arial"/>
+                <a:cs typeface="Arial"/>
+              </a:rPr>
+              <a:t> Műhelyvezető):</a:t>
+            </a:r>
+            <a:r>
+              <a:rPr lang="en-US" dirty="0">
+                <a:latin typeface="Arial"/>
+                <a:cs typeface="Arial"/>
+              </a:rPr>
+              <a:t> </a:t>
+            </a:r>
+          </a:p>
+          <a:p>
+            <a:endParaRPr lang="en-US" dirty="0">
+              <a:ea typeface="Calibri"/>
+              <a:cs typeface="Calibri"/>
+            </a:endParaRPr>
+          </a:p>
+          <a:p>
+            <a:pPr marL="228600" lvl="1" indent="-228600">
+              <a:lnSpc>
+                <a:spcPts val="2025"/>
+              </a:lnSpc>
+              <a:buFont typeface="Courier New,monospace"/>
+              <a:buChar char="•"/>
+            </a:pPr>
+            <a:r>
+              <a:rPr lang="hu-HU" dirty="0">
+                <a:latin typeface="Arial"/>
+                <a:cs typeface="Arial"/>
+              </a:rPr>
+              <a:t>Kezelheti a kalkulátor árait, járműkategóriáit és szolgáltatásait a háttérben (CMS felületen keresztül).</a:t>
+            </a:r>
+            <a:r>
+              <a:rPr lang="en-US" dirty="0">
+                <a:latin typeface="Arial"/>
+                <a:cs typeface="Arial"/>
+              </a:rPr>
+              <a:t> </a:t>
+            </a:r>
+          </a:p>
+          <a:p>
+            <a:pPr marL="228600" lvl="1" indent="-228600">
+              <a:lnSpc>
+                <a:spcPts val="2025"/>
+              </a:lnSpc>
+              <a:buFont typeface="Courier New,monospace"/>
+              <a:buChar char="•"/>
+            </a:pPr>
+            <a:r>
+              <a:rPr lang="hu-HU" dirty="0">
+                <a:latin typeface="Arial"/>
+                <a:cs typeface="Arial"/>
+              </a:rPr>
+              <a:t>Megtekintheti és kezelheti a weboldalon </a:t>
+            </a:r>
+            <a:r>
+              <a:rPr lang="hu-HU" dirty="0" err="1">
+                <a:latin typeface="Arial"/>
+                <a:cs typeface="Arial"/>
+              </a:rPr>
+              <a:t>beértkezett</a:t>
+            </a:r>
+            <a:r>
+              <a:rPr lang="hu-HU" dirty="0">
+                <a:latin typeface="Arial"/>
+                <a:cs typeface="Arial"/>
+              </a:rPr>
+              <a:t> árajánlatkéréseket.</a:t>
+            </a:r>
+            <a:r>
+              <a:rPr lang="en-US" dirty="0">
+                <a:latin typeface="Arial"/>
+                <a:cs typeface="Arial"/>
+              </a:rPr>
+              <a:t> </a:t>
+            </a:r>
+          </a:p>
+          <a:p>
+            <a:pPr marL="228600" lvl="1" indent="-228600">
+              <a:lnSpc>
+                <a:spcPts val="2025"/>
+              </a:lnSpc>
+              <a:buFont typeface="Courier New,monospace"/>
+              <a:buChar char="•"/>
+            </a:pPr>
+            <a:r>
+              <a:rPr lang="hu-HU" dirty="0">
+                <a:latin typeface="Arial"/>
+                <a:cs typeface="Arial"/>
+              </a:rPr>
+              <a:t>Feltöltheti a friss "előtte-utána" fotókat a referenciák közé.</a:t>
+            </a:r>
+            <a:r>
+              <a:rPr lang="en-US" dirty="0">
+                <a:latin typeface="Arial"/>
+                <a:cs typeface="Arial"/>
+              </a:rPr>
+              <a:t> </a:t>
+            </a:r>
+          </a:p>
+        </p:txBody>
+      </p:sp>
+    </p:spTree>
+    <p:extLst>
+      <p:ext uri="{BB962C8B-B14F-4D97-AF65-F5344CB8AC3E}">
+        <p14:creationId xmlns:p14="http://schemas.microsoft.com/office/powerpoint/2010/main" val="2606705777"/>
+      </p:ext>
+    </p:extLst>
+  </p:cSld>
+  <p:clrMapOvr>
+    <a:masterClrMapping/>
+  </p:clrMapOvr>
+  <p:transition spd="slow">
+    <p:cover/>
+  </p:transition>
 </p:sld>
 </file>
 

--- a/Autó Kozmetika orai DB.pptx
+++ b/Autó Kozmetika orai DB.pptx
@@ -5,7 +5,7 @@
     <p:sldMasterId id="2147483880" r:id="rId1"/>
   </p:sldMasterIdLst>
   <p:notesMasterIdLst>
-    <p:notesMasterId r:id="rId24"/>
+    <p:notesMasterId r:id="rId25"/>
   </p:notesMasterIdLst>
   <p:sldIdLst>
     <p:sldId id="256" r:id="rId2"/>
@@ -30,6 +30,7 @@
     <p:sldId id="275" r:id="rId21"/>
     <p:sldId id="276" r:id="rId22"/>
     <p:sldId id="277" r:id="rId23"/>
+    <p:sldId id="278" r:id="rId24"/>
   </p:sldIdLst>
   <p:sldSz cx="12192000" cy="6858000"/>
   <p:notesSz cx="6858000" cy="9144000"/>
@@ -13405,7 +13406,18 @@
           <a:bodyPr/>
           <a:lstStyle/>
           <a:p>
-            <a:endParaRPr lang="hu-HU"/>
+            <a:r>
+              <a:rPr lang="hu-HU" dirty="0"/>
+              <a:t>Visual </a:t>
+            </a:r>
+            <a:r>
+              <a:rPr lang="hu-HU" dirty="0" err="1"/>
+              <a:t>studio</a:t>
+            </a:r>
+            <a:r>
+              <a:rPr lang="hu-HU" dirty="0"/>
+              <a:t>: c#</a:t>
+            </a:r>
           </a:p>
         </p:txBody>
       </p:sp>
@@ -13704,7 +13716,34 @@
           <a:bodyPr/>
           <a:lstStyle/>
           <a:p>
-            <a:endParaRPr lang="hu-HU"/>
+            <a:pPr marL="0" indent="0">
+              <a:buNone/>
+            </a:pPr>
+            <a:r>
+              <a:rPr lang="hu-HU" dirty="0"/>
+              <a:t>Visual </a:t>
+            </a:r>
+            <a:r>
+              <a:rPr lang="hu-HU" dirty="0" err="1"/>
+              <a:t>studio</a:t>
+            </a:r>
+            <a:r>
+              <a:rPr lang="hu-HU" dirty="0"/>
+              <a:t> </a:t>
+            </a:r>
+            <a:r>
+              <a:rPr lang="hu-HU" dirty="0" err="1"/>
+              <a:t>code</a:t>
+            </a:r>
+            <a:r>
+              <a:rPr lang="hu-HU" dirty="0"/>
+              <a:t>: </a:t>
+            </a:r>
+            <a:r>
+              <a:rPr lang="hu-HU" dirty="0" err="1"/>
+              <a:t>html,javascript,css,bootstrap</a:t>
+            </a:r>
+            <a:endParaRPr lang="hu-HU" dirty="0"/>
           </a:p>
         </p:txBody>
       </p:sp>
@@ -13803,7 +13842,14 @@
           <a:bodyPr/>
           <a:lstStyle/>
           <a:p>
-            <a:endParaRPr lang="hu-HU"/>
+            <a:r>
+              <a:rPr lang="hu-HU" dirty="0" err="1"/>
+              <a:t>MariaDB</a:t>
+            </a:r>
+            <a:r>
+              <a:rPr lang="hu-HU" dirty="0"/>
+              <a:t>:</a:t>
+            </a:r>
           </a:p>
         </p:txBody>
       </p:sp>
@@ -15066,6 +15112,105 @@
   <p:clrMapOvr>
     <a:masterClrMapping/>
   </p:clrMapOvr>
+  <p:transition spd="slow">
+    <p:cover/>
+  </p:transition>
+</p:sld>
+</file>
+
+<file path=ppt/slides/slide23.xml><?xml version="1.0" encoding="utf-8"?>
+<p:sld xmlns:a="http://schemas.openxmlformats.org/drawingml/2006/main" xmlns:r="http://schemas.openxmlformats.org/officeDocument/2006/relationships" xmlns:p="http://schemas.openxmlformats.org/presentationml/2006/main">
+  <p:cSld>
+    <p:bg>
+      <p:bgPr>
+        <a:solidFill>
+          <a:schemeClr val="bg1"/>
+        </a:solidFill>
+        <a:effectLst/>
+      </p:bgPr>
+    </p:bg>
+    <p:spTree>
+      <p:nvGrpSpPr>
+        <p:cNvPr id="1" name=""/>
+        <p:cNvGrpSpPr/>
+        <p:nvPr/>
+      </p:nvGrpSpPr>
+      <p:grpSpPr>
+        <a:xfrm>
+          <a:off x="0" y="0"/>
+          <a:ext cx="0" cy="0"/>
+          <a:chOff x="0" y="0"/>
+          <a:chExt cx="0" cy="0"/>
+        </a:xfrm>
+      </p:grpSpPr>
+      <p:sp>
+        <p:nvSpPr>
+          <p:cNvPr id="2" name="Cím 1">
+            <a:extLst>
+              <a:ext uri="{FF2B5EF4-FFF2-40B4-BE49-F238E27FC236}">
+                <a16:creationId xmlns:a16="http://schemas.microsoft.com/office/drawing/2014/main" id="{1547672C-9656-472B-89CA-47BD6CDD2CA2}"/>
+              </a:ext>
+            </a:extLst>
+          </p:cNvPr>
+          <p:cNvSpPr>
+            <a:spLocks noGrp="1"/>
+          </p:cNvSpPr>
+          <p:nvPr>
+            <p:ph type="title"/>
+          </p:nvPr>
+        </p:nvSpPr>
+        <p:spPr>
+          <a:noFill/>
+        </p:spPr>
+        <p:txBody>
+          <a:bodyPr/>
+          <a:lstStyle/>
+          <a:p>
+            <a:r>
+              <a:rPr lang="hu-HU" dirty="0"/>
+              <a:t>Publikálás</a:t>
+            </a:r>
+          </a:p>
+        </p:txBody>
+      </p:sp>
+      <p:sp>
+        <p:nvSpPr>
+          <p:cNvPr id="3" name="Tartalom helye 2">
+            <a:extLst>
+              <a:ext uri="{FF2B5EF4-FFF2-40B4-BE49-F238E27FC236}">
+                <a16:creationId xmlns:a16="http://schemas.microsoft.com/office/drawing/2014/main" id="{3BC85EAE-784B-44AC-BAB2-FEBD0EAF3099}"/>
+              </a:ext>
+            </a:extLst>
+          </p:cNvPr>
+          <p:cNvSpPr>
+            <a:spLocks noGrp="1"/>
+          </p:cNvSpPr>
+          <p:nvPr>
+            <p:ph idx="1"/>
+          </p:nvPr>
+        </p:nvSpPr>
+        <p:spPr/>
+        <p:txBody>
+          <a:bodyPr/>
+          <a:lstStyle/>
+          <a:p>
+            <a:endParaRPr lang="hu-HU"/>
+          </a:p>
+        </p:txBody>
+      </p:sp>
+    </p:spTree>
+    <p:extLst>
+      <p:ext uri="{BB962C8B-B14F-4D97-AF65-F5344CB8AC3E}">
+        <p14:creationId xmlns:p14="http://schemas.microsoft.com/office/powerpoint/2010/main" val="4003631914"/>
+      </p:ext>
+    </p:extLst>
+  </p:cSld>
+  <p:clrMapOvr>
+    <a:masterClrMapping/>
+  </p:clrMapOvr>
+  <p:transition spd="slow">
+    <p:cover/>
+  </p:transition>
 </p:sld>
 </file>
 
